--- a/content/05-teaching-resources/slides/core/20-stock-and-asset-management.pptx
+++ b/content/05-teaching-resources/slides/core/20-stock-and-asset-management.pptx
@@ -14,6 +14,10 @@
     <p:sldId id="262" r:id="rId14"/>
     <p:sldId id="263" r:id="rId15"/>
     <p:sldId id="264" r:id="rId16"/>
+    <p:sldId id="265" r:id="rId17"/>
+    <p:sldId id="266" r:id="rId18"/>
+    <p:sldId id="267" r:id="rId19"/>
+    <p:sldId id="268" r:id="rId20"/>
   </p:sldIdLst>
   <p:sldSz cx="12191695" cy="6858000" type="screen4x3"/>
   <p:notesSz cx="6858000" cy="9144000"/>
@@ -510,7 +514,22 @@
           <a:lstStyle/>
           <a:p>
             <a:r>
-              <a:t>Give students a few minutes to answer on mini whiteboards or paper, then reveal the answers on the next slide.</a:t>
+              <a:t>Answers:</a:t>
+            </a:r>
+          </a:p>
+          <a:p>
+            <a:r>
+              <a:t>1. Supply disruption stops production.</a:t>
+            </a:r>
+          </a:p>
+          <a:p>
+            <a:r>
+              <a:t>2. For customised or low-volume products.</a:t>
+            </a:r>
+          </a:p>
+          <a:p>
+            <a:r>
+              <a:t>3. What materials are needed and when.</a:t>
             </a:r>
           </a:p>
         </p:txBody>
@@ -580,7 +599,22 @@
           <a:lstStyle/>
           <a:p>
             <a:r>
-              <a:t>Talk through any answers the class found difficult.</a:t>
+              <a:t>Answers:</a:t>
+            </a:r>
+          </a:p>
+          <a:p>
+            <a:r>
+              <a:t>1. Plan, acquire, operate and maintain, dispose.</a:t>
+            </a:r>
+          </a:p>
+          <a:p>
+            <a:r>
+              <a:t>2. The stage that limits the whole process's output.</a:t>
+            </a:r>
+          </a:p>
+          <a:p>
+            <a:r>
+              <a:t>3. The purchase price isn't the total cost.</a:t>
             </a:r>
           </a:p>
         </p:txBody>
@@ -606,6 +640,146 @@
 </file>
 
 <file path=ppt/notesSlides/notesSlide3.xml><?xml version="1.0" encoding="utf-8"?>
+<p:notes xmlns:a="http://schemas.openxmlformats.org/drawingml/2006/main" xmlns:p="http://schemas.openxmlformats.org/presentationml/2006/main" xmlns:r="http://schemas.openxmlformats.org/officeDocument/2006/relationships">
+  <p:cSld>
+    <p:spTree>
+      <p:nvGrpSpPr>
+        <p:cNvPr id="1" name=""/>
+        <p:cNvGrpSpPr/>
+        <p:nvPr/>
+      </p:nvGrpSpPr>
+      <p:grpSpPr>
+        <a:xfrm>
+          <a:off x="0" y="0"/>
+          <a:ext cx="0" cy="0"/>
+          <a:chOff x="0" y="0"/>
+          <a:chExt cx="0" cy="0"/>
+        </a:xfrm>
+      </p:grpSpPr>
+      <p:sp>
+        <p:nvSpPr>
+          <p:cNvPr id="2" name="Slide Image Placeholder 1"/>
+          <p:cNvSpPr>
+            <a:spLocks noGrp="1"/>
+          </p:cNvSpPr>
+          <p:nvPr>
+            <p:ph type="sldImg" idx="2"/>
+          </p:nvPr>
+        </p:nvSpPr>
+        <p:spPr/>
+      </p:sp>
+      <p:sp>
+        <p:nvSpPr>
+          <p:cNvPr id="3" name="Notes Placeholder 2"/>
+          <p:cNvSpPr>
+            <a:spLocks noGrp="1"/>
+          </p:cNvSpPr>
+          <p:nvPr>
+            <p:ph type="body" idx="3" sz="quarter"/>
+          </p:nvPr>
+        </p:nvSpPr>
+        <p:spPr/>
+        <p:txBody>
+          <a:bodyPr/>
+          <a:lstStyle/>
+          <a:p>
+            <a:r>
+              <a:t>Give students a few minutes to answer on mini whiteboards or paper, then reveal the answers on the next slide.</a:t>
+            </a:r>
+          </a:p>
+        </p:txBody>
+      </p:sp>
+      <p:sp>
+        <p:nvSpPr>
+          <p:cNvPr id="4" name="Slide Number Placeholder 3"/>
+          <p:cNvSpPr>
+            <a:spLocks noGrp="1"/>
+          </p:cNvSpPr>
+          <p:nvPr>
+            <p:ph type="sldNum" idx="5" sz="quarter"/>
+          </p:nvPr>
+        </p:nvSpPr>
+        <p:spPr/>
+      </p:sp>
+    </p:spTree>
+  </p:cSld>
+  <p:clrMapOvr>
+    <a:masterClrMapping/>
+  </p:clrMapOvr>
+</p:notes>
+</file>
+
+<file path=ppt/notesSlides/notesSlide4.xml><?xml version="1.0" encoding="utf-8"?>
+<p:notes xmlns:a="http://schemas.openxmlformats.org/drawingml/2006/main" xmlns:p="http://schemas.openxmlformats.org/presentationml/2006/main" xmlns:r="http://schemas.openxmlformats.org/officeDocument/2006/relationships">
+  <p:cSld>
+    <p:spTree>
+      <p:nvGrpSpPr>
+        <p:cNvPr id="1" name=""/>
+        <p:cNvGrpSpPr/>
+        <p:nvPr/>
+      </p:nvGrpSpPr>
+      <p:grpSpPr>
+        <a:xfrm>
+          <a:off x="0" y="0"/>
+          <a:ext cx="0" cy="0"/>
+          <a:chOff x="0" y="0"/>
+          <a:chExt cx="0" cy="0"/>
+        </a:xfrm>
+      </p:grpSpPr>
+      <p:sp>
+        <p:nvSpPr>
+          <p:cNvPr id="2" name="Slide Image Placeholder 1"/>
+          <p:cNvSpPr>
+            <a:spLocks noGrp="1"/>
+          </p:cNvSpPr>
+          <p:nvPr>
+            <p:ph type="sldImg" idx="2"/>
+          </p:nvPr>
+        </p:nvSpPr>
+        <p:spPr/>
+      </p:sp>
+      <p:sp>
+        <p:nvSpPr>
+          <p:cNvPr id="3" name="Notes Placeholder 2"/>
+          <p:cNvSpPr>
+            <a:spLocks noGrp="1"/>
+          </p:cNvSpPr>
+          <p:nvPr>
+            <p:ph type="body" idx="3" sz="quarter"/>
+          </p:nvPr>
+        </p:nvSpPr>
+        <p:spPr/>
+        <p:txBody>
+          <a:bodyPr/>
+          <a:lstStyle/>
+          <a:p>
+            <a:r>
+              <a:t>Talk through any answers the class found difficult.</a:t>
+            </a:r>
+          </a:p>
+        </p:txBody>
+      </p:sp>
+      <p:sp>
+        <p:nvSpPr>
+          <p:cNvPr id="4" name="Slide Number Placeholder 3"/>
+          <p:cNvSpPr>
+            <a:spLocks noGrp="1"/>
+          </p:cNvSpPr>
+          <p:nvPr>
+            <p:ph type="sldNum" idx="5" sz="quarter"/>
+          </p:nvPr>
+        </p:nvSpPr>
+        <p:spPr/>
+      </p:sp>
+    </p:spTree>
+  </p:cSld>
+  <p:clrMapOvr>
+    <a:masterClrMapping/>
+  </p:clrMapOvr>
+</p:notes>
+</file>
+
+<file path=ppt/notesSlides/notesSlide5.xml><?xml version="1.0" encoding="utf-8"?>
 <p:notes xmlns:a="http://schemas.openxmlformats.org/drawingml/2006/main" xmlns:p="http://schemas.openxmlformats.org/presentationml/2006/main" xmlns:r="http://schemas.openxmlformats.org/officeDocument/2006/relationships">
   <p:cSld>
     <p:spTree>
@@ -3975,6 +4149,2355 @@
 </p:sld>
 </file>
 
+<file path=ppt/slides/slide10.xml><?xml version="1.0" encoding="utf-8"?>
+<p:sld xmlns:a="http://schemas.openxmlformats.org/drawingml/2006/main" xmlns:p="http://schemas.openxmlformats.org/presentationml/2006/main" xmlns:r="http://schemas.openxmlformats.org/officeDocument/2006/relationships">
+  <p:cSld>
+    <p:bg>
+      <p:bgPr>
+        <a:solidFill>
+          <a:srgbClr val="FFFFFF"/>
+        </a:solidFill>
+        <a:effectLst/>
+      </p:bgPr>
+    </p:bg>
+    <p:spTree>
+      <p:nvGrpSpPr>
+        <p:cNvPr id="1" name=""/>
+        <p:cNvGrpSpPr/>
+        <p:nvPr/>
+      </p:nvGrpSpPr>
+      <p:grpSpPr/>
+      <p:sp>
+        <p:nvSpPr>
+          <p:cNvPr id="2" name="TextBox 1"/>
+          <p:cNvSpPr txBox="1"/>
+          <p:nvPr/>
+        </p:nvSpPr>
+        <p:spPr>
+          <a:xfrm>
+            <a:off x="548640" y="320040"/>
+            <a:ext cx="11094415" cy="274320"/>
+          </a:xfrm>
+          <a:prstGeom prst="rect">
+            <a:avLst/>
+          </a:prstGeom>
+          <a:noFill/>
+        </p:spPr>
+        <p:txBody>
+          <a:bodyPr wrap="square" anchor="t" lIns="0" rIns="0" tIns="0" bIns="0"/>
+          <a:lstStyle/>
+          <a:p>
+            <a:pPr algn="l"/>
+            <a:r>
+              <a:rPr sz="1100" b="1" i="0">
+                <a:solidFill>
+                  <a:srgbClr val="54595D"/>
+                </a:solidFill>
+                <a:latin typeface="Calibri"/>
+              </a:rPr>
+              <a:t>ENGINEERING CORE  ·  Core topic 15</a:t>
+            </a:r>
+          </a:p>
+        </p:txBody>
+      </p:sp>
+      <p:sp>
+        <p:nvSpPr>
+          <p:cNvPr id="3" name="TextBox 2"/>
+          <p:cNvSpPr txBox="1"/>
+          <p:nvPr/>
+        </p:nvSpPr>
+        <p:spPr>
+          <a:xfrm>
+            <a:off x="548640" y="566928"/>
+            <a:ext cx="11094415" cy="822960"/>
+          </a:xfrm>
+          <a:prstGeom prst="rect">
+            <a:avLst/>
+          </a:prstGeom>
+          <a:noFill/>
+        </p:spPr>
+        <p:txBody>
+          <a:bodyPr wrap="square" anchor="ctr" lIns="0" rIns="0" tIns="0" bIns="0"/>
+          <a:lstStyle/>
+          <a:p>
+            <a:pPr algn="l"/>
+            <a:r>
+              <a:rPr sz="3200" b="1" i="0">
+                <a:solidFill>
+                  <a:srgbClr val="03306E"/>
+                </a:solidFill>
+                <a:latin typeface="Cambria"/>
+              </a:rPr>
+              <a:t>Check your understanding</a:t>
+            </a:r>
+          </a:p>
+        </p:txBody>
+      </p:sp>
+      <p:sp>
+        <p:nvSpPr>
+          <p:cNvPr id="4" name="TextBox 3"/>
+          <p:cNvSpPr txBox="1"/>
+          <p:nvPr/>
+        </p:nvSpPr>
+        <p:spPr>
+          <a:xfrm>
+            <a:off x="548640" y="6446520"/>
+            <a:ext cx="8229600" cy="274320"/>
+          </a:xfrm>
+          <a:prstGeom prst="rect">
+            <a:avLst/>
+          </a:prstGeom>
+          <a:noFill/>
+        </p:spPr>
+        <p:txBody>
+          <a:bodyPr wrap="square" anchor="t" lIns="0" rIns="0" tIns="0" bIns="0"/>
+          <a:lstStyle/>
+          <a:p>
+            <a:pPr algn="l"/>
+            <a:r>
+              <a:rPr sz="1000" b="0" i="0">
+                <a:solidFill>
+                  <a:srgbClr val="54595D"/>
+                </a:solidFill>
+                <a:latin typeface="Calibri"/>
+              </a:rPr>
+              <a:t>Design and Development for Engineering and Manufacturing T Level  ·  Stock and Asset Management</a:t>
+            </a:r>
+          </a:p>
+        </p:txBody>
+      </p:sp>
+      <p:sp>
+        <p:nvSpPr>
+          <p:cNvPr id="5" name="TextBox 4"/>
+          <p:cNvSpPr txBox="1"/>
+          <p:nvPr/>
+        </p:nvSpPr>
+        <p:spPr>
+          <a:xfrm>
+            <a:off x="10728655" y="6446520"/>
+            <a:ext cx="914400" cy="274320"/>
+          </a:xfrm>
+          <a:prstGeom prst="rect">
+            <a:avLst/>
+          </a:prstGeom>
+          <a:noFill/>
+        </p:spPr>
+        <p:txBody>
+          <a:bodyPr wrap="square" anchor="t" lIns="0" rIns="0" tIns="0" bIns="0"/>
+          <a:lstStyle/>
+          <a:p>
+            <a:pPr algn="r"/>
+            <a:r>
+              <a:rPr sz="1000" b="0" i="0">
+                <a:solidFill>
+                  <a:srgbClr val="54595D"/>
+                </a:solidFill>
+                <a:latin typeface="Calibri"/>
+              </a:rPr>
+              <a:t>10</a:t>
+            </a:r>
+          </a:p>
+        </p:txBody>
+      </p:sp>
+      <p:sp>
+        <p:nvSpPr>
+          <p:cNvPr id="6" name="Oval 5"/>
+          <p:cNvSpPr/>
+          <p:nvPr/>
+        </p:nvSpPr>
+        <p:spPr>
+          <a:xfrm>
+            <a:off x="548640" y="1618488"/>
+            <a:ext cx="411480" cy="411480"/>
+          </a:xfrm>
+          <a:prstGeom prst="ellipse">
+            <a:avLst/>
+          </a:prstGeom>
+          <a:solidFill>
+            <a:srgbClr val="F2B705"/>
+          </a:solidFill>
+          <a:ln>
+            <a:noFill/>
+          </a:ln>
+          <a:effectLst/>
+        </p:spPr>
+        <p:style>
+          <a:lnRef idx="1">
+            <a:schemeClr val="accent1"/>
+          </a:lnRef>
+          <a:fillRef idx="3">
+            <a:schemeClr val="accent1"/>
+          </a:fillRef>
+          <a:effectRef idx="2">
+            <a:schemeClr val="accent1"/>
+          </a:effectRef>
+          <a:fontRef idx="minor">
+            <a:schemeClr val="lt1"/>
+          </a:fontRef>
+        </p:style>
+        <p:txBody>
+          <a:bodyPr rtlCol="0" anchor="ctr" lIns="0" rIns="0" tIns="0" bIns="0"/>
+          <a:lstStyle/>
+          <a:p>
+            <a:pPr algn="ctr"/>
+            <a:r>
+              <a:rPr sz="1400" b="1">
+                <a:solidFill>
+                  <a:srgbClr val="202122"/>
+                </a:solidFill>
+                <a:latin typeface="Calibri"/>
+              </a:rPr>
+              <a:t>1</a:t>
+            </a:r>
+          </a:p>
+        </p:txBody>
+      </p:sp>
+      <p:sp>
+        <p:nvSpPr>
+          <p:cNvPr id="7" name="TextBox 6"/>
+          <p:cNvSpPr txBox="1"/>
+          <p:nvPr/>
+        </p:nvSpPr>
+        <p:spPr>
+          <a:xfrm>
+            <a:off x="1234440" y="1600200"/>
+            <a:ext cx="10408615" cy="1030986"/>
+          </a:xfrm>
+          <a:prstGeom prst="rect">
+            <a:avLst/>
+          </a:prstGeom>
+          <a:noFill/>
+        </p:spPr>
+        <p:txBody>
+          <a:bodyPr wrap="square" anchor="t" lIns="0" rIns="0" tIns="0" bIns="0"/>
+          <a:lstStyle/>
+          <a:p>
+            <a:pPr algn="l"/>
+            <a:r>
+              <a:rPr sz="2200" b="0" i="0">
+                <a:solidFill>
+                  <a:srgbClr val="202122"/>
+                </a:solidFill>
+                <a:latin typeface="Calibri"/>
+              </a:rPr>
+              <a:t>What is just-in-time?</a:t>
+            </a:r>
+          </a:p>
+        </p:txBody>
+      </p:sp>
+      <p:sp>
+        <p:nvSpPr>
+          <p:cNvPr id="8" name="Oval 7"/>
+          <p:cNvSpPr/>
+          <p:nvPr/>
+        </p:nvSpPr>
+        <p:spPr>
+          <a:xfrm>
+            <a:off x="548640" y="2814066"/>
+            <a:ext cx="411480" cy="411480"/>
+          </a:xfrm>
+          <a:prstGeom prst="ellipse">
+            <a:avLst/>
+          </a:prstGeom>
+          <a:solidFill>
+            <a:srgbClr val="F2B705"/>
+          </a:solidFill>
+          <a:ln>
+            <a:noFill/>
+          </a:ln>
+          <a:effectLst/>
+        </p:spPr>
+        <p:style>
+          <a:lnRef idx="1">
+            <a:schemeClr val="accent1"/>
+          </a:lnRef>
+          <a:fillRef idx="3">
+            <a:schemeClr val="accent1"/>
+          </a:fillRef>
+          <a:effectRef idx="2">
+            <a:schemeClr val="accent1"/>
+          </a:effectRef>
+          <a:fontRef idx="minor">
+            <a:schemeClr val="lt1"/>
+          </a:fontRef>
+        </p:style>
+        <p:txBody>
+          <a:bodyPr rtlCol="0" anchor="ctr" lIns="0" rIns="0" tIns="0" bIns="0"/>
+          <a:lstStyle/>
+          <a:p>
+            <a:pPr algn="ctr"/>
+            <a:r>
+              <a:rPr sz="1400" b="1">
+                <a:solidFill>
+                  <a:srgbClr val="202122"/>
+                </a:solidFill>
+                <a:latin typeface="Calibri"/>
+              </a:rPr>
+              <a:t>2</a:t>
+            </a:r>
+          </a:p>
+        </p:txBody>
+      </p:sp>
+      <p:sp>
+        <p:nvSpPr>
+          <p:cNvPr id="9" name="TextBox 8"/>
+          <p:cNvSpPr txBox="1"/>
+          <p:nvPr/>
+        </p:nvSpPr>
+        <p:spPr>
+          <a:xfrm>
+            <a:off x="1234440" y="2795778"/>
+            <a:ext cx="10408615" cy="1030986"/>
+          </a:xfrm>
+          <a:prstGeom prst="rect">
+            <a:avLst/>
+          </a:prstGeom>
+          <a:noFill/>
+        </p:spPr>
+        <p:txBody>
+          <a:bodyPr wrap="square" anchor="t" lIns="0" rIns="0" tIns="0" bIns="0"/>
+          <a:lstStyle/>
+          <a:p>
+            <a:pPr algn="l"/>
+            <a:r>
+              <a:rPr sz="2200" b="0" i="0">
+                <a:solidFill>
+                  <a:srgbClr val="202122"/>
+                </a:solidFill>
+                <a:latin typeface="Calibri"/>
+              </a:rPr>
+              <a:t>What is obsolete stock?</a:t>
+            </a:r>
+          </a:p>
+        </p:txBody>
+      </p:sp>
+      <p:sp>
+        <p:nvSpPr>
+          <p:cNvPr id="10" name="Oval 9"/>
+          <p:cNvSpPr/>
+          <p:nvPr/>
+        </p:nvSpPr>
+        <p:spPr>
+          <a:xfrm>
+            <a:off x="548640" y="4009644"/>
+            <a:ext cx="411480" cy="411480"/>
+          </a:xfrm>
+          <a:prstGeom prst="ellipse">
+            <a:avLst/>
+          </a:prstGeom>
+          <a:solidFill>
+            <a:srgbClr val="F2B705"/>
+          </a:solidFill>
+          <a:ln>
+            <a:noFill/>
+          </a:ln>
+          <a:effectLst/>
+        </p:spPr>
+        <p:style>
+          <a:lnRef idx="1">
+            <a:schemeClr val="accent1"/>
+          </a:lnRef>
+          <a:fillRef idx="3">
+            <a:schemeClr val="accent1"/>
+          </a:fillRef>
+          <a:effectRef idx="2">
+            <a:schemeClr val="accent1"/>
+          </a:effectRef>
+          <a:fontRef idx="minor">
+            <a:schemeClr val="lt1"/>
+          </a:fontRef>
+        </p:style>
+        <p:txBody>
+          <a:bodyPr rtlCol="0" anchor="ctr" lIns="0" rIns="0" tIns="0" bIns="0"/>
+          <a:lstStyle/>
+          <a:p>
+            <a:pPr algn="ctr"/>
+            <a:r>
+              <a:rPr sz="1400" b="1">
+                <a:solidFill>
+                  <a:srgbClr val="202122"/>
+                </a:solidFill>
+                <a:latin typeface="Calibri"/>
+              </a:rPr>
+              <a:t>3</a:t>
+            </a:r>
+          </a:p>
+        </p:txBody>
+      </p:sp>
+      <p:sp>
+        <p:nvSpPr>
+          <p:cNvPr id="11" name="TextBox 10"/>
+          <p:cNvSpPr txBox="1"/>
+          <p:nvPr/>
+        </p:nvSpPr>
+        <p:spPr>
+          <a:xfrm>
+            <a:off x="1234440" y="3991356"/>
+            <a:ext cx="10408615" cy="1030986"/>
+          </a:xfrm>
+          <a:prstGeom prst="rect">
+            <a:avLst/>
+          </a:prstGeom>
+          <a:noFill/>
+        </p:spPr>
+        <p:txBody>
+          <a:bodyPr wrap="square" anchor="t" lIns="0" rIns="0" tIns="0" bIns="0"/>
+          <a:lstStyle/>
+          <a:p>
+            <a:pPr algn="l"/>
+            <a:r>
+              <a:rPr sz="2200" b="0" i="0">
+                <a:solidFill>
+                  <a:srgbClr val="202122"/>
+                </a:solidFill>
+                <a:latin typeface="Calibri"/>
+              </a:rPr>
+              <a:t>What is a bottleneck?</a:t>
+            </a:r>
+          </a:p>
+        </p:txBody>
+      </p:sp>
+      <p:sp>
+        <p:nvSpPr>
+          <p:cNvPr id="12" name="Oval 11"/>
+          <p:cNvSpPr/>
+          <p:nvPr/>
+        </p:nvSpPr>
+        <p:spPr>
+          <a:xfrm>
+            <a:off x="548640" y="5205221"/>
+            <a:ext cx="411480" cy="411480"/>
+          </a:xfrm>
+          <a:prstGeom prst="ellipse">
+            <a:avLst/>
+          </a:prstGeom>
+          <a:solidFill>
+            <a:srgbClr val="F2B705"/>
+          </a:solidFill>
+          <a:ln>
+            <a:noFill/>
+          </a:ln>
+          <a:effectLst/>
+        </p:spPr>
+        <p:style>
+          <a:lnRef idx="1">
+            <a:schemeClr val="accent1"/>
+          </a:lnRef>
+          <a:fillRef idx="3">
+            <a:schemeClr val="accent1"/>
+          </a:fillRef>
+          <a:effectRef idx="2">
+            <a:schemeClr val="accent1"/>
+          </a:effectRef>
+          <a:fontRef idx="minor">
+            <a:schemeClr val="lt1"/>
+          </a:fontRef>
+        </p:style>
+        <p:txBody>
+          <a:bodyPr rtlCol="0" anchor="ctr" lIns="0" rIns="0" tIns="0" bIns="0"/>
+          <a:lstStyle/>
+          <a:p>
+            <a:pPr algn="ctr"/>
+            <a:r>
+              <a:rPr sz="1400" b="1">
+                <a:solidFill>
+                  <a:srgbClr val="202122"/>
+                </a:solidFill>
+                <a:latin typeface="Calibri"/>
+              </a:rPr>
+              <a:t>4</a:t>
+            </a:r>
+          </a:p>
+        </p:txBody>
+      </p:sp>
+      <p:sp>
+        <p:nvSpPr>
+          <p:cNvPr id="13" name="TextBox 12"/>
+          <p:cNvSpPr txBox="1"/>
+          <p:nvPr/>
+        </p:nvSpPr>
+        <p:spPr>
+          <a:xfrm>
+            <a:off x="1234440" y="5186933"/>
+            <a:ext cx="10408615" cy="1030986"/>
+          </a:xfrm>
+          <a:prstGeom prst="rect">
+            <a:avLst/>
+          </a:prstGeom>
+          <a:noFill/>
+        </p:spPr>
+        <p:txBody>
+          <a:bodyPr wrap="square" anchor="t" lIns="0" rIns="0" tIns="0" bIns="0"/>
+          <a:lstStyle/>
+          <a:p>
+            <a:pPr algn="l"/>
+            <a:r>
+              <a:rPr sz="2200" b="0" i="0">
+                <a:solidFill>
+                  <a:srgbClr val="202122"/>
+                </a:solidFill>
+                <a:latin typeface="Calibri"/>
+              </a:rPr>
+              <a:t>Name the four asset life cycle stages.</a:t>
+            </a:r>
+          </a:p>
+        </p:txBody>
+      </p:sp>
+    </p:spTree>
+  </p:cSld>
+  <p:clrMapOvr>
+    <a:masterClrMapping/>
+  </p:clrMapOvr>
+</p:sld>
+</file>
+
+<file path=ppt/slides/slide11.xml><?xml version="1.0" encoding="utf-8"?>
+<p:sld xmlns:a="http://schemas.openxmlformats.org/drawingml/2006/main" xmlns:p="http://schemas.openxmlformats.org/presentationml/2006/main" xmlns:r="http://schemas.openxmlformats.org/officeDocument/2006/relationships">
+  <p:cSld>
+    <p:bg>
+      <p:bgPr>
+        <a:solidFill>
+          <a:srgbClr val="FFFFFF"/>
+        </a:solidFill>
+        <a:effectLst/>
+      </p:bgPr>
+    </p:bg>
+    <p:spTree>
+      <p:nvGrpSpPr>
+        <p:cNvPr id="1" name=""/>
+        <p:cNvGrpSpPr/>
+        <p:nvPr/>
+      </p:nvGrpSpPr>
+      <p:grpSpPr/>
+      <p:sp>
+        <p:nvSpPr>
+          <p:cNvPr id="2" name="TextBox 1"/>
+          <p:cNvSpPr txBox="1"/>
+          <p:nvPr/>
+        </p:nvSpPr>
+        <p:spPr>
+          <a:xfrm>
+            <a:off x="548640" y="320040"/>
+            <a:ext cx="11094415" cy="274320"/>
+          </a:xfrm>
+          <a:prstGeom prst="rect">
+            <a:avLst/>
+          </a:prstGeom>
+          <a:noFill/>
+        </p:spPr>
+        <p:txBody>
+          <a:bodyPr wrap="square" anchor="t" lIns="0" rIns="0" tIns="0" bIns="0"/>
+          <a:lstStyle/>
+          <a:p>
+            <a:pPr algn="l"/>
+            <a:r>
+              <a:rPr sz="1100" b="1" i="0">
+                <a:solidFill>
+                  <a:srgbClr val="54595D"/>
+                </a:solidFill>
+                <a:latin typeface="Calibri"/>
+              </a:rPr>
+              <a:t>ENGINEERING CORE  ·  Core topic 15</a:t>
+            </a:r>
+          </a:p>
+        </p:txBody>
+      </p:sp>
+      <p:sp>
+        <p:nvSpPr>
+          <p:cNvPr id="3" name="TextBox 2"/>
+          <p:cNvSpPr txBox="1"/>
+          <p:nvPr/>
+        </p:nvSpPr>
+        <p:spPr>
+          <a:xfrm>
+            <a:off x="548640" y="566928"/>
+            <a:ext cx="11094415" cy="822960"/>
+          </a:xfrm>
+          <a:prstGeom prst="rect">
+            <a:avLst/>
+          </a:prstGeom>
+          <a:noFill/>
+        </p:spPr>
+        <p:txBody>
+          <a:bodyPr wrap="square" anchor="ctr" lIns="0" rIns="0" tIns="0" bIns="0"/>
+          <a:lstStyle/>
+          <a:p>
+            <a:pPr algn="l"/>
+            <a:r>
+              <a:rPr sz="3200" b="1" i="0">
+                <a:solidFill>
+                  <a:srgbClr val="03306E"/>
+                </a:solidFill>
+                <a:latin typeface="Cambria"/>
+              </a:rPr>
+              <a:t>Answers</a:t>
+            </a:r>
+          </a:p>
+        </p:txBody>
+      </p:sp>
+      <p:sp>
+        <p:nvSpPr>
+          <p:cNvPr id="4" name="TextBox 3"/>
+          <p:cNvSpPr txBox="1"/>
+          <p:nvPr/>
+        </p:nvSpPr>
+        <p:spPr>
+          <a:xfrm>
+            <a:off x="548640" y="6446520"/>
+            <a:ext cx="8229600" cy="274320"/>
+          </a:xfrm>
+          <a:prstGeom prst="rect">
+            <a:avLst/>
+          </a:prstGeom>
+          <a:noFill/>
+        </p:spPr>
+        <p:txBody>
+          <a:bodyPr wrap="square" anchor="t" lIns="0" rIns="0" tIns="0" bIns="0"/>
+          <a:lstStyle/>
+          <a:p>
+            <a:pPr algn="l"/>
+            <a:r>
+              <a:rPr sz="1000" b="0" i="0">
+                <a:solidFill>
+                  <a:srgbClr val="54595D"/>
+                </a:solidFill>
+                <a:latin typeface="Calibri"/>
+              </a:rPr>
+              <a:t>Design and Development for Engineering and Manufacturing T Level  ·  Stock and Asset Management</a:t>
+            </a:r>
+          </a:p>
+        </p:txBody>
+      </p:sp>
+      <p:sp>
+        <p:nvSpPr>
+          <p:cNvPr id="5" name="TextBox 4"/>
+          <p:cNvSpPr txBox="1"/>
+          <p:nvPr/>
+        </p:nvSpPr>
+        <p:spPr>
+          <a:xfrm>
+            <a:off x="10728655" y="6446520"/>
+            <a:ext cx="914400" cy="274320"/>
+          </a:xfrm>
+          <a:prstGeom prst="rect">
+            <a:avLst/>
+          </a:prstGeom>
+          <a:noFill/>
+        </p:spPr>
+        <p:txBody>
+          <a:bodyPr wrap="square" anchor="t" lIns="0" rIns="0" tIns="0" bIns="0"/>
+          <a:lstStyle/>
+          <a:p>
+            <a:pPr algn="r"/>
+            <a:r>
+              <a:rPr sz="1000" b="0" i="0">
+                <a:solidFill>
+                  <a:srgbClr val="54595D"/>
+                </a:solidFill>
+                <a:latin typeface="Calibri"/>
+              </a:rPr>
+              <a:t>11</a:t>
+            </a:r>
+          </a:p>
+        </p:txBody>
+      </p:sp>
+      <p:sp>
+        <p:nvSpPr>
+          <p:cNvPr id="6" name="Oval 5"/>
+          <p:cNvSpPr/>
+          <p:nvPr/>
+        </p:nvSpPr>
+        <p:spPr>
+          <a:xfrm>
+            <a:off x="548640" y="1618488"/>
+            <a:ext cx="411480" cy="411480"/>
+          </a:xfrm>
+          <a:prstGeom prst="ellipse">
+            <a:avLst/>
+          </a:prstGeom>
+          <a:solidFill>
+            <a:srgbClr val="F2B705"/>
+          </a:solidFill>
+          <a:ln>
+            <a:noFill/>
+          </a:ln>
+          <a:effectLst/>
+        </p:spPr>
+        <p:style>
+          <a:lnRef idx="1">
+            <a:schemeClr val="accent1"/>
+          </a:lnRef>
+          <a:fillRef idx="3">
+            <a:schemeClr val="accent1"/>
+          </a:fillRef>
+          <a:effectRef idx="2">
+            <a:schemeClr val="accent1"/>
+          </a:effectRef>
+          <a:fontRef idx="minor">
+            <a:schemeClr val="lt1"/>
+          </a:fontRef>
+        </p:style>
+        <p:txBody>
+          <a:bodyPr rtlCol="0" anchor="ctr" lIns="0" rIns="0" tIns="0" bIns="0"/>
+          <a:lstStyle/>
+          <a:p>
+            <a:pPr algn="ctr"/>
+            <a:r>
+              <a:rPr sz="1400" b="1">
+                <a:solidFill>
+                  <a:srgbClr val="202122"/>
+                </a:solidFill>
+                <a:latin typeface="Calibri"/>
+              </a:rPr>
+              <a:t>1</a:t>
+            </a:r>
+          </a:p>
+        </p:txBody>
+      </p:sp>
+      <p:sp>
+        <p:nvSpPr>
+          <p:cNvPr id="7" name="TextBox 6"/>
+          <p:cNvSpPr txBox="1"/>
+          <p:nvPr/>
+        </p:nvSpPr>
+        <p:spPr>
+          <a:xfrm>
+            <a:off x="1234440" y="1600200"/>
+            <a:ext cx="10408615" cy="1030986"/>
+          </a:xfrm>
+          <a:prstGeom prst="rect">
+            <a:avLst/>
+          </a:prstGeom>
+          <a:noFill/>
+        </p:spPr>
+        <p:txBody>
+          <a:bodyPr wrap="square" anchor="t" lIns="0" rIns="0" tIns="0" bIns="0"/>
+          <a:lstStyle/>
+          <a:p>
+            <a:pPr algn="l"/>
+            <a:r>
+              <a:rPr sz="1800" b="0" i="0">
+                <a:solidFill>
+                  <a:srgbClr val="54595D"/>
+                </a:solidFill>
+                <a:latin typeface="Calibri"/>
+              </a:rPr>
+              <a:t>What is just-in-time?</a:t>
+            </a:r>
+          </a:p>
+          <a:p>
+            <a:r>
+              <a:rPr sz="1800" b="1">
+                <a:solidFill>
+                  <a:srgbClr val="03306E"/>
+                </a:solidFill>
+                <a:latin typeface="Calibri"/>
+              </a:rPr>
+              <a:t>Receiving parts only when they are needed, with minimal stock.</a:t>
+            </a:r>
+          </a:p>
+        </p:txBody>
+      </p:sp>
+      <p:sp>
+        <p:nvSpPr>
+          <p:cNvPr id="8" name="Oval 7"/>
+          <p:cNvSpPr/>
+          <p:nvPr/>
+        </p:nvSpPr>
+        <p:spPr>
+          <a:xfrm>
+            <a:off x="548640" y="2814066"/>
+            <a:ext cx="411480" cy="411480"/>
+          </a:xfrm>
+          <a:prstGeom prst="ellipse">
+            <a:avLst/>
+          </a:prstGeom>
+          <a:solidFill>
+            <a:srgbClr val="F2B705"/>
+          </a:solidFill>
+          <a:ln>
+            <a:noFill/>
+          </a:ln>
+          <a:effectLst/>
+        </p:spPr>
+        <p:style>
+          <a:lnRef idx="1">
+            <a:schemeClr val="accent1"/>
+          </a:lnRef>
+          <a:fillRef idx="3">
+            <a:schemeClr val="accent1"/>
+          </a:fillRef>
+          <a:effectRef idx="2">
+            <a:schemeClr val="accent1"/>
+          </a:effectRef>
+          <a:fontRef idx="minor">
+            <a:schemeClr val="lt1"/>
+          </a:fontRef>
+        </p:style>
+        <p:txBody>
+          <a:bodyPr rtlCol="0" anchor="ctr" lIns="0" rIns="0" tIns="0" bIns="0"/>
+          <a:lstStyle/>
+          <a:p>
+            <a:pPr algn="ctr"/>
+            <a:r>
+              <a:rPr sz="1400" b="1">
+                <a:solidFill>
+                  <a:srgbClr val="202122"/>
+                </a:solidFill>
+                <a:latin typeface="Calibri"/>
+              </a:rPr>
+              <a:t>2</a:t>
+            </a:r>
+          </a:p>
+        </p:txBody>
+      </p:sp>
+      <p:sp>
+        <p:nvSpPr>
+          <p:cNvPr id="9" name="TextBox 8"/>
+          <p:cNvSpPr txBox="1"/>
+          <p:nvPr/>
+        </p:nvSpPr>
+        <p:spPr>
+          <a:xfrm>
+            <a:off x="1234440" y="2795778"/>
+            <a:ext cx="10408615" cy="1030986"/>
+          </a:xfrm>
+          <a:prstGeom prst="rect">
+            <a:avLst/>
+          </a:prstGeom>
+          <a:noFill/>
+        </p:spPr>
+        <p:txBody>
+          <a:bodyPr wrap="square" anchor="t" lIns="0" rIns="0" tIns="0" bIns="0"/>
+          <a:lstStyle/>
+          <a:p>
+            <a:pPr algn="l"/>
+            <a:r>
+              <a:rPr sz="1800" b="0" i="0">
+                <a:solidFill>
+                  <a:srgbClr val="54595D"/>
+                </a:solidFill>
+                <a:latin typeface="Calibri"/>
+              </a:rPr>
+              <a:t>What is obsolete stock?</a:t>
+            </a:r>
+          </a:p>
+          <a:p>
+            <a:r>
+              <a:rPr sz="1800" b="1">
+                <a:solidFill>
+                  <a:srgbClr val="03306E"/>
+                </a:solidFill>
+                <a:latin typeface="Calibri"/>
+              </a:rPr>
+              <a:t>Stock that can no longer be used or sold.</a:t>
+            </a:r>
+          </a:p>
+        </p:txBody>
+      </p:sp>
+      <p:sp>
+        <p:nvSpPr>
+          <p:cNvPr id="10" name="Oval 9"/>
+          <p:cNvSpPr/>
+          <p:nvPr/>
+        </p:nvSpPr>
+        <p:spPr>
+          <a:xfrm>
+            <a:off x="548640" y="4009644"/>
+            <a:ext cx="411480" cy="411480"/>
+          </a:xfrm>
+          <a:prstGeom prst="ellipse">
+            <a:avLst/>
+          </a:prstGeom>
+          <a:solidFill>
+            <a:srgbClr val="F2B705"/>
+          </a:solidFill>
+          <a:ln>
+            <a:noFill/>
+          </a:ln>
+          <a:effectLst/>
+        </p:spPr>
+        <p:style>
+          <a:lnRef idx="1">
+            <a:schemeClr val="accent1"/>
+          </a:lnRef>
+          <a:fillRef idx="3">
+            <a:schemeClr val="accent1"/>
+          </a:fillRef>
+          <a:effectRef idx="2">
+            <a:schemeClr val="accent1"/>
+          </a:effectRef>
+          <a:fontRef idx="minor">
+            <a:schemeClr val="lt1"/>
+          </a:fontRef>
+        </p:style>
+        <p:txBody>
+          <a:bodyPr rtlCol="0" anchor="ctr" lIns="0" rIns="0" tIns="0" bIns="0"/>
+          <a:lstStyle/>
+          <a:p>
+            <a:pPr algn="ctr"/>
+            <a:r>
+              <a:rPr sz="1400" b="1">
+                <a:solidFill>
+                  <a:srgbClr val="202122"/>
+                </a:solidFill>
+                <a:latin typeface="Calibri"/>
+              </a:rPr>
+              <a:t>3</a:t>
+            </a:r>
+          </a:p>
+        </p:txBody>
+      </p:sp>
+      <p:sp>
+        <p:nvSpPr>
+          <p:cNvPr id="11" name="TextBox 10"/>
+          <p:cNvSpPr txBox="1"/>
+          <p:nvPr/>
+        </p:nvSpPr>
+        <p:spPr>
+          <a:xfrm>
+            <a:off x="1234440" y="3991356"/>
+            <a:ext cx="10408615" cy="1030986"/>
+          </a:xfrm>
+          <a:prstGeom prst="rect">
+            <a:avLst/>
+          </a:prstGeom>
+          <a:noFill/>
+        </p:spPr>
+        <p:txBody>
+          <a:bodyPr wrap="square" anchor="t" lIns="0" rIns="0" tIns="0" bIns="0"/>
+          <a:lstStyle/>
+          <a:p>
+            <a:pPr algn="l"/>
+            <a:r>
+              <a:rPr sz="1800" b="0" i="0">
+                <a:solidFill>
+                  <a:srgbClr val="54595D"/>
+                </a:solidFill>
+                <a:latin typeface="Calibri"/>
+              </a:rPr>
+              <a:t>What is a bottleneck?</a:t>
+            </a:r>
+          </a:p>
+          <a:p>
+            <a:r>
+              <a:rPr sz="1800" b="1">
+                <a:solidFill>
+                  <a:srgbClr val="03306E"/>
+                </a:solidFill>
+                <a:latin typeface="Calibri"/>
+              </a:rPr>
+              <a:t>The stage that limits the capacity of the whole process.</a:t>
+            </a:r>
+          </a:p>
+        </p:txBody>
+      </p:sp>
+      <p:sp>
+        <p:nvSpPr>
+          <p:cNvPr id="12" name="Oval 11"/>
+          <p:cNvSpPr/>
+          <p:nvPr/>
+        </p:nvSpPr>
+        <p:spPr>
+          <a:xfrm>
+            <a:off x="548640" y="5205221"/>
+            <a:ext cx="411480" cy="411480"/>
+          </a:xfrm>
+          <a:prstGeom prst="ellipse">
+            <a:avLst/>
+          </a:prstGeom>
+          <a:solidFill>
+            <a:srgbClr val="F2B705"/>
+          </a:solidFill>
+          <a:ln>
+            <a:noFill/>
+          </a:ln>
+          <a:effectLst/>
+        </p:spPr>
+        <p:style>
+          <a:lnRef idx="1">
+            <a:schemeClr val="accent1"/>
+          </a:lnRef>
+          <a:fillRef idx="3">
+            <a:schemeClr val="accent1"/>
+          </a:fillRef>
+          <a:effectRef idx="2">
+            <a:schemeClr val="accent1"/>
+          </a:effectRef>
+          <a:fontRef idx="minor">
+            <a:schemeClr val="lt1"/>
+          </a:fontRef>
+        </p:style>
+        <p:txBody>
+          <a:bodyPr rtlCol="0" anchor="ctr" lIns="0" rIns="0" tIns="0" bIns="0"/>
+          <a:lstStyle/>
+          <a:p>
+            <a:pPr algn="ctr"/>
+            <a:r>
+              <a:rPr sz="1400" b="1">
+                <a:solidFill>
+                  <a:srgbClr val="202122"/>
+                </a:solidFill>
+                <a:latin typeface="Calibri"/>
+              </a:rPr>
+              <a:t>4</a:t>
+            </a:r>
+          </a:p>
+        </p:txBody>
+      </p:sp>
+      <p:sp>
+        <p:nvSpPr>
+          <p:cNvPr id="13" name="TextBox 12"/>
+          <p:cNvSpPr txBox="1"/>
+          <p:nvPr/>
+        </p:nvSpPr>
+        <p:spPr>
+          <a:xfrm>
+            <a:off x="1234440" y="5186933"/>
+            <a:ext cx="10408615" cy="1030986"/>
+          </a:xfrm>
+          <a:prstGeom prst="rect">
+            <a:avLst/>
+          </a:prstGeom>
+          <a:noFill/>
+        </p:spPr>
+        <p:txBody>
+          <a:bodyPr wrap="square" anchor="t" lIns="0" rIns="0" tIns="0" bIns="0"/>
+          <a:lstStyle/>
+          <a:p>
+            <a:pPr algn="l"/>
+            <a:r>
+              <a:rPr sz="1800" b="0" i="0">
+                <a:solidFill>
+                  <a:srgbClr val="54595D"/>
+                </a:solidFill>
+                <a:latin typeface="Calibri"/>
+              </a:rPr>
+              <a:t>Name the four asset life cycle stages.</a:t>
+            </a:r>
+          </a:p>
+          <a:p>
+            <a:r>
+              <a:rPr sz="1800" b="1">
+                <a:solidFill>
+                  <a:srgbClr val="03306E"/>
+                </a:solidFill>
+                <a:latin typeface="Calibri"/>
+              </a:rPr>
+              <a:t>Plan, acquire, operate and maintain, dispose.</a:t>
+            </a:r>
+          </a:p>
+        </p:txBody>
+      </p:sp>
+    </p:spTree>
+  </p:cSld>
+  <p:clrMapOvr>
+    <a:masterClrMapping/>
+  </p:clrMapOvr>
+</p:sld>
+</file>
+
+<file path=ppt/slides/slide12.xml><?xml version="1.0" encoding="utf-8"?>
+<p:sld xmlns:a="http://schemas.openxmlformats.org/drawingml/2006/main" xmlns:p="http://schemas.openxmlformats.org/presentationml/2006/main" xmlns:r="http://schemas.openxmlformats.org/officeDocument/2006/relationships">
+  <p:cSld>
+    <p:bg>
+      <p:bgPr>
+        <a:solidFill>
+          <a:srgbClr val="FFFFFF"/>
+        </a:solidFill>
+        <a:effectLst/>
+      </p:bgPr>
+    </p:bg>
+    <p:spTree>
+      <p:nvGrpSpPr>
+        <p:cNvPr id="1" name=""/>
+        <p:cNvGrpSpPr/>
+        <p:nvPr/>
+      </p:nvGrpSpPr>
+      <p:grpSpPr/>
+      <p:sp>
+        <p:nvSpPr>
+          <p:cNvPr id="2" name="TextBox 1"/>
+          <p:cNvSpPr txBox="1"/>
+          <p:nvPr/>
+        </p:nvSpPr>
+        <p:spPr>
+          <a:xfrm>
+            <a:off x="548640" y="320040"/>
+            <a:ext cx="11094415" cy="274320"/>
+          </a:xfrm>
+          <a:prstGeom prst="rect">
+            <a:avLst/>
+          </a:prstGeom>
+          <a:noFill/>
+        </p:spPr>
+        <p:txBody>
+          <a:bodyPr wrap="square" anchor="t" lIns="0" rIns="0" tIns="0" bIns="0"/>
+          <a:lstStyle/>
+          <a:p>
+            <a:pPr algn="l"/>
+            <a:r>
+              <a:rPr sz="1100" b="1" i="0">
+                <a:solidFill>
+                  <a:srgbClr val="54595D"/>
+                </a:solidFill>
+                <a:latin typeface="Calibri"/>
+              </a:rPr>
+              <a:t>ENGINEERING CORE  ·  Core topic 15</a:t>
+            </a:r>
+          </a:p>
+        </p:txBody>
+      </p:sp>
+      <p:sp>
+        <p:nvSpPr>
+          <p:cNvPr id="3" name="TextBox 2"/>
+          <p:cNvSpPr txBox="1"/>
+          <p:nvPr/>
+        </p:nvSpPr>
+        <p:spPr>
+          <a:xfrm>
+            <a:off x="548640" y="566928"/>
+            <a:ext cx="11094415" cy="822960"/>
+          </a:xfrm>
+          <a:prstGeom prst="rect">
+            <a:avLst/>
+          </a:prstGeom>
+          <a:noFill/>
+        </p:spPr>
+        <p:txBody>
+          <a:bodyPr wrap="square" anchor="ctr" lIns="0" rIns="0" tIns="0" bIns="0"/>
+          <a:lstStyle/>
+          <a:p>
+            <a:pPr algn="l"/>
+            <a:r>
+              <a:rPr sz="3200" b="1" i="0">
+                <a:solidFill>
+                  <a:srgbClr val="03306E"/>
+                </a:solidFill>
+                <a:latin typeface="Cambria"/>
+              </a:rPr>
+              <a:t>Activity: Choose a stock strategy</a:t>
+            </a:r>
+          </a:p>
+        </p:txBody>
+      </p:sp>
+      <p:sp>
+        <p:nvSpPr>
+          <p:cNvPr id="4" name="TextBox 3"/>
+          <p:cNvSpPr txBox="1"/>
+          <p:nvPr/>
+        </p:nvSpPr>
+        <p:spPr>
+          <a:xfrm>
+            <a:off x="548640" y="6446520"/>
+            <a:ext cx="8229600" cy="274320"/>
+          </a:xfrm>
+          <a:prstGeom prst="rect">
+            <a:avLst/>
+          </a:prstGeom>
+          <a:noFill/>
+        </p:spPr>
+        <p:txBody>
+          <a:bodyPr wrap="square" anchor="t" lIns="0" rIns="0" tIns="0" bIns="0"/>
+          <a:lstStyle/>
+          <a:p>
+            <a:pPr algn="l"/>
+            <a:r>
+              <a:rPr sz="1000" b="0" i="0">
+                <a:solidFill>
+                  <a:srgbClr val="54595D"/>
+                </a:solidFill>
+                <a:latin typeface="Calibri"/>
+              </a:rPr>
+              <a:t>Design and Development for Engineering and Manufacturing T Level  ·  Stock and Asset Management</a:t>
+            </a:r>
+          </a:p>
+        </p:txBody>
+      </p:sp>
+      <p:sp>
+        <p:nvSpPr>
+          <p:cNvPr id="5" name="TextBox 4"/>
+          <p:cNvSpPr txBox="1"/>
+          <p:nvPr/>
+        </p:nvSpPr>
+        <p:spPr>
+          <a:xfrm>
+            <a:off x="10728655" y="6446520"/>
+            <a:ext cx="914400" cy="274320"/>
+          </a:xfrm>
+          <a:prstGeom prst="rect">
+            <a:avLst/>
+          </a:prstGeom>
+          <a:noFill/>
+        </p:spPr>
+        <p:txBody>
+          <a:bodyPr wrap="square" anchor="t" lIns="0" rIns="0" tIns="0" bIns="0"/>
+          <a:lstStyle/>
+          <a:p>
+            <a:pPr algn="r"/>
+            <a:r>
+              <a:rPr sz="1000" b="0" i="0">
+                <a:solidFill>
+                  <a:srgbClr val="54595D"/>
+                </a:solidFill>
+                <a:latin typeface="Calibri"/>
+              </a:rPr>
+              <a:t>12</a:t>
+            </a:r>
+          </a:p>
+        </p:txBody>
+      </p:sp>
+      <p:sp>
+        <p:nvSpPr>
+          <p:cNvPr id="6" name="Rounded Rectangle 5"/>
+          <p:cNvSpPr/>
+          <p:nvPr/>
+        </p:nvSpPr>
+        <p:spPr>
+          <a:xfrm>
+            <a:off x="548640" y="1508760"/>
+            <a:ext cx="2011680" cy="457200"/>
+          </a:xfrm>
+          <a:prstGeom prst="roundRect">
+            <a:avLst>
+              <a:gd name="adj" fmla="val 50000"/>
+            </a:avLst>
+          </a:prstGeom>
+          <a:solidFill>
+            <a:srgbClr val="F2B705"/>
+          </a:solidFill>
+          <a:ln>
+            <a:noFill/>
+          </a:ln>
+          <a:effectLst/>
+        </p:spPr>
+        <p:style>
+          <a:lnRef idx="1">
+            <a:schemeClr val="accent1"/>
+          </a:lnRef>
+          <a:fillRef idx="3">
+            <a:schemeClr val="accent1"/>
+          </a:fillRef>
+          <a:effectRef idx="2">
+            <a:schemeClr val="accent1"/>
+          </a:effectRef>
+          <a:fontRef idx="minor">
+            <a:schemeClr val="lt1"/>
+          </a:fontRef>
+        </p:style>
+        <p:txBody>
+          <a:bodyPr rtlCol="0" anchor="ctr"/>
+          <a:lstStyle/>
+          <a:p/>
+        </p:txBody>
+      </p:sp>
+      <p:sp>
+        <p:nvSpPr>
+          <p:cNvPr id="7" name="TextBox 6"/>
+          <p:cNvSpPr txBox="1"/>
+          <p:nvPr/>
+        </p:nvSpPr>
+        <p:spPr>
+          <a:xfrm>
+            <a:off x="548640" y="1508760"/>
+            <a:ext cx="2011680" cy="457200"/>
+          </a:xfrm>
+          <a:prstGeom prst="rect">
+            <a:avLst/>
+          </a:prstGeom>
+          <a:noFill/>
+        </p:spPr>
+        <p:txBody>
+          <a:bodyPr wrap="square" anchor="ctr" lIns="0" rIns="0" tIns="0" bIns="0"/>
+          <a:lstStyle/>
+          <a:p>
+            <a:pPr algn="ctr"/>
+            <a:r>
+              <a:rPr sz="1400" b="1" i="0">
+                <a:solidFill>
+                  <a:srgbClr val="202122"/>
+                </a:solidFill>
+                <a:latin typeface="Calibri"/>
+              </a:rPr>
+              <a:t>20 minutes</a:t>
+            </a:r>
+          </a:p>
+        </p:txBody>
+      </p:sp>
+      <p:sp>
+        <p:nvSpPr>
+          <p:cNvPr id="8" name="TextBox 7"/>
+          <p:cNvSpPr txBox="1"/>
+          <p:nvPr/>
+        </p:nvSpPr>
+        <p:spPr>
+          <a:xfrm>
+            <a:off x="2743200" y="1508760"/>
+            <a:ext cx="4754880" cy="457200"/>
+          </a:xfrm>
+          <a:prstGeom prst="rect">
+            <a:avLst/>
+          </a:prstGeom>
+          <a:noFill/>
+        </p:spPr>
+        <p:txBody>
+          <a:bodyPr wrap="square" anchor="ctr" lIns="0" rIns="0" tIns="0" bIns="0"/>
+          <a:lstStyle/>
+          <a:p>
+            <a:pPr algn="l"/>
+            <a:r>
+              <a:rPr sz="1400" b="0" i="1">
+                <a:solidFill>
+                  <a:srgbClr val="54595D"/>
+                </a:solidFill>
+                <a:latin typeface="Calibri"/>
+              </a:rPr>
+              <a:t>Pairs</a:t>
+            </a:r>
+          </a:p>
+        </p:txBody>
+      </p:sp>
+      <p:sp>
+        <p:nvSpPr>
+          <p:cNvPr id="9" name="Oval 8"/>
+          <p:cNvSpPr/>
+          <p:nvPr/>
+        </p:nvSpPr>
+        <p:spPr>
+          <a:xfrm>
+            <a:off x="548640" y="2482596"/>
+            <a:ext cx="384048" cy="384048"/>
+          </a:xfrm>
+          <a:prstGeom prst="ellipse">
+            <a:avLst/>
+          </a:prstGeom>
+          <a:solidFill>
+            <a:srgbClr val="0645AD"/>
+          </a:solidFill>
+          <a:ln>
+            <a:noFill/>
+          </a:ln>
+          <a:effectLst/>
+        </p:spPr>
+        <p:style>
+          <a:lnRef idx="1">
+            <a:schemeClr val="accent1"/>
+          </a:lnRef>
+          <a:fillRef idx="3">
+            <a:schemeClr val="accent1"/>
+          </a:fillRef>
+          <a:effectRef idx="2">
+            <a:schemeClr val="accent1"/>
+          </a:effectRef>
+          <a:fontRef idx="minor">
+            <a:schemeClr val="lt1"/>
+          </a:fontRef>
+        </p:style>
+        <p:txBody>
+          <a:bodyPr rtlCol="0" anchor="ctr" lIns="0" rIns="0" tIns="0" bIns="0"/>
+          <a:lstStyle/>
+          <a:p>
+            <a:pPr algn="ctr"/>
+            <a:r>
+              <a:rPr sz="1300" b="1">
+                <a:solidFill>
+                  <a:srgbClr val="FFFFFF"/>
+                </a:solidFill>
+                <a:latin typeface="Calibri"/>
+              </a:rPr>
+              <a:t>1</a:t>
+            </a:r>
+          </a:p>
+        </p:txBody>
+      </p:sp>
+      <p:sp>
+        <p:nvSpPr>
+          <p:cNvPr id="10" name="TextBox 9"/>
+          <p:cNvSpPr txBox="1"/>
+          <p:nvPr/>
+        </p:nvSpPr>
+        <p:spPr>
+          <a:xfrm>
+            <a:off x="1143000" y="2240280"/>
+            <a:ext cx="5943600" cy="868680"/>
+          </a:xfrm>
+          <a:prstGeom prst="rect">
+            <a:avLst/>
+          </a:prstGeom>
+          <a:noFill/>
+        </p:spPr>
+        <p:txBody>
+          <a:bodyPr wrap="square" anchor="ctr" lIns="0" rIns="0" tIns="0" bIns="0"/>
+          <a:lstStyle/>
+          <a:p>
+            <a:pPr algn="l"/>
+            <a:r>
+              <a:rPr sz="1700" b="0" i="0">
+                <a:solidFill>
+                  <a:srgbClr val="202122"/>
+                </a:solidFill>
+                <a:latin typeface="Calibri"/>
+              </a:rPr>
+              <a:t>Three businesses: a bespoke furniture maker, a screw manufacturer, a car assembly plant.</a:t>
+            </a:r>
+          </a:p>
+        </p:txBody>
+      </p:sp>
+      <p:sp>
+        <p:nvSpPr>
+          <p:cNvPr id="11" name="Oval 10"/>
+          <p:cNvSpPr/>
+          <p:nvPr/>
+        </p:nvSpPr>
+        <p:spPr>
+          <a:xfrm>
+            <a:off x="548640" y="3461004"/>
+            <a:ext cx="384048" cy="384048"/>
+          </a:xfrm>
+          <a:prstGeom prst="ellipse">
+            <a:avLst/>
+          </a:prstGeom>
+          <a:solidFill>
+            <a:srgbClr val="0645AD"/>
+          </a:solidFill>
+          <a:ln>
+            <a:noFill/>
+          </a:ln>
+          <a:effectLst/>
+        </p:spPr>
+        <p:style>
+          <a:lnRef idx="1">
+            <a:schemeClr val="accent1"/>
+          </a:lnRef>
+          <a:fillRef idx="3">
+            <a:schemeClr val="accent1"/>
+          </a:fillRef>
+          <a:effectRef idx="2">
+            <a:schemeClr val="accent1"/>
+          </a:effectRef>
+          <a:fontRef idx="minor">
+            <a:schemeClr val="lt1"/>
+          </a:fontRef>
+        </p:style>
+        <p:txBody>
+          <a:bodyPr rtlCol="0" anchor="ctr" lIns="0" rIns="0" tIns="0" bIns="0"/>
+          <a:lstStyle/>
+          <a:p>
+            <a:pPr algn="ctr"/>
+            <a:r>
+              <a:rPr sz="1300" b="1">
+                <a:solidFill>
+                  <a:srgbClr val="FFFFFF"/>
+                </a:solidFill>
+                <a:latin typeface="Calibri"/>
+              </a:rPr>
+              <a:t>2</a:t>
+            </a:r>
+          </a:p>
+        </p:txBody>
+      </p:sp>
+      <p:sp>
+        <p:nvSpPr>
+          <p:cNvPr id="12" name="TextBox 11"/>
+          <p:cNvSpPr txBox="1"/>
+          <p:nvPr/>
+        </p:nvSpPr>
+        <p:spPr>
+          <a:xfrm>
+            <a:off x="1143000" y="3218688"/>
+            <a:ext cx="5943600" cy="868680"/>
+          </a:xfrm>
+          <a:prstGeom prst="rect">
+            <a:avLst/>
+          </a:prstGeom>
+          <a:noFill/>
+        </p:spPr>
+        <p:txBody>
+          <a:bodyPr wrap="square" anchor="ctr" lIns="0" rIns="0" tIns="0" bIns="0"/>
+          <a:lstStyle/>
+          <a:p>
+            <a:pPr algn="l"/>
+            <a:r>
+              <a:rPr sz="1700" b="0" i="0">
+                <a:solidFill>
+                  <a:srgbClr val="202122"/>
+                </a:solidFill>
+                <a:latin typeface="Calibri"/>
+              </a:rPr>
+              <a:t>Choose a stock practice for each.</a:t>
+            </a:r>
+          </a:p>
+        </p:txBody>
+      </p:sp>
+      <p:sp>
+        <p:nvSpPr>
+          <p:cNvPr id="13" name="Oval 12"/>
+          <p:cNvSpPr/>
+          <p:nvPr/>
+        </p:nvSpPr>
+        <p:spPr>
+          <a:xfrm>
+            <a:off x="548640" y="4439412"/>
+            <a:ext cx="384048" cy="384048"/>
+          </a:xfrm>
+          <a:prstGeom prst="ellipse">
+            <a:avLst/>
+          </a:prstGeom>
+          <a:solidFill>
+            <a:srgbClr val="0645AD"/>
+          </a:solidFill>
+          <a:ln>
+            <a:noFill/>
+          </a:ln>
+          <a:effectLst/>
+        </p:spPr>
+        <p:style>
+          <a:lnRef idx="1">
+            <a:schemeClr val="accent1"/>
+          </a:lnRef>
+          <a:fillRef idx="3">
+            <a:schemeClr val="accent1"/>
+          </a:fillRef>
+          <a:effectRef idx="2">
+            <a:schemeClr val="accent1"/>
+          </a:effectRef>
+          <a:fontRef idx="minor">
+            <a:schemeClr val="lt1"/>
+          </a:fontRef>
+        </p:style>
+        <p:txBody>
+          <a:bodyPr rtlCol="0" anchor="ctr" lIns="0" rIns="0" tIns="0" bIns="0"/>
+          <a:lstStyle/>
+          <a:p>
+            <a:pPr algn="ctr"/>
+            <a:r>
+              <a:rPr sz="1300" b="1">
+                <a:solidFill>
+                  <a:srgbClr val="FFFFFF"/>
+                </a:solidFill>
+                <a:latin typeface="Calibri"/>
+              </a:rPr>
+              <a:t>3</a:t>
+            </a:r>
+          </a:p>
+        </p:txBody>
+      </p:sp>
+      <p:sp>
+        <p:nvSpPr>
+          <p:cNvPr id="14" name="TextBox 13"/>
+          <p:cNvSpPr txBox="1"/>
+          <p:nvPr/>
+        </p:nvSpPr>
+        <p:spPr>
+          <a:xfrm>
+            <a:off x="1143000" y="4197096"/>
+            <a:ext cx="5943600" cy="868680"/>
+          </a:xfrm>
+          <a:prstGeom prst="rect">
+            <a:avLst/>
+          </a:prstGeom>
+          <a:noFill/>
+        </p:spPr>
+        <p:txBody>
+          <a:bodyPr wrap="square" anchor="ctr" lIns="0" rIns="0" tIns="0" bIns="0"/>
+          <a:lstStyle/>
+          <a:p>
+            <a:pPr algn="l"/>
+            <a:r>
+              <a:rPr sz="1700" b="0" i="0">
+                <a:solidFill>
+                  <a:srgbClr val="202122"/>
+                </a:solidFill>
+                <a:latin typeface="Calibri"/>
+              </a:rPr>
+              <a:t>Identify the main risk for each.</a:t>
+            </a:r>
+          </a:p>
+        </p:txBody>
+      </p:sp>
+      <p:sp>
+        <p:nvSpPr>
+          <p:cNvPr id="15" name="Oval 14"/>
+          <p:cNvSpPr/>
+          <p:nvPr/>
+        </p:nvSpPr>
+        <p:spPr>
+          <a:xfrm>
+            <a:off x="548640" y="5417820"/>
+            <a:ext cx="384048" cy="384048"/>
+          </a:xfrm>
+          <a:prstGeom prst="ellipse">
+            <a:avLst/>
+          </a:prstGeom>
+          <a:solidFill>
+            <a:srgbClr val="0645AD"/>
+          </a:solidFill>
+          <a:ln>
+            <a:noFill/>
+          </a:ln>
+          <a:effectLst/>
+        </p:spPr>
+        <p:style>
+          <a:lnRef idx="1">
+            <a:schemeClr val="accent1"/>
+          </a:lnRef>
+          <a:fillRef idx="3">
+            <a:schemeClr val="accent1"/>
+          </a:fillRef>
+          <a:effectRef idx="2">
+            <a:schemeClr val="accent1"/>
+          </a:effectRef>
+          <a:fontRef idx="minor">
+            <a:schemeClr val="lt1"/>
+          </a:fontRef>
+        </p:style>
+        <p:txBody>
+          <a:bodyPr rtlCol="0" anchor="ctr" lIns="0" rIns="0" tIns="0" bIns="0"/>
+          <a:lstStyle/>
+          <a:p>
+            <a:pPr algn="ctr"/>
+            <a:r>
+              <a:rPr sz="1300" b="1">
+                <a:solidFill>
+                  <a:srgbClr val="FFFFFF"/>
+                </a:solidFill>
+                <a:latin typeface="Calibri"/>
+              </a:rPr>
+              <a:t>4</a:t>
+            </a:r>
+          </a:p>
+        </p:txBody>
+      </p:sp>
+      <p:sp>
+        <p:nvSpPr>
+          <p:cNvPr id="16" name="TextBox 15"/>
+          <p:cNvSpPr txBox="1"/>
+          <p:nvPr/>
+        </p:nvSpPr>
+        <p:spPr>
+          <a:xfrm>
+            <a:off x="1143000" y="5175504"/>
+            <a:ext cx="5943600" cy="868680"/>
+          </a:xfrm>
+          <a:prstGeom prst="rect">
+            <a:avLst/>
+          </a:prstGeom>
+          <a:noFill/>
+        </p:spPr>
+        <p:txBody>
+          <a:bodyPr wrap="square" anchor="ctr" lIns="0" rIns="0" tIns="0" bIns="0"/>
+          <a:lstStyle/>
+          <a:p>
+            <a:pPr algn="l"/>
+            <a:r>
+              <a:rPr sz="1700" b="0" i="0">
+                <a:solidFill>
+                  <a:srgbClr val="202122"/>
+                </a:solidFill>
+                <a:latin typeface="Calibri"/>
+              </a:rPr>
+              <a:t>Suggest how to reduce that risk.</a:t>
+            </a:r>
+          </a:p>
+        </p:txBody>
+      </p:sp>
+      <p:sp>
+        <p:nvSpPr>
+          <p:cNvPr id="17" name="Rounded Rectangle 16"/>
+          <p:cNvSpPr/>
+          <p:nvPr/>
+        </p:nvSpPr>
+        <p:spPr>
+          <a:xfrm>
+            <a:off x="7772400" y="1508760"/>
+            <a:ext cx="3867912" cy="4572000"/>
+          </a:xfrm>
+          <a:prstGeom prst="roundRect">
+            <a:avLst>
+              <a:gd name="adj" fmla="val 8000"/>
+            </a:avLst>
+          </a:prstGeom>
+          <a:solidFill>
+            <a:srgbClr val="EAF3FF"/>
+          </a:solidFill>
+          <a:ln>
+            <a:noFill/>
+          </a:ln>
+          <a:effectLst/>
+        </p:spPr>
+        <p:style>
+          <a:lnRef idx="1">
+            <a:schemeClr val="accent1"/>
+          </a:lnRef>
+          <a:fillRef idx="3">
+            <a:schemeClr val="accent1"/>
+          </a:fillRef>
+          <a:effectRef idx="2">
+            <a:schemeClr val="accent1"/>
+          </a:effectRef>
+          <a:fontRef idx="minor">
+            <a:schemeClr val="lt1"/>
+          </a:fontRef>
+        </p:style>
+        <p:txBody>
+          <a:bodyPr rtlCol="0" anchor="ctr"/>
+          <a:lstStyle/>
+          <a:p/>
+        </p:txBody>
+      </p:sp>
+      <p:sp>
+        <p:nvSpPr>
+          <p:cNvPr id="18" name="TextBox 17"/>
+          <p:cNvSpPr txBox="1"/>
+          <p:nvPr/>
+        </p:nvSpPr>
+        <p:spPr>
+          <a:xfrm>
+            <a:off x="8046720" y="1737360"/>
+            <a:ext cx="3291840" cy="365760"/>
+          </a:xfrm>
+          <a:prstGeom prst="rect">
+            <a:avLst/>
+          </a:prstGeom>
+          <a:noFill/>
+        </p:spPr>
+        <p:txBody>
+          <a:bodyPr wrap="square" anchor="t" lIns="0" rIns="0" tIns="0" bIns="0"/>
+          <a:lstStyle/>
+          <a:p>
+            <a:pPr algn="l"/>
+            <a:r>
+              <a:rPr sz="1300" b="1" i="0">
+                <a:solidFill>
+                  <a:srgbClr val="0645AD"/>
+                </a:solidFill>
+                <a:latin typeface="Calibri"/>
+              </a:rPr>
+              <a:t>SUCCESS CRITERIA</a:t>
+            </a:r>
+          </a:p>
+        </p:txBody>
+      </p:sp>
+      <p:sp>
+        <p:nvSpPr>
+          <p:cNvPr id="19" name="TextBox 18"/>
+          <p:cNvSpPr txBox="1"/>
+          <p:nvPr/>
+        </p:nvSpPr>
+        <p:spPr>
+          <a:xfrm>
+            <a:off x="8046720" y="2240280"/>
+            <a:ext cx="3337560" cy="3657600"/>
+          </a:xfrm>
+          <a:prstGeom prst="rect">
+            <a:avLst/>
+          </a:prstGeom>
+          <a:noFill/>
+        </p:spPr>
+        <p:txBody>
+          <a:bodyPr wrap="square" lIns="0" rIns="0" tIns="0" bIns="0">
+            <a:spAutoFit/>
+          </a:bodyPr>
+          <a:lstStyle/>
+          <a:p>
+            <a:pPr marL="274320" indent="-274320">
+              <a:spcAft>
+                <a:spcPts val="810"/>
+              </a:spcAft>
+              <a:buClr>
+                <a:srgbClr val="0645AD"/>
+              </a:buClr>
+              <a:buFont typeface="Arial"/>
+              <a:buChar char="•"/>
+            </a:pPr>
+            <a:r>
+              <a:rPr sz="1800" b="0">
+                <a:solidFill>
+                  <a:srgbClr val="202122"/>
+                </a:solidFill>
+                <a:latin typeface="Calibri"/>
+              </a:rPr>
+              <a:t>Practice fits the business</a:t>
+            </a:r>
+          </a:p>
+          <a:p>
+            <a:pPr marL="274320" indent="-274320">
+              <a:spcAft>
+                <a:spcPts val="810"/>
+              </a:spcAft>
+              <a:buClr>
+                <a:srgbClr val="0645AD"/>
+              </a:buClr>
+              <a:buFont typeface="Arial"/>
+              <a:buChar char="•"/>
+            </a:pPr>
+            <a:r>
+              <a:rPr sz="1800" b="0">
+                <a:solidFill>
+                  <a:srgbClr val="202122"/>
+                </a:solidFill>
+                <a:latin typeface="Calibri"/>
+              </a:rPr>
+              <a:t>Risks realistic</a:t>
+            </a:r>
+          </a:p>
+          <a:p>
+            <a:pPr marL="274320" indent="-274320">
+              <a:spcAft>
+                <a:spcPts val="810"/>
+              </a:spcAft>
+              <a:buClr>
+                <a:srgbClr val="0645AD"/>
+              </a:buClr>
+              <a:buFont typeface="Arial"/>
+              <a:buChar char="•"/>
+            </a:pPr>
+            <a:r>
+              <a:rPr sz="1800" b="0">
+                <a:solidFill>
+                  <a:srgbClr val="202122"/>
+                </a:solidFill>
+                <a:latin typeface="Calibri"/>
+              </a:rPr>
+              <a:t>Mitigations sensible</a:t>
+            </a:r>
+          </a:p>
+        </p:txBody>
+      </p:sp>
+    </p:spTree>
+  </p:cSld>
+  <p:clrMapOvr>
+    <a:masterClrMapping/>
+  </p:clrMapOvr>
+</p:sld>
+</file>
+
+<file path=ppt/slides/slide13.xml><?xml version="1.0" encoding="utf-8"?>
+<p:sld xmlns:a="http://schemas.openxmlformats.org/drawingml/2006/main" xmlns:p="http://schemas.openxmlformats.org/presentationml/2006/main" xmlns:r="http://schemas.openxmlformats.org/officeDocument/2006/relationships">
+  <p:cSld>
+    <p:bg>
+      <p:bgPr>
+        <a:solidFill>
+          <a:srgbClr val="03306E"/>
+        </a:solidFill>
+        <a:effectLst/>
+      </p:bgPr>
+    </p:bg>
+    <p:spTree>
+      <p:nvGrpSpPr>
+        <p:cNvPr id="1" name=""/>
+        <p:cNvGrpSpPr/>
+        <p:nvPr/>
+      </p:nvGrpSpPr>
+      <p:grpSpPr/>
+      <p:sp>
+        <p:nvSpPr>
+          <p:cNvPr id="2" name="TextBox 1"/>
+          <p:cNvSpPr txBox="1"/>
+          <p:nvPr/>
+        </p:nvSpPr>
+        <p:spPr>
+          <a:xfrm>
+            <a:off x="548640" y="320040"/>
+            <a:ext cx="11094415" cy="274320"/>
+          </a:xfrm>
+          <a:prstGeom prst="rect">
+            <a:avLst/>
+          </a:prstGeom>
+          <a:noFill/>
+        </p:spPr>
+        <p:txBody>
+          <a:bodyPr wrap="square" anchor="t" lIns="0" rIns="0" tIns="0" bIns="0"/>
+          <a:lstStyle/>
+          <a:p>
+            <a:pPr algn="l"/>
+            <a:r>
+              <a:rPr sz="1100" b="1" i="0">
+                <a:solidFill>
+                  <a:srgbClr val="A9C8F0"/>
+                </a:solidFill>
+                <a:latin typeface="Calibri"/>
+              </a:rPr>
+              <a:t>ENGINEERING CORE  ·  Core topic 15</a:t>
+            </a:r>
+          </a:p>
+        </p:txBody>
+      </p:sp>
+      <p:sp>
+        <p:nvSpPr>
+          <p:cNvPr id="3" name="TextBox 2"/>
+          <p:cNvSpPr txBox="1"/>
+          <p:nvPr/>
+        </p:nvSpPr>
+        <p:spPr>
+          <a:xfrm>
+            <a:off x="548640" y="566928"/>
+            <a:ext cx="11094415" cy="822960"/>
+          </a:xfrm>
+          <a:prstGeom prst="rect">
+            <a:avLst/>
+          </a:prstGeom>
+          <a:noFill/>
+        </p:spPr>
+        <p:txBody>
+          <a:bodyPr wrap="square" anchor="ctr" lIns="0" rIns="0" tIns="0" bIns="0"/>
+          <a:lstStyle/>
+          <a:p>
+            <a:pPr algn="l"/>
+            <a:r>
+              <a:rPr sz="3200" b="1" i="0">
+                <a:solidFill>
+                  <a:srgbClr val="FFFFFF"/>
+                </a:solidFill>
+                <a:latin typeface="Cambria"/>
+              </a:rPr>
+              <a:t>Exit ticket</a:t>
+            </a:r>
+          </a:p>
+        </p:txBody>
+      </p:sp>
+      <p:sp>
+        <p:nvSpPr>
+          <p:cNvPr id="4" name="Oval 3"/>
+          <p:cNvSpPr/>
+          <p:nvPr/>
+        </p:nvSpPr>
+        <p:spPr>
+          <a:xfrm>
+            <a:off x="548640" y="1737360"/>
+            <a:ext cx="502920" cy="502920"/>
+          </a:xfrm>
+          <a:prstGeom prst="ellipse">
+            <a:avLst/>
+          </a:prstGeom>
+          <a:solidFill>
+            <a:srgbClr val="F2B705"/>
+          </a:solidFill>
+          <a:ln>
+            <a:noFill/>
+          </a:ln>
+          <a:effectLst/>
+        </p:spPr>
+        <p:style>
+          <a:lnRef idx="1">
+            <a:schemeClr val="accent1"/>
+          </a:lnRef>
+          <a:fillRef idx="3">
+            <a:schemeClr val="accent1"/>
+          </a:fillRef>
+          <a:effectRef idx="2">
+            <a:schemeClr val="accent1"/>
+          </a:effectRef>
+          <a:fontRef idx="minor">
+            <a:schemeClr val="lt1"/>
+          </a:fontRef>
+        </p:style>
+        <p:txBody>
+          <a:bodyPr rtlCol="0" anchor="ctr" lIns="0" rIns="0" tIns="0" bIns="0"/>
+          <a:lstStyle/>
+          <a:p>
+            <a:pPr algn="ctr"/>
+            <a:r>
+              <a:rPr sz="1700" b="1">
+                <a:solidFill>
+                  <a:srgbClr val="202122"/>
+                </a:solidFill>
+                <a:latin typeface="Calibri"/>
+              </a:rPr>
+              <a:t>1</a:t>
+            </a:r>
+          </a:p>
+        </p:txBody>
+      </p:sp>
+      <p:sp>
+        <p:nvSpPr>
+          <p:cNvPr id="5" name="TextBox 4"/>
+          <p:cNvSpPr txBox="1"/>
+          <p:nvPr/>
+        </p:nvSpPr>
+        <p:spPr>
+          <a:xfrm>
+            <a:off x="1325880" y="1645920"/>
+            <a:ext cx="6583680" cy="822960"/>
+          </a:xfrm>
+          <a:prstGeom prst="rect">
+            <a:avLst/>
+          </a:prstGeom>
+          <a:noFill/>
+        </p:spPr>
+        <p:txBody>
+          <a:bodyPr wrap="square" anchor="ctr" lIns="0" rIns="0" tIns="0" bIns="0"/>
+          <a:lstStyle/>
+          <a:p>
+            <a:pPr algn="l"/>
+            <a:r>
+              <a:rPr sz="2000" b="0" i="0">
+                <a:solidFill>
+                  <a:srgbClr val="FFFFFF"/>
+                </a:solidFill>
+                <a:latin typeface="Calibri"/>
+              </a:rPr>
+              <a:t>Why hold minimum stock levels?</a:t>
+            </a:r>
+          </a:p>
+        </p:txBody>
+      </p:sp>
+      <p:sp>
+        <p:nvSpPr>
+          <p:cNvPr id="6" name="Oval 5"/>
+          <p:cNvSpPr/>
+          <p:nvPr/>
+        </p:nvSpPr>
+        <p:spPr>
+          <a:xfrm>
+            <a:off x="548640" y="2697480"/>
+            <a:ext cx="502920" cy="502920"/>
+          </a:xfrm>
+          <a:prstGeom prst="ellipse">
+            <a:avLst/>
+          </a:prstGeom>
+          <a:solidFill>
+            <a:srgbClr val="F2B705"/>
+          </a:solidFill>
+          <a:ln>
+            <a:noFill/>
+          </a:ln>
+          <a:effectLst/>
+        </p:spPr>
+        <p:style>
+          <a:lnRef idx="1">
+            <a:schemeClr val="accent1"/>
+          </a:lnRef>
+          <a:fillRef idx="3">
+            <a:schemeClr val="accent1"/>
+          </a:fillRef>
+          <a:effectRef idx="2">
+            <a:schemeClr val="accent1"/>
+          </a:effectRef>
+          <a:fontRef idx="minor">
+            <a:schemeClr val="lt1"/>
+          </a:fontRef>
+        </p:style>
+        <p:txBody>
+          <a:bodyPr rtlCol="0" anchor="ctr" lIns="0" rIns="0" tIns="0" bIns="0"/>
+          <a:lstStyle/>
+          <a:p>
+            <a:pPr algn="ctr"/>
+            <a:r>
+              <a:rPr sz="1700" b="1">
+                <a:solidFill>
+                  <a:srgbClr val="202122"/>
+                </a:solidFill>
+                <a:latin typeface="Calibri"/>
+              </a:rPr>
+              <a:t>2</a:t>
+            </a:r>
+          </a:p>
+        </p:txBody>
+      </p:sp>
+      <p:sp>
+        <p:nvSpPr>
+          <p:cNvPr id="7" name="TextBox 6"/>
+          <p:cNvSpPr txBox="1"/>
+          <p:nvPr/>
+        </p:nvSpPr>
+        <p:spPr>
+          <a:xfrm>
+            <a:off x="1325880" y="2606040"/>
+            <a:ext cx="6583680" cy="822960"/>
+          </a:xfrm>
+          <a:prstGeom prst="rect">
+            <a:avLst/>
+          </a:prstGeom>
+          <a:noFill/>
+        </p:spPr>
+        <p:txBody>
+          <a:bodyPr wrap="square" anchor="ctr" lIns="0" rIns="0" tIns="0" bIns="0"/>
+          <a:lstStyle/>
+          <a:p>
+            <a:pPr algn="l"/>
+            <a:r>
+              <a:rPr sz="2000" b="0" i="0">
+                <a:solidFill>
+                  <a:srgbClr val="FFFFFF"/>
+                </a:solidFill>
+                <a:latin typeface="Calibri"/>
+              </a:rPr>
+              <a:t>How does depreciation affect asset decisions?</a:t>
+            </a:r>
+          </a:p>
+        </p:txBody>
+      </p:sp>
+      <p:sp>
+        <p:nvSpPr>
+          <p:cNvPr id="8" name="Oval 7"/>
+          <p:cNvSpPr/>
+          <p:nvPr/>
+        </p:nvSpPr>
+        <p:spPr>
+          <a:xfrm>
+            <a:off x="548640" y="3657600"/>
+            <a:ext cx="502920" cy="502920"/>
+          </a:xfrm>
+          <a:prstGeom prst="ellipse">
+            <a:avLst/>
+          </a:prstGeom>
+          <a:solidFill>
+            <a:srgbClr val="F2B705"/>
+          </a:solidFill>
+          <a:ln>
+            <a:noFill/>
+          </a:ln>
+          <a:effectLst/>
+        </p:spPr>
+        <p:style>
+          <a:lnRef idx="1">
+            <a:schemeClr val="accent1"/>
+          </a:lnRef>
+          <a:fillRef idx="3">
+            <a:schemeClr val="accent1"/>
+          </a:fillRef>
+          <a:effectRef idx="2">
+            <a:schemeClr val="accent1"/>
+          </a:effectRef>
+          <a:fontRef idx="minor">
+            <a:schemeClr val="lt1"/>
+          </a:fontRef>
+        </p:style>
+        <p:txBody>
+          <a:bodyPr rtlCol="0" anchor="ctr" lIns="0" rIns="0" tIns="0" bIns="0"/>
+          <a:lstStyle/>
+          <a:p>
+            <a:pPr algn="ctr"/>
+            <a:r>
+              <a:rPr sz="1700" b="1">
+                <a:solidFill>
+                  <a:srgbClr val="202122"/>
+                </a:solidFill>
+                <a:latin typeface="Calibri"/>
+              </a:rPr>
+              <a:t>3</a:t>
+            </a:r>
+          </a:p>
+        </p:txBody>
+      </p:sp>
+      <p:sp>
+        <p:nvSpPr>
+          <p:cNvPr id="9" name="TextBox 8"/>
+          <p:cNvSpPr txBox="1"/>
+          <p:nvPr/>
+        </p:nvSpPr>
+        <p:spPr>
+          <a:xfrm>
+            <a:off x="1325880" y="3566160"/>
+            <a:ext cx="6583680" cy="822960"/>
+          </a:xfrm>
+          <a:prstGeom prst="rect">
+            <a:avLst/>
+          </a:prstGeom>
+          <a:noFill/>
+        </p:spPr>
+        <p:txBody>
+          <a:bodyPr wrap="square" anchor="ctr" lIns="0" rIns="0" tIns="0" bIns="0"/>
+          <a:lstStyle/>
+          <a:p>
+            <a:pPr algn="l"/>
+            <a:r>
+              <a:rPr sz="2000" b="0" i="0">
+                <a:solidFill>
+                  <a:srgbClr val="FFFFFF"/>
+                </a:solidFill>
+                <a:latin typeface="Calibri"/>
+              </a:rPr>
+              <a:t>When is made-to-order the best choice?</a:t>
+            </a:r>
+          </a:p>
+        </p:txBody>
+      </p:sp>
+      <p:sp>
+        <p:nvSpPr>
+          <p:cNvPr id="10" name="Rounded Rectangle 9"/>
+          <p:cNvSpPr/>
+          <p:nvPr/>
+        </p:nvSpPr>
+        <p:spPr>
+          <a:xfrm>
+            <a:off x="8229600" y="1645920"/>
+            <a:ext cx="3410712" cy="2926080"/>
+          </a:xfrm>
+          <a:prstGeom prst="roundRect">
+            <a:avLst>
+              <a:gd name="adj" fmla="val 8000"/>
+            </a:avLst>
+          </a:prstGeom>
+          <a:solidFill>
+            <a:srgbClr val="0645AD"/>
+          </a:solidFill>
+          <a:ln>
+            <a:noFill/>
+          </a:ln>
+          <a:effectLst/>
+        </p:spPr>
+        <p:style>
+          <a:lnRef idx="1">
+            <a:schemeClr val="accent1"/>
+          </a:lnRef>
+          <a:fillRef idx="3">
+            <a:schemeClr val="accent1"/>
+          </a:fillRef>
+          <a:effectRef idx="2">
+            <a:schemeClr val="accent1"/>
+          </a:effectRef>
+          <a:fontRef idx="minor">
+            <a:schemeClr val="lt1"/>
+          </a:fontRef>
+        </p:style>
+        <p:txBody>
+          <a:bodyPr rtlCol="0" anchor="ctr"/>
+          <a:lstStyle/>
+          <a:p/>
+        </p:txBody>
+      </p:sp>
+      <p:sp>
+        <p:nvSpPr>
+          <p:cNvPr id="11" name="TextBox 10"/>
+          <p:cNvSpPr txBox="1"/>
+          <p:nvPr/>
+        </p:nvSpPr>
+        <p:spPr>
+          <a:xfrm>
+            <a:off x="8503920" y="1874519"/>
+            <a:ext cx="2926080" cy="365760"/>
+          </a:xfrm>
+          <a:prstGeom prst="rect">
+            <a:avLst/>
+          </a:prstGeom>
+          <a:noFill/>
+        </p:spPr>
+        <p:txBody>
+          <a:bodyPr wrap="square" anchor="t" lIns="0" rIns="0" tIns="0" bIns="0"/>
+          <a:lstStyle/>
+          <a:p>
+            <a:pPr algn="l"/>
+            <a:r>
+              <a:rPr sz="1300" b="1" i="0">
+                <a:solidFill>
+                  <a:srgbClr val="A9C8F0"/>
+                </a:solidFill>
+                <a:latin typeface="Calibri"/>
+              </a:rPr>
+              <a:t>REVISE THIS TOPIC</a:t>
+            </a:r>
+          </a:p>
+        </p:txBody>
+      </p:sp>
+      <p:sp>
+        <p:nvSpPr>
+          <p:cNvPr id="12" name="TextBox 11"/>
+          <p:cNvSpPr txBox="1"/>
+          <p:nvPr/>
+        </p:nvSpPr>
+        <p:spPr>
+          <a:xfrm>
+            <a:off x="8503920" y="2286000"/>
+            <a:ext cx="2926080" cy="548640"/>
+          </a:xfrm>
+          <a:prstGeom prst="rect">
+            <a:avLst/>
+          </a:prstGeom>
+          <a:noFill/>
+        </p:spPr>
+        <p:txBody>
+          <a:bodyPr wrap="square" anchor="t" lIns="0" rIns="0" tIns="0" bIns="0"/>
+          <a:lstStyle/>
+          <a:p>
+            <a:pPr algn="l"/>
+            <a:r>
+              <a:rPr sz="1400" b="0" i="0">
+                <a:solidFill>
+                  <a:srgbClr val="FFFFFF"/>
+                </a:solidFill>
+                <a:latin typeface="Calibri"/>
+              </a:rPr>
+              <a:t>Revision notes for this lesson are on the study wiki:</a:t>
+            </a:r>
+          </a:p>
+        </p:txBody>
+      </p:sp>
+      <p:sp>
+        <p:nvSpPr>
+          <p:cNvPr id="13" name="TextBox 12"/>
+          <p:cNvSpPr txBox="1"/>
+          <p:nvPr/>
+        </p:nvSpPr>
+        <p:spPr>
+          <a:xfrm>
+            <a:off x="8503920" y="2926080"/>
+            <a:ext cx="2926080" cy="1463040"/>
+          </a:xfrm>
+          <a:prstGeom prst="rect">
+            <a:avLst/>
+          </a:prstGeom>
+          <a:noFill/>
+        </p:spPr>
+        <p:txBody>
+          <a:bodyPr wrap="square" anchor="t" lIns="0" rIns="0" tIns="0" bIns="0"/>
+          <a:lstStyle/>
+          <a:p>
+            <a:pPr algn="l"/>
+            <a:r>
+              <a:rPr sz="2000" b="1" i="0">
+                <a:solidFill>
+                  <a:srgbClr val="FFFFFF"/>
+                </a:solidFill>
+                <a:latin typeface="Cambria"/>
+              </a:rPr>
+              <a:t>Engineering Core, Part 2</a:t>
+            </a:r>
+          </a:p>
+        </p:txBody>
+      </p:sp>
+      <p:sp>
+        <p:nvSpPr>
+          <p:cNvPr id="14" name="TextBox 13"/>
+          <p:cNvSpPr txBox="1"/>
+          <p:nvPr/>
+        </p:nvSpPr>
+        <p:spPr>
+          <a:xfrm>
+            <a:off x="548640" y="5669280"/>
+            <a:ext cx="11094415" cy="548640"/>
+          </a:xfrm>
+          <a:prstGeom prst="rect">
+            <a:avLst/>
+          </a:prstGeom>
+          <a:noFill/>
+        </p:spPr>
+        <p:txBody>
+          <a:bodyPr wrap="square" anchor="t" lIns="0" rIns="0" tIns="0" bIns="0"/>
+          <a:lstStyle/>
+          <a:p>
+            <a:pPr algn="l"/>
+            <a:r>
+              <a:rPr sz="1200" b="0" i="0">
+                <a:solidFill>
+                  <a:srgbClr val="A9C8F0"/>
+                </a:solidFill>
+                <a:latin typeface="Calibri"/>
+              </a:rPr>
+              <a:t>https://lana6478.github.io/T-level-Design-Development-Engineering-Manufacturing/#/01-core-component/02-engineering-core-part2.md</a:t>
+            </a:r>
+          </a:p>
+        </p:txBody>
+      </p:sp>
+    </p:spTree>
+  </p:cSld>
+  <p:clrMapOvr>
+    <a:masterClrMapping/>
+  </p:clrMapOvr>
+</p:sld>
+</file>
+
 <file path=ppt/slides/slide2.xml><?xml version="1.0" encoding="utf-8"?>
 <p:sld xmlns:a="http://schemas.openxmlformats.org/drawingml/2006/main" xmlns:p="http://schemas.openxmlformats.org/presentationml/2006/main" xmlns:r="http://schemas.openxmlformats.org/officeDocument/2006/relationships">
   <p:cSld>
@@ -5653,6 +8176,414 @@
                 <a:latin typeface="Calibri"/>
               </a:rPr>
               <a:t>4</a:t>
+            </a:r>
+          </a:p>
+        </p:txBody>
+      </p:sp>
+      <p:sp>
+        <p:nvSpPr>
+          <p:cNvPr id="6" name="TextBox 5"/>
+          <p:cNvSpPr txBox="1"/>
+          <p:nvPr/>
+        </p:nvSpPr>
+        <p:spPr>
+          <a:xfrm>
+            <a:off x="548640" y="1554480"/>
+            <a:ext cx="6720840" cy="4617720"/>
+          </a:xfrm>
+          <a:prstGeom prst="rect">
+            <a:avLst/>
+          </a:prstGeom>
+          <a:noFill/>
+        </p:spPr>
+        <p:txBody>
+          <a:bodyPr wrap="square" lIns="0" rIns="0" tIns="0" bIns="0">
+            <a:spAutoFit/>
+          </a:bodyPr>
+          <a:lstStyle/>
+          <a:p>
+            <a:pPr>
+              <a:spcAft>
+                <a:spcPts val="1320"/>
+              </a:spcAft>
+            </a:pPr>
+            <a:r>
+              <a:rPr sz="2200" b="0">
+                <a:solidFill>
+                  <a:srgbClr val="202122"/>
+                </a:solidFill>
+                <a:latin typeface="Calibri"/>
+              </a:rPr>
+              <a:t>Just-in-time (JIT) delivers parts exactly when they're needed, keeping stock low and freeing cash, but any supply disruption stops production.</a:t>
+            </a:r>
+          </a:p>
+          <a:p>
+            <a:pPr>
+              <a:spcAft>
+                <a:spcPts val="1320"/>
+              </a:spcAft>
+            </a:pPr>
+            <a:r>
+              <a:rPr sz="2200" b="0">
+                <a:solidFill>
+                  <a:srgbClr val="202122"/>
+                </a:solidFill>
+                <a:latin typeface="Calibri"/>
+              </a:rPr>
+              <a:t>Made-to-stock builds products to a forecast and holds them ready, giving fast delivery but risking unsold or obsolete stock.</a:t>
+            </a:r>
+          </a:p>
+          <a:p>
+            <a:pPr>
+              <a:spcAft>
+                <a:spcPts val="1320"/>
+              </a:spcAft>
+            </a:pPr>
+            <a:r>
+              <a:rPr sz="2200" b="0">
+                <a:solidFill>
+                  <a:srgbClr val="202122"/>
+                </a:solidFill>
+                <a:latin typeface="Calibri"/>
+              </a:rPr>
+              <a:t>Made-to-order builds only when a customer orders, with no unsold stock but longer lead times.</a:t>
+            </a:r>
+          </a:p>
+          <a:p>
+            <a:pPr>
+              <a:spcAft>
+                <a:spcPts val="1320"/>
+              </a:spcAft>
+            </a:pPr>
+            <a:r>
+              <a:rPr sz="2200" b="0">
+                <a:solidFill>
+                  <a:srgbClr val="202122"/>
+                </a:solidFill>
+                <a:latin typeface="Calibri"/>
+              </a:rPr>
+              <a:t>Material requirements planning (MRP) calculates exactly what materials are needed and when, from the production schedule. It depends on accurate data.</a:t>
+            </a:r>
+          </a:p>
+        </p:txBody>
+      </p:sp>
+      <p:sp>
+        <p:nvSpPr>
+          <p:cNvPr id="7" name="Rounded Rectangle 6"/>
+          <p:cNvSpPr/>
+          <p:nvPr/>
+        </p:nvSpPr>
+        <p:spPr>
+          <a:xfrm>
+            <a:off x="7772400" y="1554480"/>
+            <a:ext cx="3867912" cy="4526280"/>
+          </a:xfrm>
+          <a:prstGeom prst="roundRect">
+            <a:avLst>
+              <a:gd name="adj" fmla="val 8000"/>
+            </a:avLst>
+          </a:prstGeom>
+          <a:solidFill>
+            <a:srgbClr val="03306E"/>
+          </a:solidFill>
+          <a:ln>
+            <a:noFill/>
+          </a:ln>
+          <a:effectLst/>
+        </p:spPr>
+        <p:style>
+          <a:lnRef idx="1">
+            <a:schemeClr val="accent1"/>
+          </a:lnRef>
+          <a:fillRef idx="3">
+            <a:schemeClr val="accent1"/>
+          </a:fillRef>
+          <a:effectRef idx="2">
+            <a:schemeClr val="accent1"/>
+          </a:effectRef>
+          <a:fontRef idx="minor">
+            <a:schemeClr val="lt1"/>
+          </a:fontRef>
+        </p:style>
+        <p:txBody>
+          <a:bodyPr rtlCol="0" anchor="ctr"/>
+          <a:lstStyle/>
+          <a:p/>
+        </p:txBody>
+      </p:sp>
+      <p:sp>
+        <p:nvSpPr>
+          <p:cNvPr id="8" name="Oval 7"/>
+          <p:cNvSpPr/>
+          <p:nvPr/>
+        </p:nvSpPr>
+        <p:spPr>
+          <a:xfrm>
+            <a:off x="8046720" y="1828800"/>
+            <a:ext cx="548640" cy="548640"/>
+          </a:xfrm>
+          <a:prstGeom prst="ellipse">
+            <a:avLst/>
+          </a:prstGeom>
+          <a:solidFill>
+            <a:srgbClr val="F2B705"/>
+          </a:solidFill>
+          <a:ln>
+            <a:noFill/>
+          </a:ln>
+          <a:effectLst/>
+        </p:spPr>
+        <p:style>
+          <a:lnRef idx="1">
+            <a:schemeClr val="accent1"/>
+          </a:lnRef>
+          <a:fillRef idx="3">
+            <a:schemeClr val="accent1"/>
+          </a:fillRef>
+          <a:effectRef idx="2">
+            <a:schemeClr val="accent1"/>
+          </a:effectRef>
+          <a:fontRef idx="minor">
+            <a:schemeClr val="lt1"/>
+          </a:fontRef>
+        </p:style>
+        <p:txBody>
+          <a:bodyPr rtlCol="0" anchor="ctr" lIns="0" rIns="0" tIns="0" bIns="0"/>
+          <a:lstStyle/>
+          <a:p>
+            <a:pPr algn="ctr"/>
+            <a:r>
+              <a:rPr sz="1300" b="1">
+                <a:solidFill>
+                  <a:srgbClr val="202122"/>
+                </a:solidFill>
+                <a:latin typeface="Calibri"/>
+              </a:rPr>
+              <a:t>e.g.</a:t>
+            </a:r>
+          </a:p>
+        </p:txBody>
+      </p:sp>
+      <p:sp>
+        <p:nvSpPr>
+          <p:cNvPr id="9" name="TextBox 8"/>
+          <p:cNvSpPr txBox="1"/>
+          <p:nvPr/>
+        </p:nvSpPr>
+        <p:spPr>
+          <a:xfrm>
+            <a:off x="8046720" y="2560320"/>
+            <a:ext cx="3291840" cy="365760"/>
+          </a:xfrm>
+          <a:prstGeom prst="rect">
+            <a:avLst/>
+          </a:prstGeom>
+          <a:noFill/>
+        </p:spPr>
+        <p:txBody>
+          <a:bodyPr wrap="square" anchor="t" lIns="0" rIns="0" tIns="0" bIns="0"/>
+          <a:lstStyle/>
+          <a:p>
+            <a:pPr algn="l"/>
+            <a:r>
+              <a:rPr sz="1300" b="1" i="0">
+                <a:solidFill>
+                  <a:srgbClr val="A9C8F0"/>
+                </a:solidFill>
+                <a:latin typeface="Calibri"/>
+              </a:rPr>
+              <a:t>EXAMPLE</a:t>
+            </a:r>
+          </a:p>
+        </p:txBody>
+      </p:sp>
+      <p:sp>
+        <p:nvSpPr>
+          <p:cNvPr id="10" name="TextBox 9"/>
+          <p:cNvSpPr txBox="1"/>
+          <p:nvPr/>
+        </p:nvSpPr>
+        <p:spPr>
+          <a:xfrm>
+            <a:off x="8046720" y="2971800"/>
+            <a:ext cx="3291840" cy="2971800"/>
+          </a:xfrm>
+          <a:prstGeom prst="rect">
+            <a:avLst/>
+          </a:prstGeom>
+          <a:noFill/>
+        </p:spPr>
+        <p:txBody>
+          <a:bodyPr wrap="square" anchor="t" lIns="0" rIns="0" tIns="0" bIns="0"/>
+          <a:lstStyle/>
+          <a:p>
+            <a:pPr algn="l"/>
+            <a:r>
+              <a:rPr sz="1900" b="0" i="0">
+                <a:solidFill>
+                  <a:srgbClr val="FFFFFF"/>
+                </a:solidFill>
+                <a:latin typeface="Cambria"/>
+              </a:rPr>
+              <a:t>A car plant using JIT keeps only hours of parts on site. When a supplier's factory flooded, the whole line stopped within a day.</a:t>
+            </a:r>
+          </a:p>
+        </p:txBody>
+      </p:sp>
+    </p:spTree>
+  </p:cSld>
+  <p:clrMapOvr>
+    <a:masterClrMapping/>
+  </p:clrMapOvr>
+</p:sld>
+</file>
+
+<file path=ppt/slides/slide5.xml><?xml version="1.0" encoding="utf-8"?>
+<p:sld xmlns:a="http://schemas.openxmlformats.org/drawingml/2006/main" xmlns:p="http://schemas.openxmlformats.org/presentationml/2006/main" xmlns:r="http://schemas.openxmlformats.org/officeDocument/2006/relationships">
+  <p:cSld>
+    <p:bg>
+      <p:bgPr>
+        <a:solidFill>
+          <a:srgbClr val="FFFFFF"/>
+        </a:solidFill>
+        <a:effectLst/>
+      </p:bgPr>
+    </p:bg>
+    <p:spTree>
+      <p:nvGrpSpPr>
+        <p:cNvPr id="1" name=""/>
+        <p:cNvGrpSpPr/>
+        <p:nvPr/>
+      </p:nvGrpSpPr>
+      <p:grpSpPr/>
+      <p:sp>
+        <p:nvSpPr>
+          <p:cNvPr id="2" name="TextBox 1"/>
+          <p:cNvSpPr txBox="1"/>
+          <p:nvPr/>
+        </p:nvSpPr>
+        <p:spPr>
+          <a:xfrm>
+            <a:off x="548640" y="320040"/>
+            <a:ext cx="11094415" cy="274320"/>
+          </a:xfrm>
+          <a:prstGeom prst="rect">
+            <a:avLst/>
+          </a:prstGeom>
+          <a:noFill/>
+        </p:spPr>
+        <p:txBody>
+          <a:bodyPr wrap="square" anchor="t" lIns="0" rIns="0" tIns="0" bIns="0"/>
+          <a:lstStyle/>
+          <a:p>
+            <a:pPr algn="l"/>
+            <a:r>
+              <a:rPr sz="1100" b="1" i="0">
+                <a:solidFill>
+                  <a:srgbClr val="54595D"/>
+                </a:solidFill>
+                <a:latin typeface="Calibri"/>
+              </a:rPr>
+              <a:t>ENGINEERING CORE  ·  Core topic 15</a:t>
+            </a:r>
+          </a:p>
+        </p:txBody>
+      </p:sp>
+      <p:sp>
+        <p:nvSpPr>
+          <p:cNvPr id="3" name="TextBox 2"/>
+          <p:cNvSpPr txBox="1"/>
+          <p:nvPr/>
+        </p:nvSpPr>
+        <p:spPr>
+          <a:xfrm>
+            <a:off x="548640" y="566928"/>
+            <a:ext cx="11094415" cy="822960"/>
+          </a:xfrm>
+          <a:prstGeom prst="rect">
+            <a:avLst/>
+          </a:prstGeom>
+          <a:noFill/>
+        </p:spPr>
+        <p:txBody>
+          <a:bodyPr wrap="square" anchor="ctr" lIns="0" rIns="0" tIns="0" bIns="0"/>
+          <a:lstStyle/>
+          <a:p>
+            <a:pPr algn="l"/>
+            <a:r>
+              <a:rPr sz="3200" b="1" i="0">
+                <a:solidFill>
+                  <a:srgbClr val="03306E"/>
+                </a:solidFill>
+                <a:latin typeface="Cambria"/>
+              </a:rPr>
+              <a:t>Stock practices</a:t>
+            </a:r>
+          </a:p>
+        </p:txBody>
+      </p:sp>
+      <p:sp>
+        <p:nvSpPr>
+          <p:cNvPr id="4" name="TextBox 3"/>
+          <p:cNvSpPr txBox="1"/>
+          <p:nvPr/>
+        </p:nvSpPr>
+        <p:spPr>
+          <a:xfrm>
+            <a:off x="548640" y="6446520"/>
+            <a:ext cx="8229600" cy="274320"/>
+          </a:xfrm>
+          <a:prstGeom prst="rect">
+            <a:avLst/>
+          </a:prstGeom>
+          <a:noFill/>
+        </p:spPr>
+        <p:txBody>
+          <a:bodyPr wrap="square" anchor="t" lIns="0" rIns="0" tIns="0" bIns="0"/>
+          <a:lstStyle/>
+          <a:p>
+            <a:pPr algn="l"/>
+            <a:r>
+              <a:rPr sz="1000" b="0" i="0">
+                <a:solidFill>
+                  <a:srgbClr val="54595D"/>
+                </a:solidFill>
+                <a:latin typeface="Calibri"/>
+              </a:rPr>
+              <a:t>Design and Development for Engineering and Manufacturing T Level  ·  Stock and Asset Management</a:t>
+            </a:r>
+          </a:p>
+        </p:txBody>
+      </p:sp>
+      <p:sp>
+        <p:nvSpPr>
+          <p:cNvPr id="5" name="TextBox 4"/>
+          <p:cNvSpPr txBox="1"/>
+          <p:nvPr/>
+        </p:nvSpPr>
+        <p:spPr>
+          <a:xfrm>
+            <a:off x="10728655" y="6446520"/>
+            <a:ext cx="914400" cy="274320"/>
+          </a:xfrm>
+          <a:prstGeom prst="rect">
+            <a:avLst/>
+          </a:prstGeom>
+          <a:noFill/>
+        </p:spPr>
+        <p:txBody>
+          <a:bodyPr wrap="square" anchor="t" lIns="0" rIns="0" tIns="0" bIns="0"/>
+          <a:lstStyle/>
+          <a:p>
+            <a:pPr algn="r"/>
+            <a:r>
+              <a:rPr sz="1000" b="0" i="0">
+                <a:solidFill>
+                  <a:srgbClr val="54595D"/>
+                </a:solidFill>
+                <a:latin typeface="Calibri"/>
+              </a:rPr>
+              <a:t>5</a:t>
             </a:r>
           </a:p>
         </p:txBody>
@@ -6032,891 +8963,6 @@
 </p:sld>
 </file>
 
-<file path=ppt/slides/slide5.xml><?xml version="1.0" encoding="utf-8"?>
-<p:sld xmlns:a="http://schemas.openxmlformats.org/drawingml/2006/main" xmlns:p="http://schemas.openxmlformats.org/presentationml/2006/main" xmlns:r="http://schemas.openxmlformats.org/officeDocument/2006/relationships">
-  <p:cSld>
-    <p:bg>
-      <p:bgPr>
-        <a:solidFill>
-          <a:srgbClr val="FFFFFF"/>
-        </a:solidFill>
-        <a:effectLst/>
-      </p:bgPr>
-    </p:bg>
-    <p:spTree>
-      <p:nvGrpSpPr>
-        <p:cNvPr id="1" name=""/>
-        <p:cNvGrpSpPr/>
-        <p:nvPr/>
-      </p:nvGrpSpPr>
-      <p:grpSpPr/>
-      <p:sp>
-        <p:nvSpPr>
-          <p:cNvPr id="2" name="TextBox 1"/>
-          <p:cNvSpPr txBox="1"/>
-          <p:nvPr/>
-        </p:nvSpPr>
-        <p:spPr>
-          <a:xfrm>
-            <a:off x="548640" y="320040"/>
-            <a:ext cx="11094415" cy="274320"/>
-          </a:xfrm>
-          <a:prstGeom prst="rect">
-            <a:avLst/>
-          </a:prstGeom>
-          <a:noFill/>
-        </p:spPr>
-        <p:txBody>
-          <a:bodyPr wrap="square" anchor="t" lIns="0" rIns="0" tIns="0" bIns="0"/>
-          <a:lstStyle/>
-          <a:p>
-            <a:pPr algn="l"/>
-            <a:r>
-              <a:rPr sz="1100" b="1" i="0">
-                <a:solidFill>
-                  <a:srgbClr val="54595D"/>
-                </a:solidFill>
-                <a:latin typeface="Calibri"/>
-              </a:rPr>
-              <a:t>ENGINEERING CORE  ·  Core topic 15</a:t>
-            </a:r>
-          </a:p>
-        </p:txBody>
-      </p:sp>
-      <p:sp>
-        <p:nvSpPr>
-          <p:cNvPr id="3" name="TextBox 2"/>
-          <p:cNvSpPr txBox="1"/>
-          <p:nvPr/>
-        </p:nvSpPr>
-        <p:spPr>
-          <a:xfrm>
-            <a:off x="548640" y="566928"/>
-            <a:ext cx="11094415" cy="822960"/>
-          </a:xfrm>
-          <a:prstGeom prst="rect">
-            <a:avLst/>
-          </a:prstGeom>
-          <a:noFill/>
-        </p:spPr>
-        <p:txBody>
-          <a:bodyPr wrap="square" anchor="ctr" lIns="0" rIns="0" tIns="0" bIns="0"/>
-          <a:lstStyle/>
-          <a:p>
-            <a:pPr algn="l"/>
-            <a:r>
-              <a:rPr sz="3200" b="1" i="0">
-                <a:solidFill>
-                  <a:srgbClr val="03306E"/>
-                </a:solidFill>
-                <a:latin typeface="Cambria"/>
-              </a:rPr>
-              <a:t>Asset life cycle</a:t>
-            </a:r>
-          </a:p>
-        </p:txBody>
-      </p:sp>
-      <p:sp>
-        <p:nvSpPr>
-          <p:cNvPr id="4" name="TextBox 3"/>
-          <p:cNvSpPr txBox="1"/>
-          <p:nvPr/>
-        </p:nvSpPr>
-        <p:spPr>
-          <a:xfrm>
-            <a:off x="548640" y="6446520"/>
-            <a:ext cx="8229600" cy="274320"/>
-          </a:xfrm>
-          <a:prstGeom prst="rect">
-            <a:avLst/>
-          </a:prstGeom>
-          <a:noFill/>
-        </p:spPr>
-        <p:txBody>
-          <a:bodyPr wrap="square" anchor="t" lIns="0" rIns="0" tIns="0" bIns="0"/>
-          <a:lstStyle/>
-          <a:p>
-            <a:pPr algn="l"/>
-            <a:r>
-              <a:rPr sz="1000" b="0" i="0">
-                <a:solidFill>
-                  <a:srgbClr val="54595D"/>
-                </a:solidFill>
-                <a:latin typeface="Calibri"/>
-              </a:rPr>
-              <a:t>Design and Development for Engineering and Manufacturing T Level  ·  Stock and Asset Management</a:t>
-            </a:r>
-          </a:p>
-        </p:txBody>
-      </p:sp>
-      <p:sp>
-        <p:nvSpPr>
-          <p:cNvPr id="5" name="TextBox 4"/>
-          <p:cNvSpPr txBox="1"/>
-          <p:nvPr/>
-        </p:nvSpPr>
-        <p:spPr>
-          <a:xfrm>
-            <a:off x="10728655" y="6446520"/>
-            <a:ext cx="914400" cy="274320"/>
-          </a:xfrm>
-          <a:prstGeom prst="rect">
-            <a:avLst/>
-          </a:prstGeom>
-          <a:noFill/>
-        </p:spPr>
-        <p:txBody>
-          <a:bodyPr wrap="square" anchor="t" lIns="0" rIns="0" tIns="0" bIns="0"/>
-          <a:lstStyle/>
-          <a:p>
-            <a:pPr algn="r"/>
-            <a:r>
-              <a:rPr sz="1000" b="0" i="0">
-                <a:solidFill>
-                  <a:srgbClr val="54595D"/>
-                </a:solidFill>
-                <a:latin typeface="Calibri"/>
-              </a:rPr>
-              <a:t>5</a:t>
-            </a:r>
-          </a:p>
-        </p:txBody>
-      </p:sp>
-      <p:sp>
-        <p:nvSpPr>
-          <p:cNvPr id="6" name="Rectangle 5"/>
-          <p:cNvSpPr/>
-          <p:nvPr/>
-        </p:nvSpPr>
-        <p:spPr>
-          <a:xfrm>
-            <a:off x="1884006" y="2519172"/>
-            <a:ext cx="8423681" cy="36576"/>
-          </a:xfrm>
-          <a:prstGeom prst="rect">
-            <a:avLst/>
-          </a:prstGeom>
-          <a:solidFill>
-            <a:srgbClr val="A9C8F0"/>
-          </a:solidFill>
-          <a:ln>
-            <a:noFill/>
-          </a:ln>
-          <a:effectLst/>
-        </p:spPr>
-        <p:style>
-          <a:lnRef idx="1">
-            <a:schemeClr val="accent1"/>
-          </a:lnRef>
-          <a:fillRef idx="3">
-            <a:schemeClr val="accent1"/>
-          </a:fillRef>
-          <a:effectRef idx="2">
-            <a:schemeClr val="accent1"/>
-          </a:effectRef>
-          <a:fontRef idx="minor">
-            <a:schemeClr val="lt1"/>
-          </a:fontRef>
-        </p:style>
-        <p:txBody>
-          <a:bodyPr rtlCol="0" anchor="ctr"/>
-          <a:lstStyle/>
-          <a:p/>
-        </p:txBody>
-      </p:sp>
-      <p:sp>
-        <p:nvSpPr>
-          <p:cNvPr id="7" name="Oval 6"/>
-          <p:cNvSpPr/>
-          <p:nvPr/>
-        </p:nvSpPr>
-        <p:spPr>
-          <a:xfrm>
-            <a:off x="1563966" y="2217420"/>
-            <a:ext cx="640080" cy="640080"/>
-          </a:xfrm>
-          <a:prstGeom prst="ellipse">
-            <a:avLst/>
-          </a:prstGeom>
-          <a:solidFill>
-            <a:srgbClr val="F2B705"/>
-          </a:solidFill>
-          <a:ln>
-            <a:noFill/>
-          </a:ln>
-          <a:effectLst/>
-        </p:spPr>
-        <p:style>
-          <a:lnRef idx="1">
-            <a:schemeClr val="accent1"/>
-          </a:lnRef>
-          <a:fillRef idx="3">
-            <a:schemeClr val="accent1"/>
-          </a:fillRef>
-          <a:effectRef idx="2">
-            <a:schemeClr val="accent1"/>
-          </a:effectRef>
-          <a:fontRef idx="minor">
-            <a:schemeClr val="lt1"/>
-          </a:fontRef>
-        </p:style>
-        <p:txBody>
-          <a:bodyPr rtlCol="0" anchor="ctr" lIns="0" rIns="0" tIns="0" bIns="0"/>
-          <a:lstStyle/>
-          <a:p>
-            <a:pPr algn="ctr"/>
-            <a:r>
-              <a:rPr sz="2000" b="1">
-                <a:solidFill>
-                  <a:srgbClr val="202122"/>
-                </a:solidFill>
-                <a:latin typeface="Calibri"/>
-              </a:rPr>
-              <a:t>1</a:t>
-            </a:r>
-          </a:p>
-        </p:txBody>
-      </p:sp>
-      <p:sp>
-        <p:nvSpPr>
-          <p:cNvPr id="8" name="TextBox 7"/>
-          <p:cNvSpPr txBox="1"/>
-          <p:nvPr/>
-        </p:nvSpPr>
-        <p:spPr>
-          <a:xfrm>
-            <a:off x="548640" y="2994660"/>
-            <a:ext cx="2670733" cy="731520"/>
-          </a:xfrm>
-          <a:prstGeom prst="rect">
-            <a:avLst/>
-          </a:prstGeom>
-          <a:noFill/>
-        </p:spPr>
-        <p:txBody>
-          <a:bodyPr wrap="square" anchor="t" lIns="0" rIns="0" tIns="0" bIns="0"/>
-          <a:lstStyle/>
-          <a:p>
-            <a:pPr algn="ctr"/>
-            <a:r>
-              <a:rPr sz="1700" b="1" i="0">
-                <a:solidFill>
-                  <a:srgbClr val="03306E"/>
-                </a:solidFill>
-                <a:latin typeface="Calibri"/>
-              </a:rPr>
-              <a:t>Plan</a:t>
-            </a:r>
-          </a:p>
-        </p:txBody>
-      </p:sp>
-      <p:sp>
-        <p:nvSpPr>
-          <p:cNvPr id="9" name="Rounded Rectangle 8"/>
-          <p:cNvSpPr/>
-          <p:nvPr/>
-        </p:nvSpPr>
-        <p:spPr>
-          <a:xfrm>
-            <a:off x="548640" y="3771900"/>
-            <a:ext cx="2670733" cy="960120"/>
-          </a:xfrm>
-          <a:prstGeom prst="roundRect">
-            <a:avLst>
-              <a:gd name="adj" fmla="val 6000"/>
-            </a:avLst>
-          </a:prstGeom>
-          <a:solidFill>
-            <a:srgbClr val="EAF3FF"/>
-          </a:solidFill>
-          <a:ln>
-            <a:noFill/>
-          </a:ln>
-          <a:effectLst/>
-        </p:spPr>
-        <p:style>
-          <a:lnRef idx="1">
-            <a:schemeClr val="accent1"/>
-          </a:lnRef>
-          <a:fillRef idx="3">
-            <a:schemeClr val="accent1"/>
-          </a:fillRef>
-          <a:effectRef idx="2">
-            <a:schemeClr val="accent1"/>
-          </a:effectRef>
-          <a:fontRef idx="minor">
-            <a:schemeClr val="lt1"/>
-          </a:fontRef>
-        </p:style>
-        <p:txBody>
-          <a:bodyPr rtlCol="0" anchor="ctr"/>
-          <a:lstStyle/>
-          <a:p/>
-        </p:txBody>
-      </p:sp>
-      <p:sp>
-        <p:nvSpPr>
-          <p:cNvPr id="10" name="TextBox 9"/>
-          <p:cNvSpPr txBox="1"/>
-          <p:nvPr/>
-        </p:nvSpPr>
-        <p:spPr>
-          <a:xfrm>
-            <a:off x="685800" y="3909060"/>
-            <a:ext cx="2396413" cy="685800"/>
-          </a:xfrm>
-          <a:prstGeom prst="rect">
-            <a:avLst/>
-          </a:prstGeom>
-          <a:noFill/>
-        </p:spPr>
-        <p:txBody>
-          <a:bodyPr wrap="square" anchor="t" lIns="0" rIns="0" tIns="0" bIns="0"/>
-          <a:lstStyle/>
-          <a:p>
-            <a:pPr algn="l"/>
-            <a:r>
-              <a:rPr sz="1800" b="0" i="0">
-                <a:solidFill>
-                  <a:srgbClr val="202122"/>
-                </a:solidFill>
-                <a:latin typeface="Calibri"/>
-              </a:rPr>
-              <a:t>Decide what is needed.</a:t>
-            </a:r>
-          </a:p>
-        </p:txBody>
-      </p:sp>
-      <p:sp>
-        <p:nvSpPr>
-          <p:cNvPr id="11" name="Oval 10"/>
-          <p:cNvSpPr/>
-          <p:nvPr/>
-        </p:nvSpPr>
-        <p:spPr>
-          <a:xfrm>
-            <a:off x="4371860" y="2217420"/>
-            <a:ext cx="640080" cy="640080"/>
-          </a:xfrm>
-          <a:prstGeom prst="ellipse">
-            <a:avLst/>
-          </a:prstGeom>
-          <a:solidFill>
-            <a:srgbClr val="F2B705"/>
-          </a:solidFill>
-          <a:ln>
-            <a:noFill/>
-          </a:ln>
-          <a:effectLst/>
-        </p:spPr>
-        <p:style>
-          <a:lnRef idx="1">
-            <a:schemeClr val="accent1"/>
-          </a:lnRef>
-          <a:fillRef idx="3">
-            <a:schemeClr val="accent1"/>
-          </a:fillRef>
-          <a:effectRef idx="2">
-            <a:schemeClr val="accent1"/>
-          </a:effectRef>
-          <a:fontRef idx="minor">
-            <a:schemeClr val="lt1"/>
-          </a:fontRef>
-        </p:style>
-        <p:txBody>
-          <a:bodyPr rtlCol="0" anchor="ctr" lIns="0" rIns="0" tIns="0" bIns="0"/>
-          <a:lstStyle/>
-          <a:p>
-            <a:pPr algn="ctr"/>
-            <a:r>
-              <a:rPr sz="2000" b="1">
-                <a:solidFill>
-                  <a:srgbClr val="202122"/>
-                </a:solidFill>
-                <a:latin typeface="Calibri"/>
-              </a:rPr>
-              <a:t>2</a:t>
-            </a:r>
-          </a:p>
-        </p:txBody>
-      </p:sp>
-      <p:sp>
-        <p:nvSpPr>
-          <p:cNvPr id="12" name="TextBox 11"/>
-          <p:cNvSpPr txBox="1"/>
-          <p:nvPr/>
-        </p:nvSpPr>
-        <p:spPr>
-          <a:xfrm>
-            <a:off x="3356533" y="2994660"/>
-            <a:ext cx="2670733" cy="731520"/>
-          </a:xfrm>
-          <a:prstGeom prst="rect">
-            <a:avLst/>
-          </a:prstGeom>
-          <a:noFill/>
-        </p:spPr>
-        <p:txBody>
-          <a:bodyPr wrap="square" anchor="t" lIns="0" rIns="0" tIns="0" bIns="0"/>
-          <a:lstStyle/>
-          <a:p>
-            <a:pPr algn="ctr"/>
-            <a:r>
-              <a:rPr sz="1700" b="1" i="0">
-                <a:solidFill>
-                  <a:srgbClr val="03306E"/>
-                </a:solidFill>
-                <a:latin typeface="Calibri"/>
-              </a:rPr>
-              <a:t>Acquire</a:t>
-            </a:r>
-          </a:p>
-        </p:txBody>
-      </p:sp>
-      <p:sp>
-        <p:nvSpPr>
-          <p:cNvPr id="13" name="Rounded Rectangle 12"/>
-          <p:cNvSpPr/>
-          <p:nvPr/>
-        </p:nvSpPr>
-        <p:spPr>
-          <a:xfrm>
-            <a:off x="3356533" y="3771900"/>
-            <a:ext cx="2670733" cy="960120"/>
-          </a:xfrm>
-          <a:prstGeom prst="roundRect">
-            <a:avLst>
-              <a:gd name="adj" fmla="val 6000"/>
-            </a:avLst>
-          </a:prstGeom>
-          <a:solidFill>
-            <a:srgbClr val="EAF3FF"/>
-          </a:solidFill>
-          <a:ln>
-            <a:noFill/>
-          </a:ln>
-          <a:effectLst/>
-        </p:spPr>
-        <p:style>
-          <a:lnRef idx="1">
-            <a:schemeClr val="accent1"/>
-          </a:lnRef>
-          <a:fillRef idx="3">
-            <a:schemeClr val="accent1"/>
-          </a:fillRef>
-          <a:effectRef idx="2">
-            <a:schemeClr val="accent1"/>
-          </a:effectRef>
-          <a:fontRef idx="minor">
-            <a:schemeClr val="lt1"/>
-          </a:fontRef>
-        </p:style>
-        <p:txBody>
-          <a:bodyPr rtlCol="0" anchor="ctr"/>
-          <a:lstStyle/>
-          <a:p/>
-        </p:txBody>
-      </p:sp>
-      <p:sp>
-        <p:nvSpPr>
-          <p:cNvPr id="14" name="TextBox 13"/>
-          <p:cNvSpPr txBox="1"/>
-          <p:nvPr/>
-        </p:nvSpPr>
-        <p:spPr>
-          <a:xfrm>
-            <a:off x="3493693" y="3909060"/>
-            <a:ext cx="2396413" cy="685800"/>
-          </a:xfrm>
-          <a:prstGeom prst="rect">
-            <a:avLst/>
-          </a:prstGeom>
-          <a:noFill/>
-        </p:spPr>
-        <p:txBody>
-          <a:bodyPr wrap="square" anchor="t" lIns="0" rIns="0" tIns="0" bIns="0"/>
-          <a:lstStyle/>
-          <a:p>
-            <a:pPr algn="l"/>
-            <a:r>
-              <a:rPr sz="1800" b="0" i="0">
-                <a:solidFill>
-                  <a:srgbClr val="202122"/>
-                </a:solidFill>
-                <a:latin typeface="Calibri"/>
-              </a:rPr>
-              <a:t>Buy or build it.</a:t>
-            </a:r>
-          </a:p>
-        </p:txBody>
-      </p:sp>
-      <p:sp>
-        <p:nvSpPr>
-          <p:cNvPr id="15" name="Oval 14"/>
-          <p:cNvSpPr/>
-          <p:nvPr/>
-        </p:nvSpPr>
-        <p:spPr>
-          <a:xfrm>
-            <a:off x="7179754" y="2217420"/>
-            <a:ext cx="640080" cy="640080"/>
-          </a:xfrm>
-          <a:prstGeom prst="ellipse">
-            <a:avLst/>
-          </a:prstGeom>
-          <a:solidFill>
-            <a:srgbClr val="F2B705"/>
-          </a:solidFill>
-          <a:ln>
-            <a:noFill/>
-          </a:ln>
-          <a:effectLst/>
-        </p:spPr>
-        <p:style>
-          <a:lnRef idx="1">
-            <a:schemeClr val="accent1"/>
-          </a:lnRef>
-          <a:fillRef idx="3">
-            <a:schemeClr val="accent1"/>
-          </a:fillRef>
-          <a:effectRef idx="2">
-            <a:schemeClr val="accent1"/>
-          </a:effectRef>
-          <a:fontRef idx="minor">
-            <a:schemeClr val="lt1"/>
-          </a:fontRef>
-        </p:style>
-        <p:txBody>
-          <a:bodyPr rtlCol="0" anchor="ctr" lIns="0" rIns="0" tIns="0" bIns="0"/>
-          <a:lstStyle/>
-          <a:p>
-            <a:pPr algn="ctr"/>
-            <a:r>
-              <a:rPr sz="2000" b="1">
-                <a:solidFill>
-                  <a:srgbClr val="202122"/>
-                </a:solidFill>
-                <a:latin typeface="Calibri"/>
-              </a:rPr>
-              <a:t>3</a:t>
-            </a:r>
-          </a:p>
-        </p:txBody>
-      </p:sp>
-      <p:sp>
-        <p:nvSpPr>
-          <p:cNvPr id="16" name="TextBox 15"/>
-          <p:cNvSpPr txBox="1"/>
-          <p:nvPr/>
-        </p:nvSpPr>
-        <p:spPr>
-          <a:xfrm>
-            <a:off x="6164427" y="2994660"/>
-            <a:ext cx="2670733" cy="731520"/>
-          </a:xfrm>
-          <a:prstGeom prst="rect">
-            <a:avLst/>
-          </a:prstGeom>
-          <a:noFill/>
-        </p:spPr>
-        <p:txBody>
-          <a:bodyPr wrap="square" anchor="t" lIns="0" rIns="0" tIns="0" bIns="0"/>
-          <a:lstStyle/>
-          <a:p>
-            <a:pPr algn="ctr"/>
-            <a:r>
-              <a:rPr sz="1700" b="1" i="0">
-                <a:solidFill>
-                  <a:srgbClr val="03306E"/>
-                </a:solidFill>
-                <a:latin typeface="Calibri"/>
-              </a:rPr>
-              <a:t>Operate and maintain</a:t>
-            </a:r>
-          </a:p>
-        </p:txBody>
-      </p:sp>
-      <p:sp>
-        <p:nvSpPr>
-          <p:cNvPr id="17" name="Rounded Rectangle 16"/>
-          <p:cNvSpPr/>
-          <p:nvPr/>
-        </p:nvSpPr>
-        <p:spPr>
-          <a:xfrm>
-            <a:off x="6164427" y="3771900"/>
-            <a:ext cx="2670733" cy="960120"/>
-          </a:xfrm>
-          <a:prstGeom prst="roundRect">
-            <a:avLst>
-              <a:gd name="adj" fmla="val 6000"/>
-            </a:avLst>
-          </a:prstGeom>
-          <a:solidFill>
-            <a:srgbClr val="EAF3FF"/>
-          </a:solidFill>
-          <a:ln>
-            <a:noFill/>
-          </a:ln>
-          <a:effectLst/>
-        </p:spPr>
-        <p:style>
-          <a:lnRef idx="1">
-            <a:schemeClr val="accent1"/>
-          </a:lnRef>
-          <a:fillRef idx="3">
-            <a:schemeClr val="accent1"/>
-          </a:fillRef>
-          <a:effectRef idx="2">
-            <a:schemeClr val="accent1"/>
-          </a:effectRef>
-          <a:fontRef idx="minor">
-            <a:schemeClr val="lt1"/>
-          </a:fontRef>
-        </p:style>
-        <p:txBody>
-          <a:bodyPr rtlCol="0" anchor="ctr"/>
-          <a:lstStyle/>
-          <a:p/>
-        </p:txBody>
-      </p:sp>
-      <p:sp>
-        <p:nvSpPr>
-          <p:cNvPr id="18" name="TextBox 17"/>
-          <p:cNvSpPr txBox="1"/>
-          <p:nvPr/>
-        </p:nvSpPr>
-        <p:spPr>
-          <a:xfrm>
-            <a:off x="6301587" y="3909060"/>
-            <a:ext cx="2396413" cy="685800"/>
-          </a:xfrm>
-          <a:prstGeom prst="rect">
-            <a:avLst/>
-          </a:prstGeom>
-          <a:noFill/>
-        </p:spPr>
-        <p:txBody>
-          <a:bodyPr wrap="square" anchor="t" lIns="0" rIns="0" tIns="0" bIns="0"/>
-          <a:lstStyle/>
-          <a:p>
-            <a:pPr algn="l"/>
-            <a:r>
-              <a:rPr sz="1800" b="0" i="0">
-                <a:solidFill>
-                  <a:srgbClr val="202122"/>
-                </a:solidFill>
-                <a:latin typeface="Calibri"/>
-              </a:rPr>
-              <a:t>Use and look after it.</a:t>
-            </a:r>
-          </a:p>
-        </p:txBody>
-      </p:sp>
-      <p:sp>
-        <p:nvSpPr>
-          <p:cNvPr id="19" name="Oval 18"/>
-          <p:cNvSpPr/>
-          <p:nvPr/>
-        </p:nvSpPr>
-        <p:spPr>
-          <a:xfrm>
-            <a:off x="9987648" y="2217420"/>
-            <a:ext cx="640080" cy="640080"/>
-          </a:xfrm>
-          <a:prstGeom prst="ellipse">
-            <a:avLst/>
-          </a:prstGeom>
-          <a:solidFill>
-            <a:srgbClr val="F2B705"/>
-          </a:solidFill>
-          <a:ln>
-            <a:noFill/>
-          </a:ln>
-          <a:effectLst/>
-        </p:spPr>
-        <p:style>
-          <a:lnRef idx="1">
-            <a:schemeClr val="accent1"/>
-          </a:lnRef>
-          <a:fillRef idx="3">
-            <a:schemeClr val="accent1"/>
-          </a:fillRef>
-          <a:effectRef idx="2">
-            <a:schemeClr val="accent1"/>
-          </a:effectRef>
-          <a:fontRef idx="minor">
-            <a:schemeClr val="lt1"/>
-          </a:fontRef>
-        </p:style>
-        <p:txBody>
-          <a:bodyPr rtlCol="0" anchor="ctr" lIns="0" rIns="0" tIns="0" bIns="0"/>
-          <a:lstStyle/>
-          <a:p>
-            <a:pPr algn="ctr"/>
-            <a:r>
-              <a:rPr sz="2000" b="1">
-                <a:solidFill>
-                  <a:srgbClr val="202122"/>
-                </a:solidFill>
-                <a:latin typeface="Calibri"/>
-              </a:rPr>
-              <a:t>4</a:t>
-            </a:r>
-          </a:p>
-        </p:txBody>
-      </p:sp>
-      <p:sp>
-        <p:nvSpPr>
-          <p:cNvPr id="20" name="TextBox 19"/>
-          <p:cNvSpPr txBox="1"/>
-          <p:nvPr/>
-        </p:nvSpPr>
-        <p:spPr>
-          <a:xfrm>
-            <a:off x="8972321" y="2994660"/>
-            <a:ext cx="2670733" cy="731520"/>
-          </a:xfrm>
-          <a:prstGeom prst="rect">
-            <a:avLst/>
-          </a:prstGeom>
-          <a:noFill/>
-        </p:spPr>
-        <p:txBody>
-          <a:bodyPr wrap="square" anchor="t" lIns="0" rIns="0" tIns="0" bIns="0"/>
-          <a:lstStyle/>
-          <a:p>
-            <a:pPr algn="ctr"/>
-            <a:r>
-              <a:rPr sz="1700" b="1" i="0">
-                <a:solidFill>
-                  <a:srgbClr val="03306E"/>
-                </a:solidFill>
-                <a:latin typeface="Calibri"/>
-              </a:rPr>
-              <a:t>Dispose</a:t>
-            </a:r>
-          </a:p>
-        </p:txBody>
-      </p:sp>
-      <p:sp>
-        <p:nvSpPr>
-          <p:cNvPr id="21" name="Rounded Rectangle 20"/>
-          <p:cNvSpPr/>
-          <p:nvPr/>
-        </p:nvSpPr>
-        <p:spPr>
-          <a:xfrm>
-            <a:off x="8972321" y="3771900"/>
-            <a:ext cx="2670733" cy="960120"/>
-          </a:xfrm>
-          <a:prstGeom prst="roundRect">
-            <a:avLst>
-              <a:gd name="adj" fmla="val 6000"/>
-            </a:avLst>
-          </a:prstGeom>
-          <a:solidFill>
-            <a:srgbClr val="EAF3FF"/>
-          </a:solidFill>
-          <a:ln>
-            <a:noFill/>
-          </a:ln>
-          <a:effectLst/>
-        </p:spPr>
-        <p:style>
-          <a:lnRef idx="1">
-            <a:schemeClr val="accent1"/>
-          </a:lnRef>
-          <a:fillRef idx="3">
-            <a:schemeClr val="accent1"/>
-          </a:fillRef>
-          <a:effectRef idx="2">
-            <a:schemeClr val="accent1"/>
-          </a:effectRef>
-          <a:fontRef idx="minor">
-            <a:schemeClr val="lt1"/>
-          </a:fontRef>
-        </p:style>
-        <p:txBody>
-          <a:bodyPr rtlCol="0" anchor="ctr"/>
-          <a:lstStyle/>
-          <a:p/>
-        </p:txBody>
-      </p:sp>
-      <p:sp>
-        <p:nvSpPr>
-          <p:cNvPr id="22" name="TextBox 21"/>
-          <p:cNvSpPr txBox="1"/>
-          <p:nvPr/>
-        </p:nvSpPr>
-        <p:spPr>
-          <a:xfrm>
-            <a:off x="9109481" y="3909060"/>
-            <a:ext cx="2396413" cy="685800"/>
-          </a:xfrm>
-          <a:prstGeom prst="rect">
-            <a:avLst/>
-          </a:prstGeom>
-          <a:noFill/>
-        </p:spPr>
-        <p:txBody>
-          <a:bodyPr wrap="square" anchor="t" lIns="0" rIns="0" tIns="0" bIns="0"/>
-          <a:lstStyle/>
-          <a:p>
-            <a:pPr algn="l"/>
-            <a:r>
-              <a:rPr sz="1800" b="0" i="0">
-                <a:solidFill>
-                  <a:srgbClr val="202122"/>
-                </a:solidFill>
-                <a:latin typeface="Calibri"/>
-              </a:rPr>
-              <a:t>Retire, sell or recycle it.</a:t>
-            </a:r>
-          </a:p>
-        </p:txBody>
-      </p:sp>
-      <p:sp>
-        <p:nvSpPr>
-          <p:cNvPr id="23" name="TextBox 22"/>
-          <p:cNvSpPr txBox="1"/>
-          <p:nvPr/>
-        </p:nvSpPr>
-        <p:spPr>
-          <a:xfrm>
-            <a:off x="548640" y="5006340"/>
-            <a:ext cx="11094415" cy="548640"/>
-          </a:xfrm>
-          <a:prstGeom prst="rect">
-            <a:avLst/>
-          </a:prstGeom>
-          <a:noFill/>
-        </p:spPr>
-        <p:txBody>
-          <a:bodyPr wrap="square" anchor="t" lIns="0" rIns="0" tIns="0" bIns="0"/>
-          <a:lstStyle/>
-          <a:p>
-            <a:pPr algn="l"/>
-            <a:r>
-              <a:rPr sz="1600" b="0" i="1">
-                <a:solidFill>
-                  <a:srgbClr val="54595D"/>
-                </a:solidFill>
-                <a:latin typeface="Calibri"/>
-              </a:rPr>
-              <a:t>Capacity management (MRP II, finding bottlenecks) and whole-life budgeting, including depreciation, keep assets working efficiently.</a:t>
-            </a:r>
-          </a:p>
-        </p:txBody>
-      </p:sp>
-    </p:spTree>
-  </p:cSld>
-  <p:clrMapOvr>
-    <a:masterClrMapping/>
-  </p:clrMapOvr>
-</p:sld>
-</file>
-
 <file path=ppt/slides/slide6.xml><?xml version="1.0" encoding="utf-8"?>
 <p:sld xmlns:a="http://schemas.openxmlformats.org/drawingml/2006/main" xmlns:p="http://schemas.openxmlformats.org/presentationml/2006/main" xmlns:r="http://schemas.openxmlformats.org/officeDocument/2006/relationships">
   <p:cSld>
@@ -6996,7 +9042,7 @@
                 </a:solidFill>
                 <a:latin typeface="Cambria"/>
               </a:rPr>
-              <a:t>Check your understanding</a:t>
+              <a:t>Quick check: Stock practices</a:t>
             </a:r>
           </a:p>
         </p:txBody>
@@ -7075,8 +9121,8 @@
         </p:nvSpPr>
         <p:spPr>
           <a:xfrm>
-            <a:off x="548640" y="1618488"/>
-            <a:ext cx="411480" cy="411480"/>
+            <a:off x="548640" y="1691640"/>
+            <a:ext cx="502920" cy="502920"/>
           </a:xfrm>
           <a:prstGeom prst="ellipse">
             <a:avLst/>
@@ -7109,7 +9155,7 @@
           <a:p>
             <a:pPr algn="ctr"/>
             <a:r>
-              <a:rPr sz="1400" b="1">
+              <a:rPr sz="1600" b="1">
                 <a:solidFill>
                   <a:srgbClr val="202122"/>
                 </a:solidFill>
@@ -7128,8 +9174,8 @@
         </p:nvSpPr>
         <p:spPr>
           <a:xfrm>
-            <a:off x="1234440" y="1600200"/>
-            <a:ext cx="10408615" cy="1030986"/>
+            <a:off x="1371600" y="1645920"/>
+            <a:ext cx="10271455" cy="1188720"/>
           </a:xfrm>
           <a:prstGeom prst="rect">
             <a:avLst/>
@@ -7142,13 +9188,13 @@
           <a:p>
             <a:pPr algn="l"/>
             <a:r>
-              <a:rPr sz="2200" b="0" i="0">
+              <a:rPr sz="2400" b="0" i="0">
                 <a:solidFill>
                   <a:srgbClr val="202122"/>
                 </a:solidFill>
                 <a:latin typeface="Calibri"/>
               </a:rPr>
-              <a:t>What is just-in-time?</a:t>
+              <a:t>What is the main risk of JIT?</a:t>
             </a:r>
           </a:p>
         </p:txBody>
@@ -7161,8 +9207,8 @@
         </p:nvSpPr>
         <p:spPr>
           <a:xfrm>
-            <a:off x="548640" y="2814066"/>
-            <a:ext cx="411480" cy="411480"/>
+            <a:off x="548640" y="3108960"/>
+            <a:ext cx="502920" cy="502920"/>
           </a:xfrm>
           <a:prstGeom prst="ellipse">
             <a:avLst/>
@@ -7195,7 +9241,7 @@
           <a:p>
             <a:pPr algn="ctr"/>
             <a:r>
-              <a:rPr sz="1400" b="1">
+              <a:rPr sz="1600" b="1">
                 <a:solidFill>
                   <a:srgbClr val="202122"/>
                 </a:solidFill>
@@ -7214,8 +9260,8 @@
         </p:nvSpPr>
         <p:spPr>
           <a:xfrm>
-            <a:off x="1234440" y="2795778"/>
-            <a:ext cx="10408615" cy="1030986"/>
+            <a:off x="1371600" y="3063240"/>
+            <a:ext cx="10271455" cy="1188720"/>
           </a:xfrm>
           <a:prstGeom prst="rect">
             <a:avLst/>
@@ -7228,13 +9274,13 @@
           <a:p>
             <a:pPr algn="l"/>
             <a:r>
-              <a:rPr sz="2200" b="0" i="0">
+              <a:rPr sz="2400" b="0" i="0">
                 <a:solidFill>
                   <a:srgbClr val="202122"/>
                 </a:solidFill>
                 <a:latin typeface="Calibri"/>
               </a:rPr>
-              <a:t>What is obsolete stock?</a:t>
+              <a:t>When is made-to-order best?</a:t>
             </a:r>
           </a:p>
         </p:txBody>
@@ -7247,8 +9293,8 @@
         </p:nvSpPr>
         <p:spPr>
           <a:xfrm>
-            <a:off x="548640" y="4009644"/>
-            <a:ext cx="411480" cy="411480"/>
+            <a:off x="548640" y="4526280"/>
+            <a:ext cx="502920" cy="502920"/>
           </a:xfrm>
           <a:prstGeom prst="ellipse">
             <a:avLst/>
@@ -7281,7 +9327,7 @@
           <a:p>
             <a:pPr algn="ctr"/>
             <a:r>
-              <a:rPr sz="1400" b="1">
+              <a:rPr sz="1600" b="1">
                 <a:solidFill>
                   <a:srgbClr val="202122"/>
                 </a:solidFill>
@@ -7300,8 +9346,8 @@
         </p:nvSpPr>
         <p:spPr>
           <a:xfrm>
-            <a:off x="1234440" y="3991356"/>
-            <a:ext cx="10408615" cy="1030986"/>
+            <a:off x="1371600" y="4480560"/>
+            <a:ext cx="10271455" cy="1188720"/>
           </a:xfrm>
           <a:prstGeom prst="rect">
             <a:avLst/>
@@ -7314,80 +9360,27 @@
           <a:p>
             <a:pPr algn="l"/>
             <a:r>
-              <a:rPr sz="2200" b="0" i="0">
+              <a:rPr sz="2400" b="0" i="0">
                 <a:solidFill>
                   <a:srgbClr val="202122"/>
                 </a:solidFill>
                 <a:latin typeface="Calibri"/>
               </a:rPr>
-              <a:t>What is a bottleneck?</a:t>
-            </a:r>
-          </a:p>
-        </p:txBody>
-      </p:sp>
-      <p:sp>
-        <p:nvSpPr>
-          <p:cNvPr id="12" name="Oval 11"/>
-          <p:cNvSpPr/>
-          <p:nvPr/>
-        </p:nvSpPr>
-        <p:spPr>
-          <a:xfrm>
-            <a:off x="548640" y="5205221"/>
-            <a:ext cx="411480" cy="411480"/>
-          </a:xfrm>
-          <a:prstGeom prst="ellipse">
-            <a:avLst/>
-          </a:prstGeom>
-          <a:solidFill>
-            <a:srgbClr val="F2B705"/>
-          </a:solidFill>
-          <a:ln>
-            <a:noFill/>
-          </a:ln>
-          <a:effectLst/>
-        </p:spPr>
-        <p:style>
-          <a:lnRef idx="1">
-            <a:schemeClr val="accent1"/>
-          </a:lnRef>
-          <a:fillRef idx="3">
-            <a:schemeClr val="accent1"/>
-          </a:fillRef>
-          <a:effectRef idx="2">
-            <a:schemeClr val="accent1"/>
-          </a:effectRef>
-          <a:fontRef idx="minor">
-            <a:schemeClr val="lt1"/>
-          </a:fontRef>
-        </p:style>
-        <p:txBody>
-          <a:bodyPr rtlCol="0" anchor="ctr" lIns="0" rIns="0" tIns="0" bIns="0"/>
-          <a:lstStyle/>
-          <a:p>
-            <a:pPr algn="ctr"/>
-            <a:r>
-              <a:rPr sz="1400" b="1">
-                <a:solidFill>
-                  <a:srgbClr val="202122"/>
-                </a:solidFill>
-                <a:latin typeface="Calibri"/>
-              </a:rPr>
-              <a:t>4</a:t>
-            </a:r>
-          </a:p>
-        </p:txBody>
-      </p:sp>
-      <p:sp>
-        <p:nvSpPr>
-          <p:cNvPr id="13" name="TextBox 12"/>
+              <a:t>What does MRP calculate?</a:t>
+            </a:r>
+          </a:p>
+        </p:txBody>
+      </p:sp>
+      <p:sp>
+        <p:nvSpPr>
+          <p:cNvPr id="12" name="TextBox 11"/>
           <p:cNvSpPr txBox="1"/>
           <p:nvPr/>
         </p:nvSpPr>
         <p:spPr>
           <a:xfrm>
-            <a:off x="1234440" y="5186933"/>
-            <a:ext cx="10408615" cy="1030986"/>
+            <a:off x="548640" y="5852160"/>
+            <a:ext cx="11094415" cy="365760"/>
           </a:xfrm>
           <a:prstGeom prst="rect">
             <a:avLst/>
@@ -7400,13 +9393,13 @@
           <a:p>
             <a:pPr algn="l"/>
             <a:r>
-              <a:rPr sz="2200" b="0" i="0">
-                <a:solidFill>
-                  <a:srgbClr val="202122"/>
-                </a:solidFill>
-                <a:latin typeface="Calibri"/>
-              </a:rPr>
-              <a:t>Name the four asset life cycle stages.</a:t>
+              <a:rPr sz="1300" b="0" i="1">
+                <a:solidFill>
+                  <a:srgbClr val="54595D"/>
+                </a:solidFill>
+                <a:latin typeface="Calibri"/>
+              </a:rPr>
+              <a:t>Answer on mini whiteboards or in your book. Answers are in the speaker notes.</a:t>
             </a:r>
           </a:p>
         </p:txBody>
@@ -7498,7 +9491,7 @@
                 </a:solidFill>
                 <a:latin typeface="Cambria"/>
               </a:rPr>
-              <a:t>Answers</a:t>
+              <a:t>Asset life cycle</a:t>
             </a:r>
           </a:p>
         </p:txBody>
@@ -7571,14 +9564,129 @@
       </p:sp>
       <p:sp>
         <p:nvSpPr>
-          <p:cNvPr id="6" name="Oval 5"/>
+          <p:cNvPr id="6" name="TextBox 5"/>
+          <p:cNvSpPr txBox="1"/>
+          <p:nvPr/>
+        </p:nvSpPr>
+        <p:spPr>
+          <a:xfrm>
+            <a:off x="548640" y="1554480"/>
+            <a:ext cx="6720840" cy="4617720"/>
+          </a:xfrm>
+          <a:prstGeom prst="rect">
+            <a:avLst/>
+          </a:prstGeom>
+          <a:noFill/>
+        </p:spPr>
+        <p:txBody>
+          <a:bodyPr wrap="square" lIns="0" rIns="0" tIns="0" bIns="0">
+            <a:spAutoFit/>
+          </a:bodyPr>
+          <a:lstStyle/>
+          <a:p>
+            <a:pPr>
+              <a:spcAft>
+                <a:spcPts val="1320"/>
+              </a:spcAft>
+            </a:pPr>
+            <a:r>
+              <a:rPr sz="2200" b="0">
+                <a:solidFill>
+                  <a:srgbClr val="202122"/>
+                </a:solidFill>
+                <a:latin typeface="Calibri"/>
+              </a:rPr>
+              <a:t>Assets such as machines are managed through four stages: plan what's needed, acquire it, operate and maintain it, then dispose of it by selling, recycling or scrapping.</a:t>
+            </a:r>
+          </a:p>
+          <a:p>
+            <a:pPr>
+              <a:spcAft>
+                <a:spcPts val="1320"/>
+              </a:spcAft>
+            </a:pPr>
+            <a:r>
+              <a:rPr sz="2200" b="0">
+                <a:solidFill>
+                  <a:srgbClr val="202122"/>
+                </a:solidFill>
+                <a:latin typeface="Calibri"/>
+              </a:rPr>
+              <a:t>Whole-life budgeting considers the total cost over the asset's life, not just the purchase price, including maintenance, energy and disposal. Depreciation records the loss of value over time.</a:t>
+            </a:r>
+          </a:p>
+          <a:p>
+            <a:pPr>
+              <a:spcAft>
+                <a:spcPts val="1320"/>
+              </a:spcAft>
+            </a:pPr>
+            <a:r>
+              <a:rPr sz="2200" b="0">
+                <a:solidFill>
+                  <a:srgbClr val="202122"/>
+                </a:solidFill>
+                <a:latin typeface="Calibri"/>
+              </a:rPr>
+              <a:t>Capacity management, such as manufacturing resource planning, finds bottlenecks: the stage that limits the whole process's output.</a:t>
+            </a:r>
+          </a:p>
+        </p:txBody>
+      </p:sp>
+      <p:sp>
+        <p:nvSpPr>
+          <p:cNvPr id="7" name="Rounded Rectangle 6"/>
           <p:cNvSpPr/>
           <p:nvPr/>
         </p:nvSpPr>
         <p:spPr>
           <a:xfrm>
-            <a:off x="548640" y="1618488"/>
-            <a:ext cx="411480" cy="411480"/>
+            <a:off x="7772400" y="1554480"/>
+            <a:ext cx="3867912" cy="4526280"/>
+          </a:xfrm>
+          <a:prstGeom prst="roundRect">
+            <a:avLst>
+              <a:gd name="adj" fmla="val 8000"/>
+            </a:avLst>
+          </a:prstGeom>
+          <a:solidFill>
+            <a:srgbClr val="03306E"/>
+          </a:solidFill>
+          <a:ln>
+            <a:noFill/>
+          </a:ln>
+          <a:effectLst/>
+        </p:spPr>
+        <p:style>
+          <a:lnRef idx="1">
+            <a:schemeClr val="accent1"/>
+          </a:lnRef>
+          <a:fillRef idx="3">
+            <a:schemeClr val="accent1"/>
+          </a:fillRef>
+          <a:effectRef idx="2">
+            <a:schemeClr val="accent1"/>
+          </a:effectRef>
+          <a:fontRef idx="minor">
+            <a:schemeClr val="lt1"/>
+          </a:fontRef>
+        </p:style>
+        <p:txBody>
+          <a:bodyPr rtlCol="0" anchor="ctr"/>
+          <a:lstStyle/>
+          <a:p/>
+        </p:txBody>
+      </p:sp>
+      <p:sp>
+        <p:nvSpPr>
+          <p:cNvPr id="8" name="Oval 7"/>
+          <p:cNvSpPr/>
+          <p:nvPr/>
+        </p:nvSpPr>
+        <p:spPr>
+          <a:xfrm>
+            <a:off x="8046720" y="1828800"/>
+            <a:ext cx="548640" cy="548640"/>
           </a:xfrm>
           <a:prstGeom prst="ellipse">
             <a:avLst/>
@@ -7611,110 +9719,13 @@
           <a:p>
             <a:pPr algn="ctr"/>
             <a:r>
-              <a:rPr sz="1400" b="1">
+              <a:rPr sz="1300" b="1">
                 <a:solidFill>
                   <a:srgbClr val="202122"/>
                 </a:solidFill>
                 <a:latin typeface="Calibri"/>
               </a:rPr>
-              <a:t>1</a:t>
-            </a:r>
-          </a:p>
-        </p:txBody>
-      </p:sp>
-      <p:sp>
-        <p:nvSpPr>
-          <p:cNvPr id="7" name="TextBox 6"/>
-          <p:cNvSpPr txBox="1"/>
-          <p:nvPr/>
-        </p:nvSpPr>
-        <p:spPr>
-          <a:xfrm>
-            <a:off x="1234440" y="1600200"/>
-            <a:ext cx="10408615" cy="1030986"/>
-          </a:xfrm>
-          <a:prstGeom prst="rect">
-            <a:avLst/>
-          </a:prstGeom>
-          <a:noFill/>
-        </p:spPr>
-        <p:txBody>
-          <a:bodyPr wrap="square" anchor="t" lIns="0" rIns="0" tIns="0" bIns="0"/>
-          <a:lstStyle/>
-          <a:p>
-            <a:pPr algn="l"/>
-            <a:r>
-              <a:rPr sz="1800" b="0" i="0">
-                <a:solidFill>
-                  <a:srgbClr val="54595D"/>
-                </a:solidFill>
-                <a:latin typeface="Calibri"/>
-              </a:rPr>
-              <a:t>What is just-in-time?</a:t>
-            </a:r>
-          </a:p>
-          <a:p>
-            <a:r>
-              <a:rPr sz="1800" b="1">
-                <a:solidFill>
-                  <a:srgbClr val="03306E"/>
-                </a:solidFill>
-                <a:latin typeface="Calibri"/>
-              </a:rPr>
-              <a:t>Receiving parts only when they are needed, with minimal stock.</a:t>
-            </a:r>
-          </a:p>
-        </p:txBody>
-      </p:sp>
-      <p:sp>
-        <p:nvSpPr>
-          <p:cNvPr id="8" name="Oval 7"/>
-          <p:cNvSpPr/>
-          <p:nvPr/>
-        </p:nvSpPr>
-        <p:spPr>
-          <a:xfrm>
-            <a:off x="548640" y="2814066"/>
-            <a:ext cx="411480" cy="411480"/>
-          </a:xfrm>
-          <a:prstGeom prst="ellipse">
-            <a:avLst/>
-          </a:prstGeom>
-          <a:solidFill>
-            <a:srgbClr val="F2B705"/>
-          </a:solidFill>
-          <a:ln>
-            <a:noFill/>
-          </a:ln>
-          <a:effectLst/>
-        </p:spPr>
-        <p:style>
-          <a:lnRef idx="1">
-            <a:schemeClr val="accent1"/>
-          </a:lnRef>
-          <a:fillRef idx="3">
-            <a:schemeClr val="accent1"/>
-          </a:fillRef>
-          <a:effectRef idx="2">
-            <a:schemeClr val="accent1"/>
-          </a:effectRef>
-          <a:fontRef idx="minor">
-            <a:schemeClr val="lt1"/>
-          </a:fontRef>
-        </p:style>
-        <p:txBody>
-          <a:bodyPr rtlCol="0" anchor="ctr" lIns="0" rIns="0" tIns="0" bIns="0"/>
-          <a:lstStyle/>
-          <a:p>
-            <a:pPr algn="ctr"/>
-            <a:r>
-              <a:rPr sz="1400" b="1">
-                <a:solidFill>
-                  <a:srgbClr val="202122"/>
-                </a:solidFill>
-                <a:latin typeface="Calibri"/>
-              </a:rPr>
-              <a:t>2</a:t>
+              <a:t>e.g.</a:t>
             </a:r>
           </a:p>
         </p:txBody>
@@ -7727,8 +9738,8 @@
         </p:nvSpPr>
         <p:spPr>
           <a:xfrm>
-            <a:off x="1234440" y="2795778"/>
-            <a:ext cx="10408615" cy="1030986"/>
+            <a:off x="8046720" y="2560320"/>
+            <a:ext cx="3291840" cy="365760"/>
           </a:xfrm>
           <a:prstGeom prst="rect">
             <a:avLst/>
@@ -7741,91 +9752,27 @@
           <a:p>
             <a:pPr algn="l"/>
             <a:r>
-              <a:rPr sz="1800" b="0" i="0">
-                <a:solidFill>
-                  <a:srgbClr val="54595D"/>
-                </a:solidFill>
-                <a:latin typeface="Calibri"/>
-              </a:rPr>
-              <a:t>What is obsolete stock?</a:t>
-            </a:r>
-          </a:p>
-          <a:p>
-            <a:r>
-              <a:rPr sz="1800" b="1">
-                <a:solidFill>
-                  <a:srgbClr val="03306E"/>
-                </a:solidFill>
-                <a:latin typeface="Calibri"/>
-              </a:rPr>
-              <a:t>Stock that can no longer be used or sold.</a:t>
-            </a:r>
-          </a:p>
-        </p:txBody>
-      </p:sp>
-      <p:sp>
-        <p:nvSpPr>
-          <p:cNvPr id="10" name="Oval 9"/>
-          <p:cNvSpPr/>
-          <p:nvPr/>
-        </p:nvSpPr>
-        <p:spPr>
-          <a:xfrm>
-            <a:off x="548640" y="4009644"/>
-            <a:ext cx="411480" cy="411480"/>
-          </a:xfrm>
-          <a:prstGeom prst="ellipse">
-            <a:avLst/>
-          </a:prstGeom>
-          <a:solidFill>
-            <a:srgbClr val="F2B705"/>
-          </a:solidFill>
-          <a:ln>
-            <a:noFill/>
-          </a:ln>
-          <a:effectLst/>
-        </p:spPr>
-        <p:style>
-          <a:lnRef idx="1">
-            <a:schemeClr val="accent1"/>
-          </a:lnRef>
-          <a:fillRef idx="3">
-            <a:schemeClr val="accent1"/>
-          </a:fillRef>
-          <a:effectRef idx="2">
-            <a:schemeClr val="accent1"/>
-          </a:effectRef>
-          <a:fontRef idx="minor">
-            <a:schemeClr val="lt1"/>
-          </a:fontRef>
-        </p:style>
-        <p:txBody>
-          <a:bodyPr rtlCol="0" anchor="ctr" lIns="0" rIns="0" tIns="0" bIns="0"/>
-          <a:lstStyle/>
-          <a:p>
-            <a:pPr algn="ctr"/>
-            <a:r>
-              <a:rPr sz="1400" b="1">
-                <a:solidFill>
-                  <a:srgbClr val="202122"/>
-                </a:solidFill>
-                <a:latin typeface="Calibri"/>
-              </a:rPr>
-              <a:t>3</a:t>
-            </a:r>
-          </a:p>
-        </p:txBody>
-      </p:sp>
-      <p:sp>
-        <p:nvSpPr>
-          <p:cNvPr id="11" name="TextBox 10"/>
+              <a:rPr sz="1300" b="1" i="0">
+                <a:solidFill>
+                  <a:srgbClr val="A9C8F0"/>
+                </a:solidFill>
+                <a:latin typeface="Calibri"/>
+              </a:rPr>
+              <a:t>EXAMPLE</a:t>
+            </a:r>
+          </a:p>
+        </p:txBody>
+      </p:sp>
+      <p:sp>
+        <p:nvSpPr>
+          <p:cNvPr id="10" name="TextBox 9"/>
           <p:cNvSpPr txBox="1"/>
           <p:nvPr/>
         </p:nvSpPr>
         <p:spPr>
           <a:xfrm>
-            <a:off x="1234440" y="3991356"/>
-            <a:ext cx="10408615" cy="1030986"/>
+            <a:off x="8046720" y="2971800"/>
+            <a:ext cx="3291840" cy="2971800"/>
           </a:xfrm>
           <a:prstGeom prst="rect">
             <a:avLst/>
@@ -7838,121 +9785,13 @@
           <a:p>
             <a:pPr algn="l"/>
             <a:r>
-              <a:rPr sz="1800" b="0" i="0">
-                <a:solidFill>
-                  <a:srgbClr val="54595D"/>
-                </a:solidFill>
-                <a:latin typeface="Calibri"/>
-              </a:rPr>
-              <a:t>What is a bottleneck?</a:t>
-            </a:r>
-          </a:p>
-          <a:p>
-            <a:r>
-              <a:rPr sz="1800" b="1">
-                <a:solidFill>
-                  <a:srgbClr val="03306E"/>
-                </a:solidFill>
-                <a:latin typeface="Calibri"/>
-              </a:rPr>
-              <a:t>The stage that limits the capacity of the whole process.</a:t>
-            </a:r>
-          </a:p>
-        </p:txBody>
-      </p:sp>
-      <p:sp>
-        <p:nvSpPr>
-          <p:cNvPr id="12" name="Oval 11"/>
-          <p:cNvSpPr/>
-          <p:nvPr/>
-        </p:nvSpPr>
-        <p:spPr>
-          <a:xfrm>
-            <a:off x="548640" y="5205221"/>
-            <a:ext cx="411480" cy="411480"/>
-          </a:xfrm>
-          <a:prstGeom prst="ellipse">
-            <a:avLst/>
-          </a:prstGeom>
-          <a:solidFill>
-            <a:srgbClr val="F2B705"/>
-          </a:solidFill>
-          <a:ln>
-            <a:noFill/>
-          </a:ln>
-          <a:effectLst/>
-        </p:spPr>
-        <p:style>
-          <a:lnRef idx="1">
-            <a:schemeClr val="accent1"/>
-          </a:lnRef>
-          <a:fillRef idx="3">
-            <a:schemeClr val="accent1"/>
-          </a:fillRef>
-          <a:effectRef idx="2">
-            <a:schemeClr val="accent1"/>
-          </a:effectRef>
-          <a:fontRef idx="minor">
-            <a:schemeClr val="lt1"/>
-          </a:fontRef>
-        </p:style>
-        <p:txBody>
-          <a:bodyPr rtlCol="0" anchor="ctr" lIns="0" rIns="0" tIns="0" bIns="0"/>
-          <a:lstStyle/>
-          <a:p>
-            <a:pPr algn="ctr"/>
-            <a:r>
-              <a:rPr sz="1400" b="1">
-                <a:solidFill>
-                  <a:srgbClr val="202122"/>
-                </a:solidFill>
-                <a:latin typeface="Calibri"/>
-              </a:rPr>
-              <a:t>4</a:t>
-            </a:r>
-          </a:p>
-        </p:txBody>
-      </p:sp>
-      <p:sp>
-        <p:nvSpPr>
-          <p:cNvPr id="13" name="TextBox 12"/>
-          <p:cNvSpPr txBox="1"/>
-          <p:nvPr/>
-        </p:nvSpPr>
-        <p:spPr>
-          <a:xfrm>
-            <a:off x="1234440" y="5186933"/>
-            <a:ext cx="10408615" cy="1030986"/>
-          </a:xfrm>
-          <a:prstGeom prst="rect">
-            <a:avLst/>
-          </a:prstGeom>
-          <a:noFill/>
-        </p:spPr>
-        <p:txBody>
-          <a:bodyPr wrap="square" anchor="t" lIns="0" rIns="0" tIns="0" bIns="0"/>
-          <a:lstStyle/>
-          <a:p>
-            <a:pPr algn="l"/>
-            <a:r>
-              <a:rPr sz="1800" b="0" i="0">
-                <a:solidFill>
-                  <a:srgbClr val="54595D"/>
-                </a:solidFill>
-                <a:latin typeface="Calibri"/>
-              </a:rPr>
-              <a:t>Name the four asset life cycle stages.</a:t>
-            </a:r>
-          </a:p>
-          <a:p>
-            <a:r>
-              <a:rPr sz="1800" b="1">
-                <a:solidFill>
-                  <a:srgbClr val="03306E"/>
-                </a:solidFill>
-                <a:latin typeface="Calibri"/>
-              </a:rPr>
-              <a:t>Plan, acquire, operate and maintain, dispose.</a:t>
+              <a:rPr sz="1900" b="0" i="0">
+                <a:solidFill>
+                  <a:srgbClr val="FFFFFF"/>
+                </a:solidFill>
+                <a:latin typeface="Cambria"/>
+              </a:rPr>
+              <a:t>A cheaper machine that uses twice the energy and needs more servicing can cost more over ten years than a pricier efficient one.</a:t>
             </a:r>
           </a:p>
         </p:txBody>
@@ -8044,7 +9883,7 @@
                 </a:solidFill>
                 <a:latin typeface="Cambria"/>
               </a:rPr>
-              <a:t>Activity: Choose a stock strategy</a:t>
+              <a:t>Asset life cycle</a:t>
             </a:r>
           </a:p>
         </p:txBody>
@@ -8117,19 +9956,59 @@
       </p:sp>
       <p:sp>
         <p:nvSpPr>
-          <p:cNvPr id="6" name="Rounded Rectangle 5"/>
+          <p:cNvPr id="6" name="Rectangle 5"/>
           <p:cNvSpPr/>
           <p:nvPr/>
         </p:nvSpPr>
         <p:spPr>
           <a:xfrm>
-            <a:off x="548640" y="1508760"/>
-            <a:ext cx="2011680" cy="457200"/>
-          </a:xfrm>
-          <a:prstGeom prst="roundRect">
-            <a:avLst>
-              <a:gd name="adj" fmla="val 50000"/>
-            </a:avLst>
+            <a:off x="1884006" y="2519172"/>
+            <a:ext cx="8423681" cy="36576"/>
+          </a:xfrm>
+          <a:prstGeom prst="rect">
+            <a:avLst/>
+          </a:prstGeom>
+          <a:solidFill>
+            <a:srgbClr val="A9C8F0"/>
+          </a:solidFill>
+          <a:ln>
+            <a:noFill/>
+          </a:ln>
+          <a:effectLst/>
+        </p:spPr>
+        <p:style>
+          <a:lnRef idx="1">
+            <a:schemeClr val="accent1"/>
+          </a:lnRef>
+          <a:fillRef idx="3">
+            <a:schemeClr val="accent1"/>
+          </a:fillRef>
+          <a:effectRef idx="2">
+            <a:schemeClr val="accent1"/>
+          </a:effectRef>
+          <a:fontRef idx="minor">
+            <a:schemeClr val="lt1"/>
+          </a:fontRef>
+        </p:style>
+        <p:txBody>
+          <a:bodyPr rtlCol="0" anchor="ctr"/>
+          <a:lstStyle/>
+          <a:p/>
+        </p:txBody>
+      </p:sp>
+      <p:sp>
+        <p:nvSpPr>
+          <p:cNvPr id="7" name="Oval 6"/>
+          <p:cNvSpPr/>
+          <p:nvPr/>
+        </p:nvSpPr>
+        <p:spPr>
+          <a:xfrm>
+            <a:off x="1563966" y="2217420"/>
+            <a:ext cx="640080" cy="640080"/>
+          </a:xfrm>
+          <a:prstGeom prst="ellipse">
+            <a:avLst/>
           </a:prstGeom>
           <a:solidFill>
             <a:srgbClr val="F2B705"/>
@@ -8154,40 +10033,18 @@
           </a:fontRef>
         </p:style>
         <p:txBody>
-          <a:bodyPr rtlCol="0" anchor="ctr"/>
-          <a:lstStyle/>
-          <a:p/>
-        </p:txBody>
-      </p:sp>
-      <p:sp>
-        <p:nvSpPr>
-          <p:cNvPr id="7" name="TextBox 6"/>
-          <p:cNvSpPr txBox="1"/>
-          <p:nvPr/>
-        </p:nvSpPr>
-        <p:spPr>
-          <a:xfrm>
-            <a:off x="548640" y="1508760"/>
-            <a:ext cx="2011680" cy="457200"/>
-          </a:xfrm>
-          <a:prstGeom prst="rect">
-            <a:avLst/>
-          </a:prstGeom>
-          <a:noFill/>
-        </p:spPr>
-        <p:txBody>
-          <a:bodyPr wrap="square" anchor="ctr" lIns="0" rIns="0" tIns="0" bIns="0"/>
+          <a:bodyPr rtlCol="0" anchor="ctr" lIns="0" rIns="0" tIns="0" bIns="0"/>
           <a:lstStyle/>
           <a:p>
             <a:pPr algn="ctr"/>
             <a:r>
-              <a:rPr sz="1400" b="1" i="0">
+              <a:rPr sz="2000" b="1">
                 <a:solidFill>
                   <a:srgbClr val="202122"/>
                 </a:solidFill>
                 <a:latin typeface="Calibri"/>
               </a:rPr>
-              <a:t>20 minutes</a:t>
+              <a:t>1</a:t>
             </a:r>
           </a:p>
         </p:txBody>
@@ -8200,8 +10057,8 @@
         </p:nvSpPr>
         <p:spPr>
           <a:xfrm>
-            <a:off x="2743200" y="1508760"/>
-            <a:ext cx="4754880" cy="457200"/>
+            <a:off x="548640" y="2994660"/>
+            <a:ext cx="2670733" cy="731520"/>
           </a:xfrm>
           <a:prstGeom prst="rect">
             <a:avLst/>
@@ -8209,380 +10066,36 @@
           <a:noFill/>
         </p:spPr>
         <p:txBody>
-          <a:bodyPr wrap="square" anchor="ctr" lIns="0" rIns="0" tIns="0" bIns="0"/>
-          <a:lstStyle/>
-          <a:p>
-            <a:pPr algn="l"/>
-            <a:r>
-              <a:rPr sz="1400" b="0" i="1">
-                <a:solidFill>
-                  <a:srgbClr val="54595D"/>
-                </a:solidFill>
-                <a:latin typeface="Calibri"/>
-              </a:rPr>
-              <a:t>Pairs</a:t>
-            </a:r>
-          </a:p>
-        </p:txBody>
-      </p:sp>
-      <p:sp>
-        <p:nvSpPr>
-          <p:cNvPr id="9" name="Oval 8"/>
+          <a:bodyPr wrap="square" anchor="t" lIns="0" rIns="0" tIns="0" bIns="0"/>
+          <a:lstStyle/>
+          <a:p>
+            <a:pPr algn="ctr"/>
+            <a:r>
+              <a:rPr sz="1700" b="1" i="0">
+                <a:solidFill>
+                  <a:srgbClr val="03306E"/>
+                </a:solidFill>
+                <a:latin typeface="Calibri"/>
+              </a:rPr>
+              <a:t>Plan</a:t>
+            </a:r>
+          </a:p>
+        </p:txBody>
+      </p:sp>
+      <p:sp>
+        <p:nvSpPr>
+          <p:cNvPr id="9" name="Rounded Rectangle 8"/>
           <p:cNvSpPr/>
           <p:nvPr/>
         </p:nvSpPr>
         <p:spPr>
           <a:xfrm>
-            <a:off x="548640" y="2482596"/>
-            <a:ext cx="384048" cy="384048"/>
-          </a:xfrm>
-          <a:prstGeom prst="ellipse">
-            <a:avLst/>
-          </a:prstGeom>
-          <a:solidFill>
-            <a:srgbClr val="0645AD"/>
-          </a:solidFill>
-          <a:ln>
-            <a:noFill/>
-          </a:ln>
-          <a:effectLst/>
-        </p:spPr>
-        <p:style>
-          <a:lnRef idx="1">
-            <a:schemeClr val="accent1"/>
-          </a:lnRef>
-          <a:fillRef idx="3">
-            <a:schemeClr val="accent1"/>
-          </a:fillRef>
-          <a:effectRef idx="2">
-            <a:schemeClr val="accent1"/>
-          </a:effectRef>
-          <a:fontRef idx="minor">
-            <a:schemeClr val="lt1"/>
-          </a:fontRef>
-        </p:style>
-        <p:txBody>
-          <a:bodyPr rtlCol="0" anchor="ctr" lIns="0" rIns="0" tIns="0" bIns="0"/>
-          <a:lstStyle/>
-          <a:p>
-            <a:pPr algn="ctr"/>
-            <a:r>
-              <a:rPr sz="1300" b="1">
-                <a:solidFill>
-                  <a:srgbClr val="FFFFFF"/>
-                </a:solidFill>
-                <a:latin typeface="Calibri"/>
-              </a:rPr>
-              <a:t>1</a:t>
-            </a:r>
-          </a:p>
-        </p:txBody>
-      </p:sp>
-      <p:sp>
-        <p:nvSpPr>
-          <p:cNvPr id="10" name="TextBox 9"/>
-          <p:cNvSpPr txBox="1"/>
-          <p:nvPr/>
-        </p:nvSpPr>
-        <p:spPr>
-          <a:xfrm>
-            <a:off x="1143000" y="2240280"/>
-            <a:ext cx="5943600" cy="868680"/>
-          </a:xfrm>
-          <a:prstGeom prst="rect">
-            <a:avLst/>
-          </a:prstGeom>
-          <a:noFill/>
-        </p:spPr>
-        <p:txBody>
-          <a:bodyPr wrap="square" anchor="ctr" lIns="0" rIns="0" tIns="0" bIns="0"/>
-          <a:lstStyle/>
-          <a:p>
-            <a:pPr algn="l"/>
-            <a:r>
-              <a:rPr sz="1700" b="0" i="0">
-                <a:solidFill>
-                  <a:srgbClr val="202122"/>
-                </a:solidFill>
-                <a:latin typeface="Calibri"/>
-              </a:rPr>
-              <a:t>Three businesses: a bespoke furniture maker, a screw manufacturer, a car assembly plant.</a:t>
-            </a:r>
-          </a:p>
-        </p:txBody>
-      </p:sp>
-      <p:sp>
-        <p:nvSpPr>
-          <p:cNvPr id="11" name="Oval 10"/>
-          <p:cNvSpPr/>
-          <p:nvPr/>
-        </p:nvSpPr>
-        <p:spPr>
-          <a:xfrm>
-            <a:off x="548640" y="3461004"/>
-            <a:ext cx="384048" cy="384048"/>
-          </a:xfrm>
-          <a:prstGeom prst="ellipse">
-            <a:avLst/>
-          </a:prstGeom>
-          <a:solidFill>
-            <a:srgbClr val="0645AD"/>
-          </a:solidFill>
-          <a:ln>
-            <a:noFill/>
-          </a:ln>
-          <a:effectLst/>
-        </p:spPr>
-        <p:style>
-          <a:lnRef idx="1">
-            <a:schemeClr val="accent1"/>
-          </a:lnRef>
-          <a:fillRef idx="3">
-            <a:schemeClr val="accent1"/>
-          </a:fillRef>
-          <a:effectRef idx="2">
-            <a:schemeClr val="accent1"/>
-          </a:effectRef>
-          <a:fontRef idx="minor">
-            <a:schemeClr val="lt1"/>
-          </a:fontRef>
-        </p:style>
-        <p:txBody>
-          <a:bodyPr rtlCol="0" anchor="ctr" lIns="0" rIns="0" tIns="0" bIns="0"/>
-          <a:lstStyle/>
-          <a:p>
-            <a:pPr algn="ctr"/>
-            <a:r>
-              <a:rPr sz="1300" b="1">
-                <a:solidFill>
-                  <a:srgbClr val="FFFFFF"/>
-                </a:solidFill>
-                <a:latin typeface="Calibri"/>
-              </a:rPr>
-              <a:t>2</a:t>
-            </a:r>
-          </a:p>
-        </p:txBody>
-      </p:sp>
-      <p:sp>
-        <p:nvSpPr>
-          <p:cNvPr id="12" name="TextBox 11"/>
-          <p:cNvSpPr txBox="1"/>
-          <p:nvPr/>
-        </p:nvSpPr>
-        <p:spPr>
-          <a:xfrm>
-            <a:off x="1143000" y="3218688"/>
-            <a:ext cx="5943600" cy="868680"/>
-          </a:xfrm>
-          <a:prstGeom prst="rect">
-            <a:avLst/>
-          </a:prstGeom>
-          <a:noFill/>
-        </p:spPr>
-        <p:txBody>
-          <a:bodyPr wrap="square" anchor="ctr" lIns="0" rIns="0" tIns="0" bIns="0"/>
-          <a:lstStyle/>
-          <a:p>
-            <a:pPr algn="l"/>
-            <a:r>
-              <a:rPr sz="1700" b="0" i="0">
-                <a:solidFill>
-                  <a:srgbClr val="202122"/>
-                </a:solidFill>
-                <a:latin typeface="Calibri"/>
-              </a:rPr>
-              <a:t>Choose a stock practice for each.</a:t>
-            </a:r>
-          </a:p>
-        </p:txBody>
-      </p:sp>
-      <p:sp>
-        <p:nvSpPr>
-          <p:cNvPr id="13" name="Oval 12"/>
-          <p:cNvSpPr/>
-          <p:nvPr/>
-        </p:nvSpPr>
-        <p:spPr>
-          <a:xfrm>
-            <a:off x="548640" y="4439412"/>
-            <a:ext cx="384048" cy="384048"/>
-          </a:xfrm>
-          <a:prstGeom prst="ellipse">
-            <a:avLst/>
-          </a:prstGeom>
-          <a:solidFill>
-            <a:srgbClr val="0645AD"/>
-          </a:solidFill>
-          <a:ln>
-            <a:noFill/>
-          </a:ln>
-          <a:effectLst/>
-        </p:spPr>
-        <p:style>
-          <a:lnRef idx="1">
-            <a:schemeClr val="accent1"/>
-          </a:lnRef>
-          <a:fillRef idx="3">
-            <a:schemeClr val="accent1"/>
-          </a:fillRef>
-          <a:effectRef idx="2">
-            <a:schemeClr val="accent1"/>
-          </a:effectRef>
-          <a:fontRef idx="minor">
-            <a:schemeClr val="lt1"/>
-          </a:fontRef>
-        </p:style>
-        <p:txBody>
-          <a:bodyPr rtlCol="0" anchor="ctr" lIns="0" rIns="0" tIns="0" bIns="0"/>
-          <a:lstStyle/>
-          <a:p>
-            <a:pPr algn="ctr"/>
-            <a:r>
-              <a:rPr sz="1300" b="1">
-                <a:solidFill>
-                  <a:srgbClr val="FFFFFF"/>
-                </a:solidFill>
-                <a:latin typeface="Calibri"/>
-              </a:rPr>
-              <a:t>3</a:t>
-            </a:r>
-          </a:p>
-        </p:txBody>
-      </p:sp>
-      <p:sp>
-        <p:nvSpPr>
-          <p:cNvPr id="14" name="TextBox 13"/>
-          <p:cNvSpPr txBox="1"/>
-          <p:nvPr/>
-        </p:nvSpPr>
-        <p:spPr>
-          <a:xfrm>
-            <a:off x="1143000" y="4197096"/>
-            <a:ext cx="5943600" cy="868680"/>
-          </a:xfrm>
-          <a:prstGeom prst="rect">
-            <a:avLst/>
-          </a:prstGeom>
-          <a:noFill/>
-        </p:spPr>
-        <p:txBody>
-          <a:bodyPr wrap="square" anchor="ctr" lIns="0" rIns="0" tIns="0" bIns="0"/>
-          <a:lstStyle/>
-          <a:p>
-            <a:pPr algn="l"/>
-            <a:r>
-              <a:rPr sz="1700" b="0" i="0">
-                <a:solidFill>
-                  <a:srgbClr val="202122"/>
-                </a:solidFill>
-                <a:latin typeface="Calibri"/>
-              </a:rPr>
-              <a:t>Identify the main risk for each.</a:t>
-            </a:r>
-          </a:p>
-        </p:txBody>
-      </p:sp>
-      <p:sp>
-        <p:nvSpPr>
-          <p:cNvPr id="15" name="Oval 14"/>
-          <p:cNvSpPr/>
-          <p:nvPr/>
-        </p:nvSpPr>
-        <p:spPr>
-          <a:xfrm>
-            <a:off x="548640" y="5417820"/>
-            <a:ext cx="384048" cy="384048"/>
-          </a:xfrm>
-          <a:prstGeom prst="ellipse">
-            <a:avLst/>
-          </a:prstGeom>
-          <a:solidFill>
-            <a:srgbClr val="0645AD"/>
-          </a:solidFill>
-          <a:ln>
-            <a:noFill/>
-          </a:ln>
-          <a:effectLst/>
-        </p:spPr>
-        <p:style>
-          <a:lnRef idx="1">
-            <a:schemeClr val="accent1"/>
-          </a:lnRef>
-          <a:fillRef idx="3">
-            <a:schemeClr val="accent1"/>
-          </a:fillRef>
-          <a:effectRef idx="2">
-            <a:schemeClr val="accent1"/>
-          </a:effectRef>
-          <a:fontRef idx="minor">
-            <a:schemeClr val="lt1"/>
-          </a:fontRef>
-        </p:style>
-        <p:txBody>
-          <a:bodyPr rtlCol="0" anchor="ctr" lIns="0" rIns="0" tIns="0" bIns="0"/>
-          <a:lstStyle/>
-          <a:p>
-            <a:pPr algn="ctr"/>
-            <a:r>
-              <a:rPr sz="1300" b="1">
-                <a:solidFill>
-                  <a:srgbClr val="FFFFFF"/>
-                </a:solidFill>
-                <a:latin typeface="Calibri"/>
-              </a:rPr>
-              <a:t>4</a:t>
-            </a:r>
-          </a:p>
-        </p:txBody>
-      </p:sp>
-      <p:sp>
-        <p:nvSpPr>
-          <p:cNvPr id="16" name="TextBox 15"/>
-          <p:cNvSpPr txBox="1"/>
-          <p:nvPr/>
-        </p:nvSpPr>
-        <p:spPr>
-          <a:xfrm>
-            <a:off x="1143000" y="5175504"/>
-            <a:ext cx="5943600" cy="868680"/>
-          </a:xfrm>
-          <a:prstGeom prst="rect">
-            <a:avLst/>
-          </a:prstGeom>
-          <a:noFill/>
-        </p:spPr>
-        <p:txBody>
-          <a:bodyPr wrap="square" anchor="ctr" lIns="0" rIns="0" tIns="0" bIns="0"/>
-          <a:lstStyle/>
-          <a:p>
-            <a:pPr algn="l"/>
-            <a:r>
-              <a:rPr sz="1700" b="0" i="0">
-                <a:solidFill>
-                  <a:srgbClr val="202122"/>
-                </a:solidFill>
-                <a:latin typeface="Calibri"/>
-              </a:rPr>
-              <a:t>Suggest how to reduce that risk.</a:t>
-            </a:r>
-          </a:p>
-        </p:txBody>
-      </p:sp>
-      <p:sp>
-        <p:nvSpPr>
-          <p:cNvPr id="17" name="Rounded Rectangle 16"/>
-          <p:cNvSpPr/>
-          <p:nvPr/>
-        </p:nvSpPr>
-        <p:spPr>
-          <a:xfrm>
-            <a:off x="7772400" y="1508760"/>
-            <a:ext cx="3867912" cy="4572000"/>
+            <a:off x="548640" y="3771900"/>
+            <a:ext cx="2670733" cy="960120"/>
           </a:xfrm>
           <a:prstGeom prst="roundRect">
             <a:avLst>
-              <a:gd name="adj" fmla="val 8000"/>
+              <a:gd name="adj" fmla="val 6000"/>
             </a:avLst>
           </a:prstGeom>
           <a:solidFill>
@@ -8615,14 +10128,340 @@
       </p:sp>
       <p:sp>
         <p:nvSpPr>
+          <p:cNvPr id="10" name="TextBox 9"/>
+          <p:cNvSpPr txBox="1"/>
+          <p:nvPr/>
+        </p:nvSpPr>
+        <p:spPr>
+          <a:xfrm>
+            <a:off x="685800" y="3909060"/>
+            <a:ext cx="2396413" cy="685800"/>
+          </a:xfrm>
+          <a:prstGeom prst="rect">
+            <a:avLst/>
+          </a:prstGeom>
+          <a:noFill/>
+        </p:spPr>
+        <p:txBody>
+          <a:bodyPr wrap="square" anchor="t" lIns="0" rIns="0" tIns="0" bIns="0"/>
+          <a:lstStyle/>
+          <a:p>
+            <a:pPr algn="l"/>
+            <a:r>
+              <a:rPr sz="1800" b="0" i="0">
+                <a:solidFill>
+                  <a:srgbClr val="202122"/>
+                </a:solidFill>
+                <a:latin typeface="Calibri"/>
+              </a:rPr>
+              <a:t>Decide what is needed.</a:t>
+            </a:r>
+          </a:p>
+        </p:txBody>
+      </p:sp>
+      <p:sp>
+        <p:nvSpPr>
+          <p:cNvPr id="11" name="Oval 10"/>
+          <p:cNvSpPr/>
+          <p:nvPr/>
+        </p:nvSpPr>
+        <p:spPr>
+          <a:xfrm>
+            <a:off x="4371860" y="2217420"/>
+            <a:ext cx="640080" cy="640080"/>
+          </a:xfrm>
+          <a:prstGeom prst="ellipse">
+            <a:avLst/>
+          </a:prstGeom>
+          <a:solidFill>
+            <a:srgbClr val="F2B705"/>
+          </a:solidFill>
+          <a:ln>
+            <a:noFill/>
+          </a:ln>
+          <a:effectLst/>
+        </p:spPr>
+        <p:style>
+          <a:lnRef idx="1">
+            <a:schemeClr val="accent1"/>
+          </a:lnRef>
+          <a:fillRef idx="3">
+            <a:schemeClr val="accent1"/>
+          </a:fillRef>
+          <a:effectRef idx="2">
+            <a:schemeClr val="accent1"/>
+          </a:effectRef>
+          <a:fontRef idx="minor">
+            <a:schemeClr val="lt1"/>
+          </a:fontRef>
+        </p:style>
+        <p:txBody>
+          <a:bodyPr rtlCol="0" anchor="ctr" lIns="0" rIns="0" tIns="0" bIns="0"/>
+          <a:lstStyle/>
+          <a:p>
+            <a:pPr algn="ctr"/>
+            <a:r>
+              <a:rPr sz="2000" b="1">
+                <a:solidFill>
+                  <a:srgbClr val="202122"/>
+                </a:solidFill>
+                <a:latin typeface="Calibri"/>
+              </a:rPr>
+              <a:t>2</a:t>
+            </a:r>
+          </a:p>
+        </p:txBody>
+      </p:sp>
+      <p:sp>
+        <p:nvSpPr>
+          <p:cNvPr id="12" name="TextBox 11"/>
+          <p:cNvSpPr txBox="1"/>
+          <p:nvPr/>
+        </p:nvSpPr>
+        <p:spPr>
+          <a:xfrm>
+            <a:off x="3356533" y="2994660"/>
+            <a:ext cx="2670733" cy="731520"/>
+          </a:xfrm>
+          <a:prstGeom prst="rect">
+            <a:avLst/>
+          </a:prstGeom>
+          <a:noFill/>
+        </p:spPr>
+        <p:txBody>
+          <a:bodyPr wrap="square" anchor="t" lIns="0" rIns="0" tIns="0" bIns="0"/>
+          <a:lstStyle/>
+          <a:p>
+            <a:pPr algn="ctr"/>
+            <a:r>
+              <a:rPr sz="1700" b="1" i="0">
+                <a:solidFill>
+                  <a:srgbClr val="03306E"/>
+                </a:solidFill>
+                <a:latin typeface="Calibri"/>
+              </a:rPr>
+              <a:t>Acquire</a:t>
+            </a:r>
+          </a:p>
+        </p:txBody>
+      </p:sp>
+      <p:sp>
+        <p:nvSpPr>
+          <p:cNvPr id="13" name="Rounded Rectangle 12"/>
+          <p:cNvSpPr/>
+          <p:nvPr/>
+        </p:nvSpPr>
+        <p:spPr>
+          <a:xfrm>
+            <a:off x="3356533" y="3771900"/>
+            <a:ext cx="2670733" cy="960120"/>
+          </a:xfrm>
+          <a:prstGeom prst="roundRect">
+            <a:avLst>
+              <a:gd name="adj" fmla="val 6000"/>
+            </a:avLst>
+          </a:prstGeom>
+          <a:solidFill>
+            <a:srgbClr val="EAF3FF"/>
+          </a:solidFill>
+          <a:ln>
+            <a:noFill/>
+          </a:ln>
+          <a:effectLst/>
+        </p:spPr>
+        <p:style>
+          <a:lnRef idx="1">
+            <a:schemeClr val="accent1"/>
+          </a:lnRef>
+          <a:fillRef idx="3">
+            <a:schemeClr val="accent1"/>
+          </a:fillRef>
+          <a:effectRef idx="2">
+            <a:schemeClr val="accent1"/>
+          </a:effectRef>
+          <a:fontRef idx="minor">
+            <a:schemeClr val="lt1"/>
+          </a:fontRef>
+        </p:style>
+        <p:txBody>
+          <a:bodyPr rtlCol="0" anchor="ctr"/>
+          <a:lstStyle/>
+          <a:p/>
+        </p:txBody>
+      </p:sp>
+      <p:sp>
+        <p:nvSpPr>
+          <p:cNvPr id="14" name="TextBox 13"/>
+          <p:cNvSpPr txBox="1"/>
+          <p:nvPr/>
+        </p:nvSpPr>
+        <p:spPr>
+          <a:xfrm>
+            <a:off x="3493693" y="3909060"/>
+            <a:ext cx="2396413" cy="685800"/>
+          </a:xfrm>
+          <a:prstGeom prst="rect">
+            <a:avLst/>
+          </a:prstGeom>
+          <a:noFill/>
+        </p:spPr>
+        <p:txBody>
+          <a:bodyPr wrap="square" anchor="t" lIns="0" rIns="0" tIns="0" bIns="0"/>
+          <a:lstStyle/>
+          <a:p>
+            <a:pPr algn="l"/>
+            <a:r>
+              <a:rPr sz="1800" b="0" i="0">
+                <a:solidFill>
+                  <a:srgbClr val="202122"/>
+                </a:solidFill>
+                <a:latin typeface="Calibri"/>
+              </a:rPr>
+              <a:t>Buy or build it.</a:t>
+            </a:r>
+          </a:p>
+        </p:txBody>
+      </p:sp>
+      <p:sp>
+        <p:nvSpPr>
+          <p:cNvPr id="15" name="Oval 14"/>
+          <p:cNvSpPr/>
+          <p:nvPr/>
+        </p:nvSpPr>
+        <p:spPr>
+          <a:xfrm>
+            <a:off x="7179754" y="2217420"/>
+            <a:ext cx="640080" cy="640080"/>
+          </a:xfrm>
+          <a:prstGeom prst="ellipse">
+            <a:avLst/>
+          </a:prstGeom>
+          <a:solidFill>
+            <a:srgbClr val="F2B705"/>
+          </a:solidFill>
+          <a:ln>
+            <a:noFill/>
+          </a:ln>
+          <a:effectLst/>
+        </p:spPr>
+        <p:style>
+          <a:lnRef idx="1">
+            <a:schemeClr val="accent1"/>
+          </a:lnRef>
+          <a:fillRef idx="3">
+            <a:schemeClr val="accent1"/>
+          </a:fillRef>
+          <a:effectRef idx="2">
+            <a:schemeClr val="accent1"/>
+          </a:effectRef>
+          <a:fontRef idx="minor">
+            <a:schemeClr val="lt1"/>
+          </a:fontRef>
+        </p:style>
+        <p:txBody>
+          <a:bodyPr rtlCol="0" anchor="ctr" lIns="0" rIns="0" tIns="0" bIns="0"/>
+          <a:lstStyle/>
+          <a:p>
+            <a:pPr algn="ctr"/>
+            <a:r>
+              <a:rPr sz="2000" b="1">
+                <a:solidFill>
+                  <a:srgbClr val="202122"/>
+                </a:solidFill>
+                <a:latin typeface="Calibri"/>
+              </a:rPr>
+              <a:t>3</a:t>
+            </a:r>
+          </a:p>
+        </p:txBody>
+      </p:sp>
+      <p:sp>
+        <p:nvSpPr>
+          <p:cNvPr id="16" name="TextBox 15"/>
+          <p:cNvSpPr txBox="1"/>
+          <p:nvPr/>
+        </p:nvSpPr>
+        <p:spPr>
+          <a:xfrm>
+            <a:off x="6164427" y="2994660"/>
+            <a:ext cx="2670733" cy="731520"/>
+          </a:xfrm>
+          <a:prstGeom prst="rect">
+            <a:avLst/>
+          </a:prstGeom>
+          <a:noFill/>
+        </p:spPr>
+        <p:txBody>
+          <a:bodyPr wrap="square" anchor="t" lIns="0" rIns="0" tIns="0" bIns="0"/>
+          <a:lstStyle/>
+          <a:p>
+            <a:pPr algn="ctr"/>
+            <a:r>
+              <a:rPr sz="1700" b="1" i="0">
+                <a:solidFill>
+                  <a:srgbClr val="03306E"/>
+                </a:solidFill>
+                <a:latin typeface="Calibri"/>
+              </a:rPr>
+              <a:t>Operate and maintain</a:t>
+            </a:r>
+          </a:p>
+        </p:txBody>
+      </p:sp>
+      <p:sp>
+        <p:nvSpPr>
+          <p:cNvPr id="17" name="Rounded Rectangle 16"/>
+          <p:cNvSpPr/>
+          <p:nvPr/>
+        </p:nvSpPr>
+        <p:spPr>
+          <a:xfrm>
+            <a:off x="6164427" y="3771900"/>
+            <a:ext cx="2670733" cy="960120"/>
+          </a:xfrm>
+          <a:prstGeom prst="roundRect">
+            <a:avLst>
+              <a:gd name="adj" fmla="val 6000"/>
+            </a:avLst>
+          </a:prstGeom>
+          <a:solidFill>
+            <a:srgbClr val="EAF3FF"/>
+          </a:solidFill>
+          <a:ln>
+            <a:noFill/>
+          </a:ln>
+          <a:effectLst/>
+        </p:spPr>
+        <p:style>
+          <a:lnRef idx="1">
+            <a:schemeClr val="accent1"/>
+          </a:lnRef>
+          <a:fillRef idx="3">
+            <a:schemeClr val="accent1"/>
+          </a:fillRef>
+          <a:effectRef idx="2">
+            <a:schemeClr val="accent1"/>
+          </a:effectRef>
+          <a:fontRef idx="minor">
+            <a:schemeClr val="lt1"/>
+          </a:fontRef>
+        </p:style>
+        <p:txBody>
+          <a:bodyPr rtlCol="0" anchor="ctr"/>
+          <a:lstStyle/>
+          <a:p/>
+        </p:txBody>
+      </p:sp>
+      <p:sp>
+        <p:nvSpPr>
           <p:cNvPr id="18" name="TextBox 17"/>
           <p:cNvSpPr txBox="1"/>
           <p:nvPr/>
         </p:nvSpPr>
         <p:spPr>
           <a:xfrm>
-            <a:off x="8046720" y="1737360"/>
-            <a:ext cx="3291840" cy="365760"/>
+            <a:off x="6301587" y="3909060"/>
+            <a:ext cx="2396413" cy="685800"/>
           </a:xfrm>
           <a:prstGeom prst="rect">
             <a:avLst/>
@@ -8635,27 +10474,80 @@
           <a:p>
             <a:pPr algn="l"/>
             <a:r>
-              <a:rPr sz="1300" b="1" i="0">
-                <a:solidFill>
-                  <a:srgbClr val="0645AD"/>
-                </a:solidFill>
-                <a:latin typeface="Calibri"/>
-              </a:rPr>
-              <a:t>SUCCESS CRITERIA</a:t>
-            </a:r>
-          </a:p>
-        </p:txBody>
-      </p:sp>
-      <p:sp>
-        <p:nvSpPr>
-          <p:cNvPr id="19" name="TextBox 18"/>
+              <a:rPr sz="1800" b="0" i="0">
+                <a:solidFill>
+                  <a:srgbClr val="202122"/>
+                </a:solidFill>
+                <a:latin typeface="Calibri"/>
+              </a:rPr>
+              <a:t>Use and look after it.</a:t>
+            </a:r>
+          </a:p>
+        </p:txBody>
+      </p:sp>
+      <p:sp>
+        <p:nvSpPr>
+          <p:cNvPr id="19" name="Oval 18"/>
+          <p:cNvSpPr/>
+          <p:nvPr/>
+        </p:nvSpPr>
+        <p:spPr>
+          <a:xfrm>
+            <a:off x="9987648" y="2217420"/>
+            <a:ext cx="640080" cy="640080"/>
+          </a:xfrm>
+          <a:prstGeom prst="ellipse">
+            <a:avLst/>
+          </a:prstGeom>
+          <a:solidFill>
+            <a:srgbClr val="F2B705"/>
+          </a:solidFill>
+          <a:ln>
+            <a:noFill/>
+          </a:ln>
+          <a:effectLst/>
+        </p:spPr>
+        <p:style>
+          <a:lnRef idx="1">
+            <a:schemeClr val="accent1"/>
+          </a:lnRef>
+          <a:fillRef idx="3">
+            <a:schemeClr val="accent1"/>
+          </a:fillRef>
+          <a:effectRef idx="2">
+            <a:schemeClr val="accent1"/>
+          </a:effectRef>
+          <a:fontRef idx="minor">
+            <a:schemeClr val="lt1"/>
+          </a:fontRef>
+        </p:style>
+        <p:txBody>
+          <a:bodyPr rtlCol="0" anchor="ctr" lIns="0" rIns="0" tIns="0" bIns="0"/>
+          <a:lstStyle/>
+          <a:p>
+            <a:pPr algn="ctr"/>
+            <a:r>
+              <a:rPr sz="2000" b="1">
+                <a:solidFill>
+                  <a:srgbClr val="202122"/>
+                </a:solidFill>
+                <a:latin typeface="Calibri"/>
+              </a:rPr>
+              <a:t>4</a:t>
+            </a:r>
+          </a:p>
+        </p:txBody>
+      </p:sp>
+      <p:sp>
+        <p:nvSpPr>
+          <p:cNvPr id="20" name="TextBox 19"/>
           <p:cNvSpPr txBox="1"/>
           <p:nvPr/>
         </p:nvSpPr>
         <p:spPr>
           <a:xfrm>
-            <a:off x="8046720" y="2240280"/>
-            <a:ext cx="3337560" cy="3657600"/>
+            <a:off x="8972321" y="2994660"/>
+            <a:ext cx="2670733" cy="731520"/>
           </a:xfrm>
           <a:prstGeom prst="rect">
             <a:avLst/>
@@ -8663,71 +10555,128 @@
           <a:noFill/>
         </p:spPr>
         <p:txBody>
-          <a:bodyPr wrap="square" lIns="0" rIns="0" tIns="0" bIns="0">
-            <a:spAutoFit/>
-          </a:bodyPr>
-          <a:lstStyle/>
-          <a:p>
-            <a:pPr marL="274320" indent="-274320">
-              <a:spcAft>
-                <a:spcPts val="810"/>
-              </a:spcAft>
-              <a:buClr>
-                <a:srgbClr val="0645AD"/>
-              </a:buClr>
-              <a:buFont typeface="Arial"/>
-              <a:buChar char="•"/>
-            </a:pPr>
-            <a:r>
-              <a:rPr sz="1800" b="0">
+          <a:bodyPr wrap="square" anchor="t" lIns="0" rIns="0" tIns="0" bIns="0"/>
+          <a:lstStyle/>
+          <a:p>
+            <a:pPr algn="ctr"/>
+            <a:r>
+              <a:rPr sz="1700" b="1" i="0">
+                <a:solidFill>
+                  <a:srgbClr val="03306E"/>
+                </a:solidFill>
+                <a:latin typeface="Calibri"/>
+              </a:rPr>
+              <a:t>Dispose</a:t>
+            </a:r>
+          </a:p>
+        </p:txBody>
+      </p:sp>
+      <p:sp>
+        <p:nvSpPr>
+          <p:cNvPr id="21" name="Rounded Rectangle 20"/>
+          <p:cNvSpPr/>
+          <p:nvPr/>
+        </p:nvSpPr>
+        <p:spPr>
+          <a:xfrm>
+            <a:off x="8972321" y="3771900"/>
+            <a:ext cx="2670733" cy="960120"/>
+          </a:xfrm>
+          <a:prstGeom prst="roundRect">
+            <a:avLst>
+              <a:gd name="adj" fmla="val 6000"/>
+            </a:avLst>
+          </a:prstGeom>
+          <a:solidFill>
+            <a:srgbClr val="EAF3FF"/>
+          </a:solidFill>
+          <a:ln>
+            <a:noFill/>
+          </a:ln>
+          <a:effectLst/>
+        </p:spPr>
+        <p:style>
+          <a:lnRef idx="1">
+            <a:schemeClr val="accent1"/>
+          </a:lnRef>
+          <a:fillRef idx="3">
+            <a:schemeClr val="accent1"/>
+          </a:fillRef>
+          <a:effectRef idx="2">
+            <a:schemeClr val="accent1"/>
+          </a:effectRef>
+          <a:fontRef idx="minor">
+            <a:schemeClr val="lt1"/>
+          </a:fontRef>
+        </p:style>
+        <p:txBody>
+          <a:bodyPr rtlCol="0" anchor="ctr"/>
+          <a:lstStyle/>
+          <a:p/>
+        </p:txBody>
+      </p:sp>
+      <p:sp>
+        <p:nvSpPr>
+          <p:cNvPr id="22" name="TextBox 21"/>
+          <p:cNvSpPr txBox="1"/>
+          <p:nvPr/>
+        </p:nvSpPr>
+        <p:spPr>
+          <a:xfrm>
+            <a:off x="9109481" y="3909060"/>
+            <a:ext cx="2396413" cy="685800"/>
+          </a:xfrm>
+          <a:prstGeom prst="rect">
+            <a:avLst/>
+          </a:prstGeom>
+          <a:noFill/>
+        </p:spPr>
+        <p:txBody>
+          <a:bodyPr wrap="square" anchor="t" lIns="0" rIns="0" tIns="0" bIns="0"/>
+          <a:lstStyle/>
+          <a:p>
+            <a:pPr algn="l"/>
+            <a:r>
+              <a:rPr sz="1800" b="0" i="0">
                 <a:solidFill>
                   <a:srgbClr val="202122"/>
                 </a:solidFill>
                 <a:latin typeface="Calibri"/>
               </a:rPr>
-              <a:t>Practice fits the business</a:t>
-            </a:r>
-          </a:p>
-          <a:p>
-            <a:pPr marL="274320" indent="-274320">
-              <a:spcAft>
-                <a:spcPts val="810"/>
-              </a:spcAft>
-              <a:buClr>
-                <a:srgbClr val="0645AD"/>
-              </a:buClr>
-              <a:buFont typeface="Arial"/>
-              <a:buChar char="•"/>
-            </a:pPr>
-            <a:r>
-              <a:rPr sz="1800" b="0">
-                <a:solidFill>
-                  <a:srgbClr val="202122"/>
-                </a:solidFill>
-                <a:latin typeface="Calibri"/>
-              </a:rPr>
-              <a:t>Risks realistic</a:t>
-            </a:r>
-          </a:p>
-          <a:p>
-            <a:pPr marL="274320" indent="-274320">
-              <a:spcAft>
-                <a:spcPts val="810"/>
-              </a:spcAft>
-              <a:buClr>
-                <a:srgbClr val="0645AD"/>
-              </a:buClr>
-              <a:buFont typeface="Arial"/>
-              <a:buChar char="•"/>
-            </a:pPr>
-            <a:r>
-              <a:rPr sz="1800" b="0">
-                <a:solidFill>
-                  <a:srgbClr val="202122"/>
-                </a:solidFill>
-                <a:latin typeface="Calibri"/>
-              </a:rPr>
-              <a:t>Mitigations sensible</a:t>
+              <a:t>Retire, sell or recycle it.</a:t>
+            </a:r>
+          </a:p>
+        </p:txBody>
+      </p:sp>
+      <p:sp>
+        <p:nvSpPr>
+          <p:cNvPr id="23" name="TextBox 22"/>
+          <p:cNvSpPr txBox="1"/>
+          <p:nvPr/>
+        </p:nvSpPr>
+        <p:spPr>
+          <a:xfrm>
+            <a:off x="548640" y="5006340"/>
+            <a:ext cx="11094415" cy="548640"/>
+          </a:xfrm>
+          <a:prstGeom prst="rect">
+            <a:avLst/>
+          </a:prstGeom>
+          <a:noFill/>
+        </p:spPr>
+        <p:txBody>
+          <a:bodyPr wrap="square" anchor="t" lIns="0" rIns="0" tIns="0" bIns="0"/>
+          <a:lstStyle/>
+          <a:p>
+            <a:pPr algn="l"/>
+            <a:r>
+              <a:rPr sz="1600" b="0" i="1">
+                <a:solidFill>
+                  <a:srgbClr val="54595D"/>
+                </a:solidFill>
+                <a:latin typeface="Calibri"/>
+              </a:rPr>
+              <a:t>Capacity management (MRP II, finding bottlenecks) and whole-life budgeting, including depreciation, keep assets working efficiently.</a:t>
             </a:r>
           </a:p>
         </p:txBody>
@@ -8746,7 +10695,7 @@
     <p:bg>
       <p:bgPr>
         <a:solidFill>
-          <a:srgbClr val="03306E"/>
+          <a:srgbClr val="FFFFFF"/>
         </a:solidFill>
         <a:effectLst/>
       </p:bgPr>
@@ -8782,7 +10731,7 @@
             <a:r>
               <a:rPr sz="1100" b="1" i="0">
                 <a:solidFill>
-                  <a:srgbClr val="A9C8F0"/>
+                  <a:srgbClr val="54595D"/>
                 </a:solidFill>
                 <a:latin typeface="Calibri"/>
               </a:rPr>
@@ -8815,24 +10764,90 @@
             <a:r>
               <a:rPr sz="3200" b="1" i="0">
                 <a:solidFill>
-                  <a:srgbClr val="FFFFFF"/>
+                  <a:srgbClr val="03306E"/>
                 </a:solidFill>
                 <a:latin typeface="Cambria"/>
               </a:rPr>
-              <a:t>Exit ticket</a:t>
-            </a:r>
-          </a:p>
-        </p:txBody>
-      </p:sp>
-      <p:sp>
-        <p:nvSpPr>
-          <p:cNvPr id="4" name="Oval 3"/>
+              <a:t>Quick check: Asset life cycle</a:t>
+            </a:r>
+          </a:p>
+        </p:txBody>
+      </p:sp>
+      <p:sp>
+        <p:nvSpPr>
+          <p:cNvPr id="4" name="TextBox 3"/>
+          <p:cNvSpPr txBox="1"/>
+          <p:nvPr/>
+        </p:nvSpPr>
+        <p:spPr>
+          <a:xfrm>
+            <a:off x="548640" y="6446520"/>
+            <a:ext cx="8229600" cy="274320"/>
+          </a:xfrm>
+          <a:prstGeom prst="rect">
+            <a:avLst/>
+          </a:prstGeom>
+          <a:noFill/>
+        </p:spPr>
+        <p:txBody>
+          <a:bodyPr wrap="square" anchor="t" lIns="0" rIns="0" tIns="0" bIns="0"/>
+          <a:lstStyle/>
+          <a:p>
+            <a:pPr algn="l"/>
+            <a:r>
+              <a:rPr sz="1000" b="0" i="0">
+                <a:solidFill>
+                  <a:srgbClr val="54595D"/>
+                </a:solidFill>
+                <a:latin typeface="Calibri"/>
+              </a:rPr>
+              <a:t>Design and Development for Engineering and Manufacturing T Level  ·  Stock and Asset Management</a:t>
+            </a:r>
+          </a:p>
+        </p:txBody>
+      </p:sp>
+      <p:sp>
+        <p:nvSpPr>
+          <p:cNvPr id="5" name="TextBox 4"/>
+          <p:cNvSpPr txBox="1"/>
+          <p:nvPr/>
+        </p:nvSpPr>
+        <p:spPr>
+          <a:xfrm>
+            <a:off x="10728655" y="6446520"/>
+            <a:ext cx="914400" cy="274320"/>
+          </a:xfrm>
+          <a:prstGeom prst="rect">
+            <a:avLst/>
+          </a:prstGeom>
+          <a:noFill/>
+        </p:spPr>
+        <p:txBody>
+          <a:bodyPr wrap="square" anchor="t" lIns="0" rIns="0" tIns="0" bIns="0"/>
+          <a:lstStyle/>
+          <a:p>
+            <a:pPr algn="r"/>
+            <a:r>
+              <a:rPr sz="1000" b="0" i="0">
+                <a:solidFill>
+                  <a:srgbClr val="54595D"/>
+                </a:solidFill>
+                <a:latin typeface="Calibri"/>
+              </a:rPr>
+              <a:t>9</a:t>
+            </a:r>
+          </a:p>
+        </p:txBody>
+      </p:sp>
+      <p:sp>
+        <p:nvSpPr>
+          <p:cNvPr id="6" name="Oval 5"/>
           <p:cNvSpPr/>
           <p:nvPr/>
         </p:nvSpPr>
         <p:spPr>
           <a:xfrm>
-            <a:off x="548640" y="1737360"/>
+            <a:off x="548640" y="1691640"/>
             <a:ext cx="502920" cy="502920"/>
           </a:xfrm>
           <a:prstGeom prst="ellipse">
@@ -8866,7 +10881,7 @@
           <a:p>
             <a:pPr algn="ctr"/>
             <a:r>
-              <a:rPr sz="1700" b="1">
+              <a:rPr sz="1600" b="1">
                 <a:solidFill>
                   <a:srgbClr val="202122"/>
                 </a:solidFill>
@@ -8879,14 +10894,14 @@
       </p:sp>
       <p:sp>
         <p:nvSpPr>
-          <p:cNvPr id="5" name="TextBox 4"/>
+          <p:cNvPr id="7" name="TextBox 6"/>
           <p:cNvSpPr txBox="1"/>
           <p:nvPr/>
         </p:nvSpPr>
         <p:spPr>
           <a:xfrm>
-            <a:off x="1325880" y="1645920"/>
-            <a:ext cx="6583680" cy="822960"/>
+            <a:off x="1371600" y="1645920"/>
+            <a:ext cx="10271455" cy="1188720"/>
           </a:xfrm>
           <a:prstGeom prst="rect">
             <a:avLst/>
@@ -8894,31 +10909,31 @@
           <a:noFill/>
         </p:spPr>
         <p:txBody>
-          <a:bodyPr wrap="square" anchor="ctr" lIns="0" rIns="0" tIns="0" bIns="0"/>
+          <a:bodyPr wrap="square" anchor="t" lIns="0" rIns="0" tIns="0" bIns="0"/>
           <a:lstStyle/>
           <a:p>
             <a:pPr algn="l"/>
             <a:r>
-              <a:rPr sz="2000" b="0" i="0">
-                <a:solidFill>
-                  <a:srgbClr val="FFFFFF"/>
-                </a:solidFill>
-                <a:latin typeface="Calibri"/>
-              </a:rPr>
-              <a:t>Why hold minimum stock levels?</a:t>
-            </a:r>
-          </a:p>
-        </p:txBody>
-      </p:sp>
-      <p:sp>
-        <p:nvSpPr>
-          <p:cNvPr id="6" name="Oval 5"/>
+              <a:rPr sz="2400" b="0" i="0">
+                <a:solidFill>
+                  <a:srgbClr val="202122"/>
+                </a:solidFill>
+                <a:latin typeface="Calibri"/>
+              </a:rPr>
+              <a:t>Name the four asset life cycle stages.</a:t>
+            </a:r>
+          </a:p>
+        </p:txBody>
+      </p:sp>
+      <p:sp>
+        <p:nvSpPr>
+          <p:cNvPr id="8" name="Oval 7"/>
           <p:cNvSpPr/>
           <p:nvPr/>
         </p:nvSpPr>
         <p:spPr>
           <a:xfrm>
-            <a:off x="548640" y="2697480"/>
+            <a:off x="548640" y="3108960"/>
             <a:ext cx="502920" cy="502920"/>
           </a:xfrm>
           <a:prstGeom prst="ellipse">
@@ -8952,7 +10967,7 @@
           <a:p>
             <a:pPr algn="ctr"/>
             <a:r>
-              <a:rPr sz="1700" b="1">
+              <a:rPr sz="1600" b="1">
                 <a:solidFill>
                   <a:srgbClr val="202122"/>
                 </a:solidFill>
@@ -8965,14 +10980,14 @@
       </p:sp>
       <p:sp>
         <p:nvSpPr>
-          <p:cNvPr id="7" name="TextBox 6"/>
+          <p:cNvPr id="9" name="TextBox 8"/>
           <p:cNvSpPr txBox="1"/>
           <p:nvPr/>
         </p:nvSpPr>
         <p:spPr>
           <a:xfrm>
-            <a:off x="1325880" y="2606040"/>
-            <a:ext cx="6583680" cy="822960"/>
+            <a:off x="1371600" y="3063240"/>
+            <a:ext cx="10271455" cy="1188720"/>
           </a:xfrm>
           <a:prstGeom prst="rect">
             <a:avLst/>
@@ -8980,31 +10995,31 @@
           <a:noFill/>
         </p:spPr>
         <p:txBody>
-          <a:bodyPr wrap="square" anchor="ctr" lIns="0" rIns="0" tIns="0" bIns="0"/>
+          <a:bodyPr wrap="square" anchor="t" lIns="0" rIns="0" tIns="0" bIns="0"/>
           <a:lstStyle/>
           <a:p>
             <a:pPr algn="l"/>
             <a:r>
-              <a:rPr sz="2000" b="0" i="0">
-                <a:solidFill>
-                  <a:srgbClr val="FFFFFF"/>
-                </a:solidFill>
-                <a:latin typeface="Calibri"/>
-              </a:rPr>
-              <a:t>How does depreciation affect asset decisions?</a:t>
-            </a:r>
-          </a:p>
-        </p:txBody>
-      </p:sp>
-      <p:sp>
-        <p:nvSpPr>
-          <p:cNvPr id="8" name="Oval 7"/>
+              <a:rPr sz="2400" b="0" i="0">
+                <a:solidFill>
+                  <a:srgbClr val="202122"/>
+                </a:solidFill>
+                <a:latin typeface="Calibri"/>
+              </a:rPr>
+              <a:t>What is a bottleneck?</a:t>
+            </a:r>
+          </a:p>
+        </p:txBody>
+      </p:sp>
+      <p:sp>
+        <p:nvSpPr>
+          <p:cNvPr id="10" name="Oval 9"/>
           <p:cNvSpPr/>
           <p:nvPr/>
         </p:nvSpPr>
         <p:spPr>
           <a:xfrm>
-            <a:off x="548640" y="3657600"/>
+            <a:off x="548640" y="4526280"/>
             <a:ext cx="502920" cy="502920"/>
           </a:xfrm>
           <a:prstGeom prst="ellipse">
@@ -9038,7 +11053,7 @@
           <a:p>
             <a:pPr algn="ctr"/>
             <a:r>
-              <a:rPr sz="1700" b="1">
+              <a:rPr sz="1600" b="1">
                 <a:solidFill>
                   <a:srgbClr val="202122"/>
                 </a:solidFill>
@@ -9047,83 +11062,6 @@
               <a:t>3</a:t>
             </a:r>
           </a:p>
-        </p:txBody>
-      </p:sp>
-      <p:sp>
-        <p:nvSpPr>
-          <p:cNvPr id="9" name="TextBox 8"/>
-          <p:cNvSpPr txBox="1"/>
-          <p:nvPr/>
-        </p:nvSpPr>
-        <p:spPr>
-          <a:xfrm>
-            <a:off x="1325880" y="3566160"/>
-            <a:ext cx="6583680" cy="822960"/>
-          </a:xfrm>
-          <a:prstGeom prst="rect">
-            <a:avLst/>
-          </a:prstGeom>
-          <a:noFill/>
-        </p:spPr>
-        <p:txBody>
-          <a:bodyPr wrap="square" anchor="ctr" lIns="0" rIns="0" tIns="0" bIns="0"/>
-          <a:lstStyle/>
-          <a:p>
-            <a:pPr algn="l"/>
-            <a:r>
-              <a:rPr sz="2000" b="0" i="0">
-                <a:solidFill>
-                  <a:srgbClr val="FFFFFF"/>
-                </a:solidFill>
-                <a:latin typeface="Calibri"/>
-              </a:rPr>
-              <a:t>When is made-to-order the best choice?</a:t>
-            </a:r>
-          </a:p>
-        </p:txBody>
-      </p:sp>
-      <p:sp>
-        <p:nvSpPr>
-          <p:cNvPr id="10" name="Rounded Rectangle 9"/>
-          <p:cNvSpPr/>
-          <p:nvPr/>
-        </p:nvSpPr>
-        <p:spPr>
-          <a:xfrm>
-            <a:off x="8229600" y="1645920"/>
-            <a:ext cx="3410712" cy="2926080"/>
-          </a:xfrm>
-          <a:prstGeom prst="roundRect">
-            <a:avLst>
-              <a:gd name="adj" fmla="val 8000"/>
-            </a:avLst>
-          </a:prstGeom>
-          <a:solidFill>
-            <a:srgbClr val="0645AD"/>
-          </a:solidFill>
-          <a:ln>
-            <a:noFill/>
-          </a:ln>
-          <a:effectLst/>
-        </p:spPr>
-        <p:style>
-          <a:lnRef idx="1">
-            <a:schemeClr val="accent1"/>
-          </a:lnRef>
-          <a:fillRef idx="3">
-            <a:schemeClr val="accent1"/>
-          </a:fillRef>
-          <a:effectRef idx="2">
-            <a:schemeClr val="accent1"/>
-          </a:effectRef>
-          <a:fontRef idx="minor">
-            <a:schemeClr val="lt1"/>
-          </a:fontRef>
-        </p:style>
-        <p:txBody>
-          <a:bodyPr rtlCol="0" anchor="ctr"/>
-          <a:lstStyle/>
-          <a:p/>
         </p:txBody>
       </p:sp>
       <p:sp>
@@ -9134,8 +11072,8 @@
         </p:nvSpPr>
         <p:spPr>
           <a:xfrm>
-            <a:off x="8503920" y="1874519"/>
-            <a:ext cx="2926080" cy="365760"/>
+            <a:off x="1371600" y="4480560"/>
+            <a:ext cx="10271455" cy="1188720"/>
           </a:xfrm>
           <a:prstGeom prst="rect">
             <a:avLst/>
@@ -9148,13 +11086,13 @@
           <a:p>
             <a:pPr algn="l"/>
             <a:r>
-              <a:rPr sz="1300" b="1" i="0">
-                <a:solidFill>
-                  <a:srgbClr val="A9C8F0"/>
-                </a:solidFill>
-                <a:latin typeface="Calibri"/>
-              </a:rPr>
-              <a:t>REVISE THIS TOPIC</a:t>
+              <a:rPr sz="2400" b="0" i="0">
+                <a:solidFill>
+                  <a:srgbClr val="202122"/>
+                </a:solidFill>
+                <a:latin typeface="Calibri"/>
+              </a:rPr>
+              <a:t>Why use whole-life costing?</a:t>
             </a:r>
           </a:p>
         </p:txBody>
@@ -9167,8 +11105,8 @@
         </p:nvSpPr>
         <p:spPr>
           <a:xfrm>
-            <a:off x="8503920" y="2286000"/>
-            <a:ext cx="2926080" cy="548640"/>
+            <a:off x="548640" y="5852160"/>
+            <a:ext cx="11094415" cy="365760"/>
           </a:xfrm>
           <a:prstGeom prst="rect">
             <a:avLst/>
@@ -9181,79 +11119,13 @@
           <a:p>
             <a:pPr algn="l"/>
             <a:r>
-              <a:rPr sz="1400" b="0" i="0">
-                <a:solidFill>
-                  <a:srgbClr val="FFFFFF"/>
-                </a:solidFill>
-                <a:latin typeface="Calibri"/>
-              </a:rPr>
-              <a:t>Revision notes for this lesson are on the study wiki:</a:t>
-            </a:r>
-          </a:p>
-        </p:txBody>
-      </p:sp>
-      <p:sp>
-        <p:nvSpPr>
-          <p:cNvPr id="13" name="TextBox 12"/>
-          <p:cNvSpPr txBox="1"/>
-          <p:nvPr/>
-        </p:nvSpPr>
-        <p:spPr>
-          <a:xfrm>
-            <a:off x="8503920" y="2926080"/>
-            <a:ext cx="2926080" cy="1463040"/>
-          </a:xfrm>
-          <a:prstGeom prst="rect">
-            <a:avLst/>
-          </a:prstGeom>
-          <a:noFill/>
-        </p:spPr>
-        <p:txBody>
-          <a:bodyPr wrap="square" anchor="t" lIns="0" rIns="0" tIns="0" bIns="0"/>
-          <a:lstStyle/>
-          <a:p>
-            <a:pPr algn="l"/>
-            <a:r>
-              <a:rPr sz="2000" b="1" i="0">
-                <a:solidFill>
-                  <a:srgbClr val="FFFFFF"/>
-                </a:solidFill>
-                <a:latin typeface="Cambria"/>
-              </a:rPr>
-              <a:t>Engineering Core, Part 2</a:t>
-            </a:r>
-          </a:p>
-        </p:txBody>
-      </p:sp>
-      <p:sp>
-        <p:nvSpPr>
-          <p:cNvPr id="14" name="TextBox 13"/>
-          <p:cNvSpPr txBox="1"/>
-          <p:nvPr/>
-        </p:nvSpPr>
-        <p:spPr>
-          <a:xfrm>
-            <a:off x="548640" y="5669280"/>
-            <a:ext cx="11094415" cy="548640"/>
-          </a:xfrm>
-          <a:prstGeom prst="rect">
-            <a:avLst/>
-          </a:prstGeom>
-          <a:noFill/>
-        </p:spPr>
-        <p:txBody>
-          <a:bodyPr wrap="square" anchor="t" lIns="0" rIns="0" tIns="0" bIns="0"/>
-          <a:lstStyle/>
-          <a:p>
-            <a:pPr algn="l"/>
-            <a:r>
-              <a:rPr sz="1200" b="0" i="0">
-                <a:solidFill>
-                  <a:srgbClr val="A9C8F0"/>
-                </a:solidFill>
-                <a:latin typeface="Calibri"/>
-              </a:rPr>
-              <a:t>https://lana6478.github.io/T-level-Design-Development-Engineering-Manufacturing/#/01-core-component/02-engineering-core-part2.md</a:t>
+              <a:rPr sz="1300" b="0" i="1">
+                <a:solidFill>
+                  <a:srgbClr val="54595D"/>
+                </a:solidFill>
+                <a:latin typeface="Calibri"/>
+              </a:rPr>
+              <a:t>Answer on mini whiteboards or in your book. Answers are in the speaker notes.</a:t>
             </a:r>
           </a:p>
         </p:txBody>
